--- a/assets/slides/temporal-representation.pptx
+++ b/assets/slides/temporal-representation.pptx
@@ -2,13 +2,13 @@
 <file path=ppt/presentation.xml><?xml version="1.0" encoding="utf-8"?>
 <p:presentation xmlns:p="http://schemas.openxmlformats.org/presentationml/2006/main">
   <p:sldMasterIdLst>
-    <p:sldMasterId xmlns:r="http://schemas.openxmlformats.org/officeDocument/2006/relationships" id="2147483648" r:id="R7a1fb34ff18040b0"/>
+    <p:sldMasterId xmlns:r="http://schemas.openxmlformats.org/officeDocument/2006/relationships" id="2147483648" r:id="R57be7c9ba07f4148"/>
   </p:sldMasterIdLst>
   <p:notesMasterIdLst>
-    <p:notesMasterId xmlns:r="http://schemas.openxmlformats.org/officeDocument/2006/relationships" r:id="R4debc689fc534f68"/>
+    <p:notesMasterId xmlns:r="http://schemas.openxmlformats.org/officeDocument/2006/relationships" r:id="R8e5705abf1044cd6"/>
   </p:notesMasterIdLst>
   <p:sldIdLst>
-    <p:sldId xmlns:r="http://schemas.openxmlformats.org/officeDocument/2006/relationships" id="256" r:id="R0ff596a262604f1d"/>
+    <p:sldId xmlns:r="http://schemas.openxmlformats.org/officeDocument/2006/relationships" id="256" r:id="R4ea6003a747a4fdf"/>
   </p:sldIdLst>
   <p:sldSz cx="12192000" cy="6858000"/>
   <p:notesSz cx="6858000" cy="9144000"/>
@@ -442,7 +442,7 @@
           <a:lstStyle xmlns:a="http://schemas.openxmlformats.org/drawingml/2006/main"/>
           <a:p xmlns:a="http://schemas.openxmlformats.org/drawingml/2006/main">
             <a:r>
-              <a:t>Research directions supplied by Zipeng Wu. Temporal Representation is the umbrella term. Connections show research relationships, not a fixed processing pipeline. Frequency conversion retains the broad wording supplied by the author. Classification is current work. Project context: https://zipengwu365.github.io/research.html ; https://systems-mechanobiology.github.io/DeTime/ ; https://github.com/ZipengWu365/TSDecompose-Benchmark ; https://zipengwu365.github.io/EchoTime/ .</a:t>
+              <a:t>Research directions supplied by Zipeng Wu. Temporal Representation is the umbrella term. Connections show research relationships, not a fixed processing pipeline. Frequency conversion retains the broad wording supplied by the author. Classification is current work. PAA, SAX, and SAA-SAX are representative methods from the literature, not works attributed to Zipeng Wu. PAA represents segments by their means. SAX discretizes PAA values into symbols. SAA-SAX uses slope-based aggregation before discretization. References: Lin et al., A Symbolic Representation of Time Series, with Implications for Streaming Algorithms (2003), https://www.cs.ucr.edu/~stelo/papers/DMKD03.pdf ; Pappa et al., Slopewise Aggregate Approximation SAX: keeping the trend of a time series (2021), https://doi.org/10.1109/SSCI50451.2021.9660130 . Project context: https://zipengwu365.github.io/research.html ; https://systems-mechanobiology.github.io/DeTime/ ; https://github.com/ZipengWu365/TSDecompose-Benchmark ; https://zipengwu365.github.io/EchoTime/ .</a:t>
             </a:r>
           </a:p>
         </p:txBody>
@@ -510,7 +510,7 @@
   </p:cSld>
   <p:clrMap bg1="lt1" tx1="dk1" bg2="lt2" tx2="dk2" accent1="accent1" accent2="accent2" accent3="accent3" accent4="accent4" accent5="accent5" accent6="accent6" hlink="hlink" folHlink="folHlink"/>
   <p:sldLayoutIdLst>
-    <p:sldLayoutId xmlns:r="http://schemas.openxmlformats.org/officeDocument/2006/relationships" id="2147483649" r:id="R19baa68bea8c49e4"/>
+    <p:sldLayoutId xmlns:r="http://schemas.openxmlformats.org/officeDocument/2006/relationships" id="2147483649" r:id="Rbe3b0827449145cd"/>
   </p:sldLayoutIdLst>
   <p:txStyles>
     <p:titleStyle>
@@ -1058,10 +1058,10 @@
       </p:grpSpPr>
       <p:sp>
         <p:nvSpPr>
-          <p:cNvPr id="35" name="left-branch">
-            <a:extLst xmlns:a="http://schemas.openxmlformats.org/drawingml/2006/main">
-              <a:ext uri="{FF2B5EF4-FFF2-40B4-BE49-F238E27FC236}">
-                <a16:creationId xmlns:a16="http://schemas.microsoft.com/office/drawing/2014/main" id="{E54A11BB-4053-421E-9AE3-FD3DDEF012EA}"/>
+          <p:cNvPr id="38" name="left-branch">
+            <a:extLst xmlns:a="http://schemas.openxmlformats.org/drawingml/2006/main">
+              <a:ext uri="{FF2B5EF4-FFF2-40B4-BE49-F238E27FC236}">
+                <a16:creationId xmlns:a16="http://schemas.microsoft.com/office/drawing/2014/main" id="{C713CFBE-9CC0-4CCE-B3F2-26E94CACB52E}"/>
               </a:ext>
             </a:extLst>
           </p:cNvPr>
@@ -1092,7 +1092,7 @@
           <p:cNvPr id="2" name="right-branch">
             <a:extLst xmlns:a="http://schemas.openxmlformats.org/drawingml/2006/main">
               <a:ext uri="{FF2B5EF4-FFF2-40B4-BE49-F238E27FC236}">
-                <a16:creationId xmlns:a16="http://schemas.microsoft.com/office/drawing/2014/main" id="{2040461A-CCA9-42D3-9A0F-77ACD6FEBE47}"/>
+                <a16:creationId xmlns:a16="http://schemas.microsoft.com/office/drawing/2014/main" id="{09F00097-5052-48AE-A748-47D9E7F19174}"/>
               </a:ext>
             </a:extLst>
           </p:cNvPr>
@@ -1123,7 +1123,7 @@
           <p:cNvPr id="3" name="left-core-connection">
             <a:extLst xmlns:a="http://schemas.openxmlformats.org/drawingml/2006/main">
               <a:ext uri="{FF2B5EF4-FFF2-40B4-BE49-F238E27FC236}">
-                <a16:creationId xmlns:a16="http://schemas.microsoft.com/office/drawing/2014/main" id="{FC1ECE75-892E-4C8D-9A39-17A47FA1AEA9}"/>
+                <a16:creationId xmlns:a16="http://schemas.microsoft.com/office/drawing/2014/main" id="{F2A310FA-0324-4919-891D-FE3FD0F0E10C}"/>
               </a:ext>
             </a:extLst>
           </p:cNvPr>
@@ -1154,7 +1154,7 @@
           <p:cNvPr id="4" name="right-core-connection">
             <a:extLst xmlns:a="http://schemas.openxmlformats.org/drawingml/2006/main">
               <a:ext uri="{FF2B5EF4-FFF2-40B4-BE49-F238E27FC236}">
-                <a16:creationId xmlns:a16="http://schemas.microsoft.com/office/drawing/2014/main" id="{766DDCCD-96B0-4E5D-864E-582A2D918893}"/>
+                <a16:creationId xmlns:a16="http://schemas.microsoft.com/office/drawing/2014/main" id="{E9BD7CEE-A2BD-4417-9D02-2B6B27B7F584}"/>
               </a:ext>
             </a:extLst>
           </p:cNvPr>
@@ -1185,7 +1185,7 @@
           <p:cNvPr id="5" name="decomposition-connection">
             <a:extLst xmlns:a="http://schemas.openxmlformats.org/drawingml/2006/main">
               <a:ext uri="{FF2B5EF4-FFF2-40B4-BE49-F238E27FC236}">
-                <a16:creationId xmlns:a16="http://schemas.microsoft.com/office/drawing/2014/main" id="{BA429826-9633-4406-A0AA-6DFDAF926729}"/>
+                <a16:creationId xmlns:a16="http://schemas.microsoft.com/office/drawing/2014/main" id="{1743FE8B-16FE-4D90-92C3-D7253781E1B0}"/>
               </a:ext>
             </a:extLst>
           </p:cNvPr>
@@ -1216,7 +1216,7 @@
           <p:cNvPr id="6" name="left-connection-0">
             <a:extLst xmlns:a="http://schemas.openxmlformats.org/drawingml/2006/main">
               <a:ext uri="{FF2B5EF4-FFF2-40B4-BE49-F238E27FC236}">
-                <a16:creationId xmlns:a16="http://schemas.microsoft.com/office/drawing/2014/main" id="{6D68E7F8-A175-4097-A38C-3497F28CAAB7}"/>
+                <a16:creationId xmlns:a16="http://schemas.microsoft.com/office/drawing/2014/main" id="{BB427F0E-A327-4310-AE58-3FB1E6D90A91}"/>
               </a:ext>
             </a:extLst>
           </p:cNvPr>
@@ -1247,7 +1247,7 @@
           <p:cNvPr id="7" name="right-connection-0">
             <a:extLst xmlns:a="http://schemas.openxmlformats.org/drawingml/2006/main">
               <a:ext uri="{FF2B5EF4-FFF2-40B4-BE49-F238E27FC236}">
-                <a16:creationId xmlns:a16="http://schemas.microsoft.com/office/drawing/2014/main" id="{B1DC064E-817D-4953-AC4D-52050E8B973D}"/>
+                <a16:creationId xmlns:a16="http://schemas.microsoft.com/office/drawing/2014/main" id="{808716AC-4E1C-4542-AFD6-1107035D89C6}"/>
               </a:ext>
             </a:extLst>
           </p:cNvPr>
@@ -1278,7 +1278,7 @@
           <p:cNvPr id="8" name="left-connection-1">
             <a:extLst xmlns:a="http://schemas.openxmlformats.org/drawingml/2006/main">
               <a:ext uri="{FF2B5EF4-FFF2-40B4-BE49-F238E27FC236}">
-                <a16:creationId xmlns:a16="http://schemas.microsoft.com/office/drawing/2014/main" id="{619C895A-28C7-4131-88B7-6EBB25DDE1FC}"/>
+                <a16:creationId xmlns:a16="http://schemas.microsoft.com/office/drawing/2014/main" id="{187C922A-349B-461A-982E-AC1D2122E51A}"/>
               </a:ext>
             </a:extLst>
           </p:cNvPr>
@@ -1309,7 +1309,7 @@
           <p:cNvPr id="9" name="right-connection-1">
             <a:extLst xmlns:a="http://schemas.openxmlformats.org/drawingml/2006/main">
               <a:ext uri="{FF2B5EF4-FFF2-40B4-BE49-F238E27FC236}">
-                <a16:creationId xmlns:a16="http://schemas.microsoft.com/office/drawing/2014/main" id="{4A3B6668-E851-40BE-A185-54DDF840E21C}"/>
+                <a16:creationId xmlns:a16="http://schemas.microsoft.com/office/drawing/2014/main" id="{B3A3DE80-BF2F-431E-99F5-DF0C58041A0B}"/>
               </a:ext>
             </a:extLst>
           </p:cNvPr>
@@ -1340,7 +1340,7 @@
           <p:cNvPr id="10" name="left-connection-2">
             <a:extLst xmlns:a="http://schemas.openxmlformats.org/drawingml/2006/main">
               <a:ext uri="{FF2B5EF4-FFF2-40B4-BE49-F238E27FC236}">
-                <a16:creationId xmlns:a16="http://schemas.microsoft.com/office/drawing/2014/main" id="{E9EA387C-7354-495F-A71F-A11354D3D822}"/>
+                <a16:creationId xmlns:a16="http://schemas.microsoft.com/office/drawing/2014/main" id="{AF14ADF6-788D-4E1F-AB5A-205B370523DE}"/>
               </a:ext>
             </a:extLst>
           </p:cNvPr>
@@ -1371,7 +1371,7 @@
           <p:cNvPr id="11" name="right-connection-2">
             <a:extLst xmlns:a="http://schemas.openxmlformats.org/drawingml/2006/main">
               <a:ext uri="{FF2B5EF4-FFF2-40B4-BE49-F238E27FC236}">
-                <a16:creationId xmlns:a16="http://schemas.microsoft.com/office/drawing/2014/main" id="{895305D6-62FC-4DFE-9D7D-63CDF07112C3}"/>
+                <a16:creationId xmlns:a16="http://schemas.microsoft.com/office/drawing/2014/main" id="{DFAA9936-ED78-473F-8793-D2B850E109C8}"/>
               </a:ext>
             </a:extLst>
           </p:cNvPr>
@@ -1402,7 +1402,7 @@
           <p:cNvPr id="12" name="temporal-representation">
             <a:extLst xmlns:a="http://schemas.openxmlformats.org/drawingml/2006/main">
               <a:ext uri="{FF2B5EF4-FFF2-40B4-BE49-F238E27FC236}">
-                <a16:creationId xmlns:a16="http://schemas.microsoft.com/office/drawing/2014/main" id="{07E61E89-EDF3-4F32-8BD9-7E1590E217E9}"/>
+                <a16:creationId xmlns:a16="http://schemas.microsoft.com/office/drawing/2014/main" id="{2E16DBB3-282E-4276-9AD8-4D9605B1D3DA}"/>
               </a:ext>
             </a:extLst>
           </p:cNvPr>
@@ -1435,7 +1435,7 @@
           <p:cNvPr id="13" name="core-label">
             <a:extLst xmlns:a="http://schemas.openxmlformats.org/drawingml/2006/main">
               <a:ext uri="{FF2B5EF4-FFF2-40B4-BE49-F238E27FC236}">
-                <a16:creationId xmlns:a16="http://schemas.microsoft.com/office/drawing/2014/main" id="{405C8219-F5D8-412F-BCF1-F71D55C28D0D}"/>
+                <a16:creationId xmlns:a16="http://schemas.microsoft.com/office/drawing/2014/main" id="{F13903FD-4371-4A78-9DC6-2CFFA8151500}"/>
               </a:ext>
             </a:extLst>
           </p:cNvPr>
@@ -1515,7 +1515,7 @@
           <p:cNvPr id="14" name="symbolic">
             <a:extLst xmlns:a="http://schemas.openxmlformats.org/drawingml/2006/main">
               <a:ext uri="{FF2B5EF4-FFF2-40B4-BE49-F238E27FC236}">
-                <a16:creationId xmlns:a16="http://schemas.microsoft.com/office/drawing/2014/main" id="{9D9E3FA8-A10D-4F32-A660-EE425C15B1DD}"/>
+                <a16:creationId xmlns:a16="http://schemas.microsoft.com/office/drawing/2014/main" id="{7E6D3CC2-014F-456B-B27F-76E4A04F9768}"/>
               </a:ext>
             </a:extLst>
           </p:cNvPr>
@@ -1548,7 +1548,7 @@
           <p:cNvPr id="15" name="symbolic-label">
             <a:extLst xmlns:a="http://schemas.openxmlformats.org/drawingml/2006/main">
               <a:ext uri="{FF2B5EF4-FFF2-40B4-BE49-F238E27FC236}">
-                <a16:creationId xmlns:a16="http://schemas.microsoft.com/office/drawing/2014/main" id="{2A683F18-B458-4890-BA76-8F35A70A2E31}"/>
+                <a16:creationId xmlns:a16="http://schemas.microsoft.com/office/drawing/2014/main" id="{4BC3F3F4-93EF-461F-9834-6CDFB09E6827}"/>
               </a:ext>
             </a:extLst>
           </p:cNvPr>
@@ -1605,18 +1605,18 @@
           <p:cNvPr id="16" name="symbolic-detail-0">
             <a:extLst xmlns:a="http://schemas.openxmlformats.org/drawingml/2006/main">
               <a:ext uri="{FF2B5EF4-FFF2-40B4-BE49-F238E27FC236}">
-                <a16:creationId xmlns:a16="http://schemas.microsoft.com/office/drawing/2014/main" id="{D2E1E300-A0CA-4EB6-B8A3-1B74861A4803}"/>
-              </a:ext>
-            </a:extLst>
-          </p:cNvPr>
-          <p:cNvSpPr>
-            <a:spLocks xmlns:a="http://schemas.openxmlformats.org/drawingml/2006/main" noGrp="1"/>
-          </p:cNvSpPr>
-          <p:nvPr/>
-        </p:nvSpPr>
-        <p:spPr>
-          <a:xfrm xmlns:a="http://schemas.openxmlformats.org/drawingml/2006/main">
-            <a:off x="495300" y="1428750"/>
+                <a16:creationId xmlns:a16="http://schemas.microsoft.com/office/drawing/2014/main" id="{971EE153-1D44-495F-91F4-BA2EC8EE30F5}"/>
+              </a:ext>
+            </a:extLst>
+          </p:cNvPr>
+          <p:cNvSpPr>
+            <a:spLocks xmlns:a="http://schemas.openxmlformats.org/drawingml/2006/main" noGrp="1"/>
+          </p:cNvSpPr>
+          <p:nvPr/>
+        </p:nvSpPr>
+        <p:spPr>
+          <a:xfrm xmlns:a="http://schemas.openxmlformats.org/drawingml/2006/main">
+            <a:off x="495300" y="1371600"/>
             <a:ext cx="3009900" cy="257175"/>
           </a:xfrm>
           <a:prstGeom xmlns:a="http://schemas.openxmlformats.org/drawingml/2006/main" prst="rect">
@@ -1652,6 +1652,63 @@
                 <a:ea typeface="Arial"/>
                 <a:cs typeface="Arial"/>
               </a:rPr>
+              <a:t>e.g., SAX, SAA-SAX</a:t>
+            </a:r>
+          </a:p>
+        </p:txBody>
+      </p:sp>
+      <p:sp>
+        <p:nvSpPr>
+          <p:cNvPr id="17" name="symbolic-detail-1">
+            <a:extLst xmlns:a="http://schemas.openxmlformats.org/drawingml/2006/main">
+              <a:ext uri="{FF2B5EF4-FFF2-40B4-BE49-F238E27FC236}">
+                <a16:creationId xmlns:a16="http://schemas.microsoft.com/office/drawing/2014/main" id="{0B5E98EB-2588-458F-89C4-1499DB3CBCDA}"/>
+              </a:ext>
+            </a:extLst>
+          </p:cNvPr>
+          <p:cNvSpPr>
+            <a:spLocks xmlns:a="http://schemas.openxmlformats.org/drawingml/2006/main" noGrp="1"/>
+          </p:cNvSpPr>
+          <p:nvPr/>
+        </p:nvSpPr>
+        <p:spPr>
+          <a:xfrm xmlns:a="http://schemas.openxmlformats.org/drawingml/2006/main">
+            <a:off x="495300" y="1647825"/>
+            <a:ext cx="3009900" cy="257175"/>
+          </a:xfrm>
+          <a:prstGeom xmlns:a="http://schemas.openxmlformats.org/drawingml/2006/main" prst="rect">
+            <a:avLst/>
+          </a:prstGeom>
+          <a:noFill xmlns:a="http://schemas.openxmlformats.org/drawingml/2006/main"/>
+          <a:ln xmlns:a="http://schemas.openxmlformats.org/drawingml/2006/main" w="0">
+            <a:noFill/>
+          </a:ln>
+        </p:spPr>
+        <p:txBody>
+          <a:bodyPr xmlns:a="http://schemas.openxmlformats.org/drawingml/2006/main" wrap="none" lIns="0" tIns="0" rIns="0" bIns="0" anchor="ctr">
+            <a:noAutofit/>
+          </a:bodyPr>
+          <a:lstStyle xmlns:a="http://schemas.openxmlformats.org/drawingml/2006/main"/>
+          <a:p xmlns:a="http://schemas.openxmlformats.org/drawingml/2006/main">
+            <a:pPr algn="ctr">
+              <a:defRPr sz="1575" b="0">
+                <a:solidFill>
+                  <a:srgbClr val="000000"/>
+                </a:solidFill>
+                <a:latin typeface="Arial"/>
+                <a:ea typeface="Arial"/>
+                <a:cs typeface="Arial"/>
+              </a:defRPr>
+            </a:pPr>
+            <a:r>
+              <a:rPr sz="1575" b="0">
+                <a:solidFill>
+                  <a:srgbClr val="000000"/>
+                </a:solidFill>
+                <a:latin typeface="Arial"/>
+                <a:ea typeface="Arial"/>
+                <a:cs typeface="Arial"/>
+              </a:rPr>
               <a:t>Temporal tokenization</a:t>
             </a:r>
           </a:p>
@@ -1659,10 +1716,10 @@
       </p:sp>
       <p:sp>
         <p:nvSpPr>
-          <p:cNvPr id="17" name="compression">
-            <a:extLst xmlns:a="http://schemas.openxmlformats.org/drawingml/2006/main">
-              <a:ext uri="{FF2B5EF4-FFF2-40B4-BE49-F238E27FC236}">
-                <a16:creationId xmlns:a16="http://schemas.microsoft.com/office/drawing/2014/main" id="{F8475F2A-8CA7-4782-9DEC-84F4937BE53E}"/>
+          <p:cNvPr id="18" name="compression">
+            <a:extLst xmlns:a="http://schemas.openxmlformats.org/drawingml/2006/main">
+              <a:ext uri="{FF2B5EF4-FFF2-40B4-BE49-F238E27FC236}">
+                <a16:creationId xmlns:a16="http://schemas.microsoft.com/office/drawing/2014/main" id="{6BCA0279-A424-40DA-95F8-9820E782130C}"/>
               </a:ext>
             </a:extLst>
           </p:cNvPr>
@@ -1692,21 +1749,21 @@
       </p:sp>
       <p:sp>
         <p:nvSpPr>
-          <p:cNvPr id="18" name="compression-label">
-            <a:extLst xmlns:a="http://schemas.openxmlformats.org/drawingml/2006/main">
-              <a:ext uri="{FF2B5EF4-FFF2-40B4-BE49-F238E27FC236}">
-                <a16:creationId xmlns:a16="http://schemas.microsoft.com/office/drawing/2014/main" id="{DE200622-23F9-4BEF-8E57-B7D384205493}"/>
-              </a:ext>
-            </a:extLst>
-          </p:cNvPr>
-          <p:cNvSpPr>
-            <a:spLocks xmlns:a="http://schemas.openxmlformats.org/drawingml/2006/main" noGrp="1"/>
-          </p:cNvSpPr>
-          <p:nvPr/>
-        </p:nvSpPr>
-        <p:spPr>
-          <a:xfrm xmlns:a="http://schemas.openxmlformats.org/drawingml/2006/main">
-            <a:off x="495300" y="3138488"/>
+          <p:cNvPr id="19" name="compression-label">
+            <a:extLst xmlns:a="http://schemas.openxmlformats.org/drawingml/2006/main">
+              <a:ext uri="{FF2B5EF4-FFF2-40B4-BE49-F238E27FC236}">
+                <a16:creationId xmlns:a16="http://schemas.microsoft.com/office/drawing/2014/main" id="{816C9DA9-0B88-4537-8A29-0FF7A518F3CA}"/>
+              </a:ext>
+            </a:extLst>
+          </p:cNvPr>
+          <p:cNvSpPr>
+            <a:spLocks xmlns:a="http://schemas.openxmlformats.org/drawingml/2006/main" noGrp="1"/>
+          </p:cNvSpPr>
+          <p:nvPr/>
+        </p:nvSpPr>
+        <p:spPr>
+          <a:xfrm xmlns:a="http://schemas.openxmlformats.org/drawingml/2006/main">
+            <a:off x="495300" y="2847975"/>
             <a:ext cx="3009900" cy="342900"/>
           </a:xfrm>
           <a:prstGeom xmlns:a="http://schemas.openxmlformats.org/drawingml/2006/main" prst="rect">
@@ -1749,10 +1806,124 @@
       </p:sp>
       <p:sp>
         <p:nvSpPr>
-          <p:cNvPr id="19" name="frequency">
-            <a:extLst xmlns:a="http://schemas.openxmlformats.org/drawingml/2006/main">
-              <a:ext uri="{FF2B5EF4-FFF2-40B4-BE49-F238E27FC236}">
-                <a16:creationId xmlns:a16="http://schemas.microsoft.com/office/drawing/2014/main" id="{B87BCE35-2139-446F-BEF7-950C03F910AC}"/>
+          <p:cNvPr id="20" name="compression-detail-0">
+            <a:extLst xmlns:a="http://schemas.openxmlformats.org/drawingml/2006/main">
+              <a:ext uri="{FF2B5EF4-FFF2-40B4-BE49-F238E27FC236}">
+                <a16:creationId xmlns:a16="http://schemas.microsoft.com/office/drawing/2014/main" id="{A84A8E18-9F32-48EB-A1B8-553F5E7D2757}"/>
+              </a:ext>
+            </a:extLst>
+          </p:cNvPr>
+          <p:cNvSpPr>
+            <a:spLocks xmlns:a="http://schemas.openxmlformats.org/drawingml/2006/main" noGrp="1"/>
+          </p:cNvSpPr>
+          <p:nvPr/>
+        </p:nvSpPr>
+        <p:spPr>
+          <a:xfrm xmlns:a="http://schemas.openxmlformats.org/drawingml/2006/main">
+            <a:off x="495300" y="3276600"/>
+            <a:ext cx="3009900" cy="257175"/>
+          </a:xfrm>
+          <a:prstGeom xmlns:a="http://schemas.openxmlformats.org/drawingml/2006/main" prst="rect">
+            <a:avLst/>
+          </a:prstGeom>
+          <a:noFill xmlns:a="http://schemas.openxmlformats.org/drawingml/2006/main"/>
+          <a:ln xmlns:a="http://schemas.openxmlformats.org/drawingml/2006/main" w="0">
+            <a:noFill/>
+          </a:ln>
+        </p:spPr>
+        <p:txBody>
+          <a:bodyPr xmlns:a="http://schemas.openxmlformats.org/drawingml/2006/main" wrap="none" lIns="0" tIns="0" rIns="0" bIns="0" anchor="ctr">
+            <a:noAutofit/>
+          </a:bodyPr>
+          <a:lstStyle xmlns:a="http://schemas.openxmlformats.org/drawingml/2006/main"/>
+          <a:p xmlns:a="http://schemas.openxmlformats.org/drawingml/2006/main">
+            <a:pPr algn="ctr">
+              <a:defRPr sz="1575" b="0">
+                <a:solidFill>
+                  <a:srgbClr val="000000"/>
+                </a:solidFill>
+                <a:latin typeface="Arial"/>
+                <a:ea typeface="Arial"/>
+                <a:cs typeface="Arial"/>
+              </a:defRPr>
+            </a:pPr>
+            <a:r>
+              <a:rPr sz="1575" b="0">
+                <a:solidFill>
+                  <a:srgbClr val="000000"/>
+                </a:solidFill>
+                <a:latin typeface="Arial"/>
+                <a:ea typeface="Arial"/>
+                <a:cs typeface="Arial"/>
+              </a:rPr>
+              <a:t>Aggregation and approximation</a:t>
+            </a:r>
+          </a:p>
+        </p:txBody>
+      </p:sp>
+      <p:sp>
+        <p:nvSpPr>
+          <p:cNvPr id="21" name="compression-detail-1">
+            <a:extLst xmlns:a="http://schemas.openxmlformats.org/drawingml/2006/main">
+              <a:ext uri="{FF2B5EF4-FFF2-40B4-BE49-F238E27FC236}">
+                <a16:creationId xmlns:a16="http://schemas.microsoft.com/office/drawing/2014/main" id="{AB877DB0-AE5E-44B0-AB6F-8B1524368C48}"/>
+              </a:ext>
+            </a:extLst>
+          </p:cNvPr>
+          <p:cNvSpPr>
+            <a:spLocks xmlns:a="http://schemas.openxmlformats.org/drawingml/2006/main" noGrp="1"/>
+          </p:cNvSpPr>
+          <p:nvPr/>
+        </p:nvSpPr>
+        <p:spPr>
+          <a:xfrm xmlns:a="http://schemas.openxmlformats.org/drawingml/2006/main">
+            <a:off x="495300" y="3552825"/>
+            <a:ext cx="3009900" cy="257175"/>
+          </a:xfrm>
+          <a:prstGeom xmlns:a="http://schemas.openxmlformats.org/drawingml/2006/main" prst="rect">
+            <a:avLst/>
+          </a:prstGeom>
+          <a:noFill xmlns:a="http://schemas.openxmlformats.org/drawingml/2006/main"/>
+          <a:ln xmlns:a="http://schemas.openxmlformats.org/drawingml/2006/main" w="0">
+            <a:noFill/>
+          </a:ln>
+        </p:spPr>
+        <p:txBody>
+          <a:bodyPr xmlns:a="http://schemas.openxmlformats.org/drawingml/2006/main" wrap="none" lIns="0" tIns="0" rIns="0" bIns="0" anchor="ctr">
+            <a:noAutofit/>
+          </a:bodyPr>
+          <a:lstStyle xmlns:a="http://schemas.openxmlformats.org/drawingml/2006/main"/>
+          <a:p xmlns:a="http://schemas.openxmlformats.org/drawingml/2006/main">
+            <a:pPr algn="ctr">
+              <a:defRPr sz="1575" b="0">
+                <a:solidFill>
+                  <a:srgbClr val="000000"/>
+                </a:solidFill>
+                <a:latin typeface="Arial"/>
+                <a:ea typeface="Arial"/>
+                <a:cs typeface="Arial"/>
+              </a:defRPr>
+            </a:pPr>
+            <a:r>
+              <a:rPr sz="1575" b="0">
+                <a:solidFill>
+                  <a:srgbClr val="000000"/>
+                </a:solidFill>
+                <a:latin typeface="Arial"/>
+                <a:ea typeface="Arial"/>
+                <a:cs typeface="Arial"/>
+              </a:rPr>
+              <a:t>e.g., PAA, SAX, SAA-SAX</a:t>
+            </a:r>
+          </a:p>
+        </p:txBody>
+      </p:sp>
+      <p:sp>
+        <p:nvSpPr>
+          <p:cNvPr id="22" name="frequency">
+            <a:extLst xmlns:a="http://schemas.openxmlformats.org/drawingml/2006/main">
+              <a:ext uri="{FF2B5EF4-FFF2-40B4-BE49-F238E27FC236}">
+                <a16:creationId xmlns:a16="http://schemas.microsoft.com/office/drawing/2014/main" id="{FB5F2FCA-8CFF-495E-B92D-F018F03E7792}"/>
               </a:ext>
             </a:extLst>
           </p:cNvPr>
@@ -1782,10 +1953,10 @@
       </p:sp>
       <p:sp>
         <p:nvSpPr>
-          <p:cNvPr id="20" name="frequency-label">
-            <a:extLst xmlns:a="http://schemas.openxmlformats.org/drawingml/2006/main">
-              <a:ext uri="{FF2B5EF4-FFF2-40B4-BE49-F238E27FC236}">
-                <a16:creationId xmlns:a16="http://schemas.microsoft.com/office/drawing/2014/main" id="{78EF1FAE-1341-41D2-9C1C-C836C00D7859}"/>
+          <p:cNvPr id="23" name="frequency-label">
+            <a:extLst xmlns:a="http://schemas.openxmlformats.org/drawingml/2006/main">
+              <a:ext uri="{FF2B5EF4-FFF2-40B4-BE49-F238E27FC236}">
+                <a16:creationId xmlns:a16="http://schemas.microsoft.com/office/drawing/2014/main" id="{38A63B3E-E111-4AA0-B365-C74B452590FA}"/>
               </a:ext>
             </a:extLst>
           </p:cNvPr>
@@ -1839,10 +2010,10 @@
       </p:sp>
       <p:sp>
         <p:nvSpPr>
-          <p:cNvPr id="21" name="similarity">
-            <a:extLst xmlns:a="http://schemas.openxmlformats.org/drawingml/2006/main">
-              <a:ext uri="{FF2B5EF4-FFF2-40B4-BE49-F238E27FC236}">
-                <a16:creationId xmlns:a16="http://schemas.microsoft.com/office/drawing/2014/main" id="{9E44A7CE-F0A3-4830-87C9-343877383711}"/>
+          <p:cNvPr id="24" name="similarity">
+            <a:extLst xmlns:a="http://schemas.openxmlformats.org/drawingml/2006/main">
+              <a:ext uri="{FF2B5EF4-FFF2-40B4-BE49-F238E27FC236}">
+                <a16:creationId xmlns:a16="http://schemas.microsoft.com/office/drawing/2014/main" id="{6BDBB74B-BA66-4E57-8356-D59CA7E75D97}"/>
               </a:ext>
             </a:extLst>
           </p:cNvPr>
@@ -1872,10 +2043,10 @@
       </p:sp>
       <p:sp>
         <p:nvSpPr>
-          <p:cNvPr id="22" name="similarity-label">
-            <a:extLst xmlns:a="http://schemas.openxmlformats.org/drawingml/2006/main">
-              <a:ext uri="{FF2B5EF4-FFF2-40B4-BE49-F238E27FC236}">
-                <a16:creationId xmlns:a16="http://schemas.microsoft.com/office/drawing/2014/main" id="{F3A3A82D-8E92-47CE-B796-D36D06DD807B}"/>
+          <p:cNvPr id="25" name="similarity-label">
+            <a:extLst xmlns:a="http://schemas.openxmlformats.org/drawingml/2006/main">
+              <a:ext uri="{FF2B5EF4-FFF2-40B4-BE49-F238E27FC236}">
+                <a16:creationId xmlns:a16="http://schemas.microsoft.com/office/drawing/2014/main" id="{62AFE795-93E0-4072-BB82-216B3D3595CD}"/>
               </a:ext>
             </a:extLst>
           </p:cNvPr>
@@ -1929,10 +2100,10 @@
       </p:sp>
       <p:sp>
         <p:nvSpPr>
-          <p:cNvPr id="23" name="similarity-detail-0">
-            <a:extLst xmlns:a="http://schemas.openxmlformats.org/drawingml/2006/main">
-              <a:ext uri="{FF2B5EF4-FFF2-40B4-BE49-F238E27FC236}">
-                <a16:creationId xmlns:a16="http://schemas.microsoft.com/office/drawing/2014/main" id="{F55159F0-1E2C-439A-B8BC-91A2629E75BC}"/>
+          <p:cNvPr id="26" name="similarity-detail-0">
+            <a:extLst xmlns:a="http://schemas.openxmlformats.org/drawingml/2006/main">
+              <a:ext uri="{FF2B5EF4-FFF2-40B4-BE49-F238E27FC236}">
+                <a16:creationId xmlns:a16="http://schemas.microsoft.com/office/drawing/2014/main" id="{6BD6B866-DD7C-4204-A2C1-60815907FC45}"/>
               </a:ext>
             </a:extLst>
           </p:cNvPr>
@@ -1986,10 +2157,10 @@
       </p:sp>
       <p:sp>
         <p:nvSpPr>
-          <p:cNvPr id="24" name="forecasting">
-            <a:extLst xmlns:a="http://schemas.openxmlformats.org/drawingml/2006/main">
-              <a:ext uri="{FF2B5EF4-FFF2-40B4-BE49-F238E27FC236}">
-                <a16:creationId xmlns:a16="http://schemas.microsoft.com/office/drawing/2014/main" id="{61D9BD4E-57B5-4146-88FB-44284D0B1710}"/>
+          <p:cNvPr id="27" name="forecasting">
+            <a:extLst xmlns:a="http://schemas.openxmlformats.org/drawingml/2006/main">
+              <a:ext uri="{FF2B5EF4-FFF2-40B4-BE49-F238E27FC236}">
+                <a16:creationId xmlns:a16="http://schemas.microsoft.com/office/drawing/2014/main" id="{8E3FC92D-19CF-45EB-98D0-5F5E6604BBC8}"/>
               </a:ext>
             </a:extLst>
           </p:cNvPr>
@@ -2019,10 +2190,10 @@
       </p:sp>
       <p:sp>
         <p:nvSpPr>
-          <p:cNvPr id="25" name="forecasting-label">
-            <a:extLst xmlns:a="http://schemas.openxmlformats.org/drawingml/2006/main">
-              <a:ext uri="{FF2B5EF4-FFF2-40B4-BE49-F238E27FC236}">
-                <a16:creationId xmlns:a16="http://schemas.microsoft.com/office/drawing/2014/main" id="{7A5C3443-C5B0-4BDD-83EC-14FFF9E1A21F}"/>
+          <p:cNvPr id="28" name="forecasting-label">
+            <a:extLst xmlns:a="http://schemas.openxmlformats.org/drawingml/2006/main">
+              <a:ext uri="{FF2B5EF4-FFF2-40B4-BE49-F238E27FC236}">
+                <a16:creationId xmlns:a16="http://schemas.microsoft.com/office/drawing/2014/main" id="{B5EC96EC-E6FB-443B-B4E1-E989FD59A5C9}"/>
               </a:ext>
             </a:extLst>
           </p:cNvPr>
@@ -2076,10 +2247,10 @@
       </p:sp>
       <p:sp>
         <p:nvSpPr>
-          <p:cNvPr id="26" name="forecasting-detail-0">
-            <a:extLst xmlns:a="http://schemas.openxmlformats.org/drawingml/2006/main">
-              <a:ext uri="{FF2B5EF4-FFF2-40B4-BE49-F238E27FC236}">
-                <a16:creationId xmlns:a16="http://schemas.microsoft.com/office/drawing/2014/main" id="{DA3D25DC-0B54-4B81-902C-4B2C4C087350}"/>
+          <p:cNvPr id="29" name="forecasting-detail-0">
+            <a:extLst xmlns:a="http://schemas.openxmlformats.org/drawingml/2006/main">
+              <a:ext uri="{FF2B5EF4-FFF2-40B4-BE49-F238E27FC236}">
+                <a16:creationId xmlns:a16="http://schemas.microsoft.com/office/drawing/2014/main" id="{878AFE96-9F6A-4163-969A-DD7C7172DCC8}"/>
               </a:ext>
             </a:extLst>
           </p:cNvPr>
@@ -2133,10 +2304,10 @@
       </p:sp>
       <p:sp>
         <p:nvSpPr>
-          <p:cNvPr id="27" name="forecasting-detail-1">
-            <a:extLst xmlns:a="http://schemas.openxmlformats.org/drawingml/2006/main">
-              <a:ext uri="{FF2B5EF4-FFF2-40B4-BE49-F238E27FC236}">
-                <a16:creationId xmlns:a16="http://schemas.microsoft.com/office/drawing/2014/main" id="{0AA4B695-8A44-4D52-BC77-4934E7BB2242}"/>
+          <p:cNvPr id="30" name="forecasting-detail-1">
+            <a:extLst xmlns:a="http://schemas.openxmlformats.org/drawingml/2006/main">
+              <a:ext uri="{FF2B5EF4-FFF2-40B4-BE49-F238E27FC236}">
+                <a16:creationId xmlns:a16="http://schemas.microsoft.com/office/drawing/2014/main" id="{7557BB4A-1DD0-4388-92EB-B21DE78F1314}"/>
               </a:ext>
             </a:extLst>
           </p:cNvPr>
@@ -2190,10 +2361,10 @@
       </p:sp>
       <p:sp>
         <p:nvSpPr>
-          <p:cNvPr id="28" name="classification">
-            <a:extLst xmlns:a="http://schemas.openxmlformats.org/drawingml/2006/main">
-              <a:ext uri="{FF2B5EF4-FFF2-40B4-BE49-F238E27FC236}">
-                <a16:creationId xmlns:a16="http://schemas.microsoft.com/office/drawing/2014/main" id="{E75279EB-EDD1-47F9-91B6-0278FC8C99DE}"/>
+          <p:cNvPr id="31" name="classification">
+            <a:extLst xmlns:a="http://schemas.openxmlformats.org/drawingml/2006/main">
+              <a:ext uri="{FF2B5EF4-FFF2-40B4-BE49-F238E27FC236}">
+                <a16:creationId xmlns:a16="http://schemas.microsoft.com/office/drawing/2014/main" id="{DD9747FB-F239-45EC-8068-E14B4E7F69CB}"/>
               </a:ext>
             </a:extLst>
           </p:cNvPr>
@@ -2223,10 +2394,10 @@
       </p:sp>
       <p:sp>
         <p:nvSpPr>
-          <p:cNvPr id="29" name="classification-label">
-            <a:extLst xmlns:a="http://schemas.openxmlformats.org/drawingml/2006/main">
-              <a:ext uri="{FF2B5EF4-FFF2-40B4-BE49-F238E27FC236}">
-                <a16:creationId xmlns:a16="http://schemas.microsoft.com/office/drawing/2014/main" id="{26FDD168-116A-4D8E-A2D7-194915196BAE}"/>
+          <p:cNvPr id="32" name="classification-label">
+            <a:extLst xmlns:a="http://schemas.openxmlformats.org/drawingml/2006/main">
+              <a:ext uri="{FF2B5EF4-FFF2-40B4-BE49-F238E27FC236}">
+                <a16:creationId xmlns:a16="http://schemas.microsoft.com/office/drawing/2014/main" id="{5D6715FD-3C8A-4C54-9032-6C379B92190C}"/>
               </a:ext>
             </a:extLst>
           </p:cNvPr>
@@ -2280,10 +2451,10 @@
       </p:sp>
       <p:sp>
         <p:nvSpPr>
-          <p:cNvPr id="30" name="classification-detail-0">
-            <a:extLst xmlns:a="http://schemas.openxmlformats.org/drawingml/2006/main">
-              <a:ext uri="{FF2B5EF4-FFF2-40B4-BE49-F238E27FC236}">
-                <a16:creationId xmlns:a16="http://schemas.microsoft.com/office/drawing/2014/main" id="{7FEB3219-DDC3-4538-A903-1D6CCF2631FF}"/>
+          <p:cNvPr id="33" name="classification-detail-0">
+            <a:extLst xmlns:a="http://schemas.openxmlformats.org/drawingml/2006/main">
+              <a:ext uri="{FF2B5EF4-FFF2-40B4-BE49-F238E27FC236}">
+                <a16:creationId xmlns:a16="http://schemas.microsoft.com/office/drawing/2014/main" id="{71FC8874-464F-4737-88FA-586E1DD5D473}"/>
               </a:ext>
             </a:extLst>
           </p:cNvPr>
@@ -2337,10 +2508,10 @@
       </p:sp>
       <p:sp>
         <p:nvSpPr>
-          <p:cNvPr id="31" name="decomposition">
-            <a:extLst xmlns:a="http://schemas.openxmlformats.org/drawingml/2006/main">
-              <a:ext uri="{FF2B5EF4-FFF2-40B4-BE49-F238E27FC236}">
-                <a16:creationId xmlns:a16="http://schemas.microsoft.com/office/drawing/2014/main" id="{505564E5-45C5-48C0-8720-9E24BA9C36F7}"/>
+          <p:cNvPr id="34" name="decomposition">
+            <a:extLst xmlns:a="http://schemas.openxmlformats.org/drawingml/2006/main">
+              <a:ext uri="{FF2B5EF4-FFF2-40B4-BE49-F238E27FC236}">
+                <a16:creationId xmlns:a16="http://schemas.microsoft.com/office/drawing/2014/main" id="{0DE5A755-2089-4416-BCF1-2B85F5250C23}"/>
               </a:ext>
             </a:extLst>
           </p:cNvPr>
@@ -2370,10 +2541,10 @@
       </p:sp>
       <p:sp>
         <p:nvSpPr>
-          <p:cNvPr id="32" name="decomposition-label">
-            <a:extLst xmlns:a="http://schemas.openxmlformats.org/drawingml/2006/main">
-              <a:ext uri="{FF2B5EF4-FFF2-40B4-BE49-F238E27FC236}">
-                <a16:creationId xmlns:a16="http://schemas.microsoft.com/office/drawing/2014/main" id="{E633390D-CC9E-402B-8E37-8F09F7DFB2A7}"/>
+          <p:cNvPr id="35" name="decomposition-label">
+            <a:extLst xmlns:a="http://schemas.openxmlformats.org/drawingml/2006/main">
+              <a:ext uri="{FF2B5EF4-FFF2-40B4-BE49-F238E27FC236}">
+                <a16:creationId xmlns:a16="http://schemas.microsoft.com/office/drawing/2014/main" id="{1F0DA29E-3723-4D62-B7B7-420873747538}"/>
               </a:ext>
             </a:extLst>
           </p:cNvPr>
@@ -2427,10 +2598,10 @@
       </p:sp>
       <p:sp>
         <p:nvSpPr>
-          <p:cNvPr id="33" name="decomposition-detail-0">
-            <a:extLst xmlns:a="http://schemas.openxmlformats.org/drawingml/2006/main">
-              <a:ext uri="{FF2B5EF4-FFF2-40B4-BE49-F238E27FC236}">
-                <a16:creationId xmlns:a16="http://schemas.microsoft.com/office/drawing/2014/main" id="{324CD105-CD5D-4B58-B192-D2FC47C01691}"/>
+          <p:cNvPr id="36" name="decomposition-detail-0">
+            <a:extLst xmlns:a="http://schemas.openxmlformats.org/drawingml/2006/main">
+              <a:ext uri="{FF2B5EF4-FFF2-40B4-BE49-F238E27FC236}">
+                <a16:creationId xmlns:a16="http://schemas.microsoft.com/office/drawing/2014/main" id="{91ACD5F2-714F-4D7E-9F95-B9E0645AC7B6}"/>
               </a:ext>
             </a:extLst>
           </p:cNvPr>
@@ -2484,10 +2655,10 @@
       </p:sp>
       <p:sp>
         <p:nvSpPr>
-          <p:cNvPr id="34" name="decomposition-detail-1">
-            <a:extLst xmlns:a="http://schemas.openxmlformats.org/drawingml/2006/main">
-              <a:ext uri="{FF2B5EF4-FFF2-40B4-BE49-F238E27FC236}">
-                <a16:creationId xmlns:a16="http://schemas.microsoft.com/office/drawing/2014/main" id="{507FF84B-7BE9-46D6-A284-7FF2C629AD44}"/>
+          <p:cNvPr id="37" name="decomposition-detail-1">
+            <a:extLst xmlns:a="http://schemas.openxmlformats.org/drawingml/2006/main">
+              <a:ext uri="{FF2B5EF4-FFF2-40B4-BE49-F238E27FC236}">
+                <a16:creationId xmlns:a16="http://schemas.microsoft.com/office/drawing/2014/main" id="{C9DAE67D-E040-402D-BC93-878A2887249A}"/>
               </a:ext>
             </a:extLst>
           </p:cNvPr>
@@ -2542,7 +2713,7 @@
     </p:spTree>
     <p:extLst>
       <p:ext uri="{BB962C8B-B14F-4D97-AF65-F5344CB8AC3E}">
-        <p14:creationId xmlns:p14="http://schemas.microsoft.com/office/powerpoint/2010/main" val="1581558783"/>
+        <p14:creationId xmlns:p14="http://schemas.microsoft.com/office/powerpoint/2010/main" val="777473811"/>
       </p:ext>
     </p:extLst>
   </p:cSld>

--- a/assets/slides/temporal-representation.pptx
+++ b/assets/slides/temporal-representation.pptx
@@ -2,15 +2,16 @@
 <file path=ppt/presentation.xml><?xml version="1.0" encoding="utf-8"?>
 <p:presentation xmlns:p="http://schemas.openxmlformats.org/presentationml/2006/main">
   <p:sldMasterIdLst>
-    <p:sldMasterId xmlns:r="http://schemas.openxmlformats.org/officeDocument/2006/relationships" id="2147483648" r:id="R57be7c9ba07f4148"/>
+    <p:sldMasterId xmlns:r="http://schemas.openxmlformats.org/officeDocument/2006/relationships" id="2147483648" r:id="Re35eb1b8cee742c8"/>
   </p:sldMasterIdLst>
   <p:notesMasterIdLst>
-    <p:notesMasterId xmlns:r="http://schemas.openxmlformats.org/officeDocument/2006/relationships" r:id="R8e5705abf1044cd6"/>
+    <p:notesMasterId xmlns:r="http://schemas.openxmlformats.org/officeDocument/2006/relationships" r:id="R65f0b6293e5949a7"/>
   </p:notesMasterIdLst>
   <p:sldIdLst>
-    <p:sldId xmlns:r="http://schemas.openxmlformats.org/officeDocument/2006/relationships" id="256" r:id="R4ea6003a747a4fdf"/>
+    <p:sldId xmlns:r="http://schemas.openxmlformats.org/officeDocument/2006/relationships" id="256" r:id="R24df7eb7f8974c1d"/>
+    <p:sldId xmlns:r="http://schemas.openxmlformats.org/officeDocument/2006/relationships" id="257" r:id="R649a1d3c9c514d8b"/>
   </p:sldIdLst>
-  <p:sldSz cx="12192000" cy="6858000"/>
+  <p:sldSz cx="15240000" cy="8572500"/>
   <p:notesSz cx="6858000" cy="9144000"/>
 </p:presentation>
 </file>
@@ -442,7 +443,77 @@
           <a:lstStyle xmlns:a="http://schemas.openxmlformats.org/drawingml/2006/main"/>
           <a:p xmlns:a="http://schemas.openxmlformats.org/drawingml/2006/main">
             <a:r>
-              <a:t>Research directions supplied by Zipeng Wu. Temporal Representation is the umbrella term. Connections show research relationships, not a fixed processing pipeline. Frequency conversion retains the broad wording supplied by the author. Classification is current work. PAA, SAX, and SAA-SAX are representative methods from the literature, not works attributed to Zipeng Wu. PAA represents segments by their means. SAX discretizes PAA values into symbols. SAA-SAX uses slope-based aggregation before discretization. References: Lin et al., A Symbolic Representation of Time Series, with Implications for Streaming Algorithms (2003), https://www.cs.ucr.edu/~stelo/papers/DMKD03.pdf ; Pappa et al., Slopewise Aggregate Approximation SAX: keeping the trend of a time series (2021), https://doi.org/10.1109/SSCI50451.2021.9660130 . Project context: https://zipengwu365.github.io/research.html ; https://systems-mechanobiology.github.io/DeTime/ ; https://github.com/ZipengWu365/TSDecompose-Benchmark ; https://zipengwu365.github.io/EchoTime/ .</a:t>
+              <a:t>Sources supplied by Zipeng Wu: MRes_Thesis_Time_Series_Representation 0808Zipeng Wu2pm.pdf, Definitions 3.1–3.3 (printed pp. 60–62), composition (pp. 62–66), evaluation properties (p. 70), task objectives (p. 72), compression and reconstruction (pp. 77–78), RP and RQA (pp. 47–48). PhD_Thesis_Time_Series_Representation.pdf, Chapters 2–7, representation forms (pp. 2–3), SAA (pp. 11–12), SAA-SAX (p. 20), statistical features (pp. 91–92), Matrix Profile (p. 103), Shapelet Transform (pp. 106–107). Conceptual synthesis of the supplied manuscripts. The five properties are evaluation dimensions, not universal guarantees. Families can overlap and compose. Commutativity concerns operator order. Generic method names are literature examples, not methods attributed to Zipeng Wu. Learned encoders fall within the operator definition; foundation/world-model applications extend the surveyed scope. Project descriptions: https://systems-mechanobiology.github.io/DeTime/ ; https://github.com/ZipengWu365/TSDecompose-Benchmark ; https://zipengwu365.github.io/EchoTime/ ; https://zipengwu365.github.io/research.html .</a:t>
+            </a:r>
+          </a:p>
+        </p:txBody>
+      </p:sp>
+      <p:sp>
+        <p:nvSpPr>
+          <p:cNvPr id="4" name="Slide Number Placeholder 3"/>
+          <p:cNvSpPr>
+            <a:spLocks xmlns:a="http://schemas.openxmlformats.org/drawingml/2006/main" noGrp="1"/>
+          </p:cNvSpPr>
+          <p:nvPr>
+            <p:ph type="sldNum" idx="5"/>
+          </p:nvPr>
+        </p:nvSpPr>
+        <p:spPr/>
+        <p:txBody>
+          <a:bodyPr xmlns:a="http://schemas.openxmlformats.org/drawingml/2006/main"/>
+          <a:lstStyle xmlns:a="http://schemas.openxmlformats.org/drawingml/2006/main"/>
+          <a:p xmlns:a="http://schemas.openxmlformats.org/drawingml/2006/main"/>
+        </p:txBody>
+      </p:sp>
+    </p:spTree>
+  </p:cSld>
+  <p:clrMapOvr>
+    <a:masterClrMapping xmlns:a="http://schemas.openxmlformats.org/drawingml/2006/main"/>
+  </p:clrMapOvr>
+</p:notes>
+</file>
+
+<file path=ppt/notesSlides/notesSlide2.xml><?xml version="1.0" encoding="utf-8"?>
+<p:notes xmlns:p="http://schemas.openxmlformats.org/presentationml/2006/main">
+  <p:cSld>
+    <p:spTree>
+      <p:nvGrpSpPr>
+        <p:cNvPr id="1" name=""/>
+        <p:cNvGrpSpPr/>
+        <p:nvPr/>
+      </p:nvGrpSpPr>
+      <p:grpSpPr>
+        <a:xfrm xmlns:a="http://schemas.openxmlformats.org/drawingml/2006/main"/>
+      </p:grpSpPr>
+      <p:sp>
+        <p:nvSpPr>
+          <p:cNvPr id="2" name="Slide Image Placeholder 1"/>
+          <p:cNvSpPr>
+            <a:spLocks xmlns:a="http://schemas.openxmlformats.org/drawingml/2006/main" noGrp="1"/>
+          </p:cNvSpPr>
+          <p:nvPr>
+            <p:ph type="sldImg" idx="0"/>
+          </p:nvPr>
+        </p:nvSpPr>
+        <p:spPr/>
+      </p:sp>
+      <p:sp>
+        <p:nvSpPr>
+          <p:cNvPr id="3" name="Notes Placeholder 2"/>
+          <p:cNvSpPr>
+            <a:spLocks xmlns:a="http://schemas.openxmlformats.org/drawingml/2006/main" noGrp="1"/>
+          </p:cNvSpPr>
+          <p:nvPr>
+            <p:ph type="body" idx="1"/>
+          </p:nvPr>
+        </p:nvSpPr>
+        <p:spPr/>
+        <p:txBody>
+          <a:bodyPr xmlns:a="http://schemas.openxmlformats.org/drawingml/2006/main"/>
+          <a:lstStyle xmlns:a="http://schemas.openxmlformats.org/drawingml/2006/main"/>
+          <a:p xmlns:a="http://schemas.openxmlformats.org/drawingml/2006/main">
+            <a:r>
+              <a:t>Sources supplied by Zipeng Wu: MRes_Thesis_Time_Series_Representation 0808Zipeng Wu2pm.pdf, Definitions 3.1–3.3 (printed pp. 60–62), composition (pp. 62–66), evaluation properties (p. 70), task objectives (p. 72), compression and reconstruction (pp. 77–78), RP and RQA (pp. 47–48). PhD_Thesis_Time_Series_Representation.pdf, Chapters 2–7, representation forms (pp. 2–3), SAA (pp. 11–12), SAA-SAX (p. 20), statistical features (pp. 91–92), Matrix Profile (p. 103), Shapelet Transform (pp. 106–107). Conceptual synthesis of the supplied manuscripts. The five properties are evaluation dimensions, not universal guarantees. Families can overlap and compose. Commutativity concerns operator order. Generic method names are literature examples, not methods attributed to Zipeng Wu. Learned encoders fall within the operator definition; foundation/world-model applications extend the surveyed scope. Project descriptions: https://systems-mechanobiology.github.io/DeTime/ ; https://github.com/ZipengWu365/TSDecompose-Benchmark ; https://zipengwu365.github.io/EchoTime/ ; https://zipengwu365.github.io/research.html . SAA-SAX is supported by the PhD manuscript and Pappa et al., Slopewise Aggregate Approximation SAX: keeping the trend of a time series, 2021, https://doi.org/10.1109/SSCI50451.2021.9660130 . Connections read left to right. PAA and SAA are intermediate numerical representations. The middle boxes name the additional operators. The right boxes show the resulting symbolic representation.</a:t>
             </a:r>
           </a:p>
         </p:txBody>
@@ -510,7 +581,7 @@
   </p:cSld>
   <p:clrMap bg1="lt1" tx1="dk1" bg2="lt2" tx2="dk2" accent1="accent1" accent2="accent2" accent3="accent3" accent4="accent4" accent5="accent5" accent6="accent6" hlink="hlink" folHlink="folHlink"/>
   <p:sldLayoutIdLst>
-    <p:sldLayoutId xmlns:r="http://schemas.openxmlformats.org/officeDocument/2006/relationships" id="2147483649" r:id="Rbe3b0827449145cd"/>
+    <p:sldLayoutId xmlns:r="http://schemas.openxmlformats.org/officeDocument/2006/relationships" id="2147483649" r:id="R044885d1d2ce44d1"/>
   </p:sldLayoutIdLst>
   <p:txStyles>
     <p:titleStyle>
@@ -1058,28 +1129,30 @@
       </p:grpSpPr>
       <p:sp>
         <p:nvSpPr>
-          <p:cNvPr id="38" name="left-branch">
-            <a:extLst xmlns:a="http://schemas.openxmlformats.org/drawingml/2006/main">
-              <a:ext uri="{FF2B5EF4-FFF2-40B4-BE49-F238E27FC236}">
-                <a16:creationId xmlns:a16="http://schemas.microsoft.com/office/drawing/2014/main" id="{C713CFBE-9CC0-4CCE-B3F2-26E94CACB52E}"/>
-              </a:ext>
-            </a:extLst>
-          </p:cNvPr>
-          <p:cNvSpPr>
-            <a:spLocks xmlns:a="http://schemas.openxmlformats.org/drawingml/2006/main" noGrp="1"/>
-          </p:cNvSpPr>
-          <p:nvPr/>
-        </p:nvSpPr>
-        <p:spPr>
-          <a:xfrm xmlns:a="http://schemas.openxmlformats.org/drawingml/2006/main">
-            <a:off x="4024313" y="1404938"/>
-            <a:ext cx="0" cy="3810000"/>
-          </a:xfrm>
-          <a:prstGeom xmlns:a="http://schemas.openxmlformats.org/drawingml/2006/main" prst="line">
-            <a:avLst/>
-          </a:prstGeom>
-          <a:noFill xmlns:a="http://schemas.openxmlformats.org/drawingml/2006/main"/>
-          <a:ln xmlns:a="http://schemas.openxmlformats.org/drawingml/2006/main" w="15240">
+          <p:cNvPr id="56" name="temporal-representation">
+            <a:extLst xmlns:a="http://schemas.openxmlformats.org/drawingml/2006/main">
+              <a:ext uri="{FF2B5EF4-FFF2-40B4-BE49-F238E27FC236}">
+                <a16:creationId xmlns:a16="http://schemas.microsoft.com/office/drawing/2014/main" id="{4CFFD7FE-9CA9-473A-A8B0-0CA9D3DD839C}"/>
+              </a:ext>
+            </a:extLst>
+          </p:cNvPr>
+          <p:cNvSpPr>
+            <a:spLocks xmlns:a="http://schemas.openxmlformats.org/drawingml/2006/main" noGrp="1"/>
+          </p:cNvSpPr>
+          <p:nvPr/>
+        </p:nvSpPr>
+        <p:spPr>
+          <a:xfrm xmlns:a="http://schemas.openxmlformats.org/drawingml/2006/main">
+            <a:off x="4572000" y="171450"/>
+            <a:ext cx="6096000" cy="685800"/>
+          </a:xfrm>
+          <a:prstGeom xmlns:a="http://schemas.openxmlformats.org/drawingml/2006/main" prst="rect">
+            <a:avLst/>
+          </a:prstGeom>
+          <a:solidFill xmlns:a="http://schemas.openxmlformats.org/drawingml/2006/main">
+            <a:srgbClr val="FFFFFF"/>
+          </a:solidFill>
+          <a:ln xmlns:a="http://schemas.openxmlformats.org/drawingml/2006/main" w="22860">
             <a:solidFill>
               <a:srgbClr val="000000"/>
             </a:solidFill>
@@ -1089,28 +1162,85 @@
       </p:sp>
       <p:sp>
         <p:nvSpPr>
-          <p:cNvPr id="2" name="right-branch">
-            <a:extLst xmlns:a="http://schemas.openxmlformats.org/drawingml/2006/main">
-              <a:ext uri="{FF2B5EF4-FFF2-40B4-BE49-F238E27FC236}">
-                <a16:creationId xmlns:a16="http://schemas.microsoft.com/office/drawing/2014/main" id="{09F00097-5052-48AE-A748-47D9E7F19174}"/>
-              </a:ext>
-            </a:extLst>
-          </p:cNvPr>
-          <p:cNvSpPr>
-            <a:spLocks xmlns:a="http://schemas.openxmlformats.org/drawingml/2006/main" noGrp="1"/>
-          </p:cNvSpPr>
-          <p:nvPr/>
-        </p:nvSpPr>
-        <p:spPr>
-          <a:xfrm xmlns:a="http://schemas.openxmlformats.org/drawingml/2006/main">
-            <a:off x="8167688" y="1404938"/>
-            <a:ext cx="0" cy="3810000"/>
+          <p:cNvPr id="2" name="core-title">
+            <a:extLst xmlns:a="http://schemas.openxmlformats.org/drawingml/2006/main">
+              <a:ext uri="{FF2B5EF4-FFF2-40B4-BE49-F238E27FC236}">
+                <a16:creationId xmlns:a16="http://schemas.microsoft.com/office/drawing/2014/main" id="{E8F4F9DA-6E48-4240-87B7-4E03358CD7EB}"/>
+              </a:ext>
+            </a:extLst>
+          </p:cNvPr>
+          <p:cNvSpPr>
+            <a:spLocks xmlns:a="http://schemas.openxmlformats.org/drawingml/2006/main" noGrp="1"/>
+          </p:cNvSpPr>
+          <p:nvPr/>
+        </p:nvSpPr>
+        <p:spPr>
+          <a:xfrm xmlns:a="http://schemas.openxmlformats.org/drawingml/2006/main">
+            <a:off x="4714875" y="257175"/>
+            <a:ext cx="5810250" cy="514350"/>
+          </a:xfrm>
+          <a:prstGeom xmlns:a="http://schemas.openxmlformats.org/drawingml/2006/main" prst="rect">
+            <a:avLst/>
+          </a:prstGeom>
+          <a:noFill xmlns:a="http://schemas.openxmlformats.org/drawingml/2006/main"/>
+          <a:ln xmlns:a="http://schemas.openxmlformats.org/drawingml/2006/main" w="0">
+            <a:noFill/>
+          </a:ln>
+        </p:spPr>
+        <p:txBody>
+          <a:bodyPr xmlns:a="http://schemas.openxmlformats.org/drawingml/2006/main" wrap="none" lIns="0" tIns="0" rIns="0" bIns="0" anchor="ctr">
+            <a:noAutofit/>
+          </a:bodyPr>
+          <a:lstStyle xmlns:a="http://schemas.openxmlformats.org/drawingml/2006/main"/>
+          <a:p xmlns:a="http://schemas.openxmlformats.org/drawingml/2006/main">
+            <a:pPr algn="ctr">
+              <a:defRPr sz="3000" b="1">
+                <a:solidFill>
+                  <a:srgbClr val="000000"/>
+                </a:solidFill>
+                <a:latin typeface="Arial"/>
+                <a:ea typeface="Arial"/>
+                <a:cs typeface="Arial"/>
+              </a:defRPr>
+            </a:pPr>
+            <a:r>
+              <a:rPr sz="3000" b="1">
+                <a:solidFill>
+                  <a:srgbClr val="000000"/>
+                </a:solidFill>
+                <a:latin typeface="Arial"/>
+                <a:ea typeface="Arial"/>
+                <a:cs typeface="Arial"/>
+              </a:rPr>
+              <a:t>Temporal Representation</a:t>
+            </a:r>
+          </a:p>
+        </p:txBody>
+      </p:sp>
+      <p:sp>
+        <p:nvSpPr>
+          <p:cNvPr id="3" name="core-theory">
+            <a:extLst xmlns:a="http://schemas.openxmlformats.org/drawingml/2006/main">
+              <a:ext uri="{FF2B5EF4-FFF2-40B4-BE49-F238E27FC236}">
+                <a16:creationId xmlns:a16="http://schemas.microsoft.com/office/drawing/2014/main" id="{E5315B14-DED5-4081-A441-354FC1645E0C}"/>
+              </a:ext>
+            </a:extLst>
+          </p:cNvPr>
+          <p:cNvSpPr>
+            <a:spLocks xmlns:a="http://schemas.openxmlformats.org/drawingml/2006/main" noGrp="1"/>
+          </p:cNvSpPr>
+          <p:nvPr/>
+        </p:nvSpPr>
+        <p:spPr>
+          <a:xfrm xmlns:a="http://schemas.openxmlformats.org/drawingml/2006/main">
+            <a:off x="7620000" y="857250"/>
+            <a:ext cx="0" cy="209550"/>
           </a:xfrm>
           <a:prstGeom xmlns:a="http://schemas.openxmlformats.org/drawingml/2006/main" prst="line">
             <a:avLst/>
           </a:prstGeom>
           <a:noFill xmlns:a="http://schemas.openxmlformats.org/drawingml/2006/main"/>
-          <a:ln xmlns:a="http://schemas.openxmlformats.org/drawingml/2006/main" w="15240">
+          <a:ln xmlns:a="http://schemas.openxmlformats.org/drawingml/2006/main" w="17145">
             <a:solidFill>
               <a:srgbClr val="000000"/>
             </a:solidFill>
@@ -1120,28 +1250,30 @@
       </p:sp>
       <p:sp>
         <p:nvSpPr>
-          <p:cNvPr id="3" name="left-core-connection">
-            <a:extLst xmlns:a="http://schemas.openxmlformats.org/drawingml/2006/main">
-              <a:ext uri="{FF2B5EF4-FFF2-40B4-BE49-F238E27FC236}">
-                <a16:creationId xmlns:a16="http://schemas.microsoft.com/office/drawing/2014/main" id="{F2A310FA-0324-4919-891D-FE3FD0F0E10C}"/>
-              </a:ext>
-            </a:extLst>
-          </p:cNvPr>
-          <p:cNvSpPr>
-            <a:spLocks xmlns:a="http://schemas.openxmlformats.org/drawingml/2006/main" noGrp="1"/>
-          </p:cNvSpPr>
-          <p:nvPr/>
-        </p:nvSpPr>
-        <p:spPr>
-          <a:xfrm xmlns:a="http://schemas.openxmlformats.org/drawingml/2006/main">
-            <a:off x="4024313" y="3309938"/>
-            <a:ext cx="404813" cy="0"/>
-          </a:xfrm>
-          <a:prstGeom xmlns:a="http://schemas.openxmlformats.org/drawingml/2006/main" prst="line">
-            <a:avLst/>
-          </a:prstGeom>
-          <a:noFill xmlns:a="http://schemas.openxmlformats.org/drawingml/2006/main"/>
-          <a:ln xmlns:a="http://schemas.openxmlformats.org/drawingml/2006/main" w="15240">
+          <p:cNvPr id="4" name="theory">
+            <a:extLst xmlns:a="http://schemas.openxmlformats.org/drawingml/2006/main">
+              <a:ext uri="{FF2B5EF4-FFF2-40B4-BE49-F238E27FC236}">
+                <a16:creationId xmlns:a16="http://schemas.microsoft.com/office/drawing/2014/main" id="{CC1062A9-3059-4CF6-A2D4-ECA29AAFA3D7}"/>
+              </a:ext>
+            </a:extLst>
+          </p:cNvPr>
+          <p:cNvSpPr>
+            <a:spLocks xmlns:a="http://schemas.openxmlformats.org/drawingml/2006/main" noGrp="1"/>
+          </p:cNvSpPr>
+          <p:nvPr/>
+        </p:nvSpPr>
+        <p:spPr>
+          <a:xfrm xmlns:a="http://schemas.openxmlformats.org/drawingml/2006/main">
+            <a:off x="381000" y="1066800"/>
+            <a:ext cx="14478000" cy="1219200"/>
+          </a:xfrm>
+          <a:prstGeom xmlns:a="http://schemas.openxmlformats.org/drawingml/2006/main" prst="rect">
+            <a:avLst/>
+          </a:prstGeom>
+          <a:solidFill xmlns:a="http://schemas.openxmlformats.org/drawingml/2006/main">
+            <a:srgbClr val="FFFFFF"/>
+          </a:solidFill>
+          <a:ln xmlns:a="http://schemas.openxmlformats.org/drawingml/2006/main" w="17145">
             <a:solidFill>
               <a:srgbClr val="000000"/>
             </a:solidFill>
@@ -1151,28 +1283,28 @@
       </p:sp>
       <p:sp>
         <p:nvSpPr>
-          <p:cNvPr id="4" name="right-core-connection">
-            <a:extLst xmlns:a="http://schemas.openxmlformats.org/drawingml/2006/main">
-              <a:ext uri="{FF2B5EF4-FFF2-40B4-BE49-F238E27FC236}">
-                <a16:creationId xmlns:a16="http://schemas.microsoft.com/office/drawing/2014/main" id="{E9BD7CEE-A2BD-4417-9D02-2B6B27B7F584}"/>
-              </a:ext>
-            </a:extLst>
-          </p:cNvPr>
-          <p:cNvSpPr>
-            <a:spLocks xmlns:a="http://schemas.openxmlformats.org/drawingml/2006/main" noGrp="1"/>
-          </p:cNvSpPr>
-          <p:nvPr/>
-        </p:nvSpPr>
-        <p:spPr>
-          <a:xfrm xmlns:a="http://schemas.openxmlformats.org/drawingml/2006/main">
-            <a:off x="7762875" y="3309938"/>
-            <a:ext cx="404813" cy="0"/>
+          <p:cNvPr id="5" name="theory-divider">
+            <a:extLst xmlns:a="http://schemas.openxmlformats.org/drawingml/2006/main">
+              <a:ext uri="{FF2B5EF4-FFF2-40B4-BE49-F238E27FC236}">
+                <a16:creationId xmlns:a16="http://schemas.microsoft.com/office/drawing/2014/main" id="{ECDEF101-84BC-49C9-8D69-5EC0C9FC1DB0}"/>
+              </a:ext>
+            </a:extLst>
+          </p:cNvPr>
+          <p:cNvSpPr>
+            <a:spLocks xmlns:a="http://schemas.openxmlformats.org/drawingml/2006/main" noGrp="1"/>
+          </p:cNvSpPr>
+          <p:nvPr/>
+        </p:nvSpPr>
+        <p:spPr>
+          <a:xfrm xmlns:a="http://schemas.openxmlformats.org/drawingml/2006/main">
+            <a:off x="5715000" y="1066800"/>
+            <a:ext cx="0" cy="1219200"/>
           </a:xfrm>
           <a:prstGeom xmlns:a="http://schemas.openxmlformats.org/drawingml/2006/main" prst="line">
             <a:avLst/>
           </a:prstGeom>
           <a:noFill xmlns:a="http://schemas.openxmlformats.org/drawingml/2006/main"/>
-          <a:ln xmlns:a="http://schemas.openxmlformats.org/drawingml/2006/main" w="15240">
+          <a:ln xmlns:a="http://schemas.openxmlformats.org/drawingml/2006/main" w="17145">
             <a:solidFill>
               <a:srgbClr val="000000"/>
             </a:solidFill>
@@ -1182,28 +1314,370 @@
       </p:sp>
       <p:sp>
         <p:nvSpPr>
-          <p:cNvPr id="5" name="decomposition-connection">
-            <a:extLst xmlns:a="http://schemas.openxmlformats.org/drawingml/2006/main">
-              <a:ext uri="{FF2B5EF4-FFF2-40B4-BE49-F238E27FC236}">
-                <a16:creationId xmlns:a16="http://schemas.microsoft.com/office/drawing/2014/main" id="{1743FE8B-16FE-4D90-92C3-D7253781E1B0}"/>
-              </a:ext>
-            </a:extLst>
-          </p:cNvPr>
-          <p:cNvSpPr>
-            <a:spLocks xmlns:a="http://schemas.openxmlformats.org/drawingml/2006/main" noGrp="1"/>
-          </p:cNvSpPr>
-          <p:nvPr/>
-        </p:nvSpPr>
-        <p:spPr>
-          <a:xfrm xmlns:a="http://schemas.openxmlformats.org/drawingml/2006/main">
-            <a:off x="6096000" y="3976688"/>
-            <a:ext cx="0" cy="928688"/>
+          <p:cNvPr id="6" name="theory-title">
+            <a:extLst xmlns:a="http://schemas.openxmlformats.org/drawingml/2006/main">
+              <a:ext uri="{FF2B5EF4-FFF2-40B4-BE49-F238E27FC236}">
+                <a16:creationId xmlns:a16="http://schemas.microsoft.com/office/drawing/2014/main" id="{28FC6E0D-8B1F-4141-A291-54E05BFC1D7A}"/>
+              </a:ext>
+            </a:extLst>
+          </p:cNvPr>
+          <p:cNvSpPr>
+            <a:spLocks xmlns:a="http://schemas.openxmlformats.org/drawingml/2006/main" noGrp="1"/>
+          </p:cNvSpPr>
+          <p:nvPr/>
+        </p:nvSpPr>
+        <p:spPr>
+          <a:xfrm xmlns:a="http://schemas.openxmlformats.org/drawingml/2006/main">
+            <a:off x="523875" y="1171575"/>
+            <a:ext cx="5048250" cy="333375"/>
+          </a:xfrm>
+          <a:prstGeom xmlns:a="http://schemas.openxmlformats.org/drawingml/2006/main" prst="rect">
+            <a:avLst/>
+          </a:prstGeom>
+          <a:noFill xmlns:a="http://schemas.openxmlformats.org/drawingml/2006/main"/>
+          <a:ln xmlns:a="http://schemas.openxmlformats.org/drawingml/2006/main" w="0">
+            <a:noFill/>
+          </a:ln>
+        </p:spPr>
+        <p:txBody>
+          <a:bodyPr xmlns:a="http://schemas.openxmlformats.org/drawingml/2006/main" wrap="none" lIns="0" tIns="0" rIns="0" bIns="0" anchor="ctr">
+            <a:noAutofit/>
+          </a:bodyPr>
+          <a:lstStyle xmlns:a="http://schemas.openxmlformats.org/drawingml/2006/main"/>
+          <a:p xmlns:a="http://schemas.openxmlformats.org/drawingml/2006/main">
+            <a:pPr algn="ctr">
+              <a:defRPr sz="2250" b="1">
+                <a:solidFill>
+                  <a:srgbClr val="000000"/>
+                </a:solidFill>
+                <a:latin typeface="Arial"/>
+                <a:ea typeface="Arial"/>
+                <a:cs typeface="Arial"/>
+              </a:defRPr>
+            </a:pPr>
+            <a:r>
+              <a:rPr sz="2250" b="1">
+                <a:solidFill>
+                  <a:srgbClr val="000000"/>
+                </a:solidFill>
+                <a:latin typeface="Arial"/>
+                <a:ea typeface="Arial"/>
+                <a:cs typeface="Arial"/>
+              </a:rPr>
+              <a:t>Operator-theoretic framework</a:t>
+            </a:r>
+          </a:p>
+        </p:txBody>
+      </p:sp>
+      <p:sp>
+        <p:nvSpPr>
+          <p:cNvPr id="7" name="operator-definition">
+            <a:extLst xmlns:a="http://schemas.openxmlformats.org/drawingml/2006/main">
+              <a:ext uri="{FF2B5EF4-FFF2-40B4-BE49-F238E27FC236}">
+                <a16:creationId xmlns:a16="http://schemas.microsoft.com/office/drawing/2014/main" id="{407F2A82-C44D-407F-9AE6-949375A7FFF0}"/>
+              </a:ext>
+            </a:extLst>
+          </p:cNvPr>
+          <p:cNvSpPr>
+            <a:spLocks xmlns:a="http://schemas.openxmlformats.org/drawingml/2006/main" noGrp="1"/>
+          </p:cNvSpPr>
+          <p:nvPr/>
+        </p:nvSpPr>
+        <p:spPr>
+          <a:xfrm xmlns:a="http://schemas.openxmlformats.org/drawingml/2006/main">
+            <a:off x="666750" y="1514475"/>
+            <a:ext cx="4762500" cy="333375"/>
+          </a:xfrm>
+          <a:prstGeom xmlns:a="http://schemas.openxmlformats.org/drawingml/2006/main" prst="rect">
+            <a:avLst/>
+          </a:prstGeom>
+          <a:noFill xmlns:a="http://schemas.openxmlformats.org/drawingml/2006/main"/>
+          <a:ln xmlns:a="http://schemas.openxmlformats.org/drawingml/2006/main" w="0">
+            <a:noFill/>
+          </a:ln>
+        </p:spPr>
+        <p:txBody>
+          <a:bodyPr xmlns:a="http://schemas.openxmlformats.org/drawingml/2006/main" wrap="none" lIns="0" tIns="0" rIns="0" bIns="0" anchor="ctr">
+            <a:noAutofit/>
+          </a:bodyPr>
+          <a:lstStyle xmlns:a="http://schemas.openxmlformats.org/drawingml/2006/main"/>
+          <a:p xmlns:a="http://schemas.openxmlformats.org/drawingml/2006/main">
+            <a:pPr algn="ctr">
+              <a:defRPr sz="2175" b="0">
+                <a:solidFill>
+                  <a:srgbClr val="000000"/>
+                </a:solidFill>
+                <a:latin typeface="Arial"/>
+                <a:ea typeface="Arial"/>
+                <a:cs typeface="Arial"/>
+              </a:defRPr>
+            </a:pPr>
+            <a:r>
+              <a:rPr sz="2175" b="0">
+                <a:solidFill>
+                  <a:srgbClr val="000000"/>
+                </a:solidFill>
+                <a:latin typeface="Arial"/>
+                <a:ea typeface="Arial"/>
+                <a:cs typeface="Arial"/>
+              </a:rPr>
+              <a:t>Φ: T → R</a:t>
+            </a:r>
+          </a:p>
+        </p:txBody>
+      </p:sp>
+      <p:sp>
+        <p:nvSpPr>
+          <p:cNvPr id="8" name="operator-composition">
+            <a:extLst xmlns:a="http://schemas.openxmlformats.org/drawingml/2006/main">
+              <a:ext uri="{FF2B5EF4-FFF2-40B4-BE49-F238E27FC236}">
+                <a16:creationId xmlns:a16="http://schemas.microsoft.com/office/drawing/2014/main" id="{C503810A-7D9C-4621-82DF-BF7DA3465DEE}"/>
+              </a:ext>
+            </a:extLst>
+          </p:cNvPr>
+          <p:cNvSpPr>
+            <a:spLocks xmlns:a="http://schemas.openxmlformats.org/drawingml/2006/main" noGrp="1"/>
+          </p:cNvSpPr>
+          <p:nvPr/>
+        </p:nvSpPr>
+        <p:spPr>
+          <a:xfrm xmlns:a="http://schemas.openxmlformats.org/drawingml/2006/main">
+            <a:off x="523875" y="1905000"/>
+            <a:ext cx="5048250" cy="247650"/>
+          </a:xfrm>
+          <a:prstGeom xmlns:a="http://schemas.openxmlformats.org/drawingml/2006/main" prst="rect">
+            <a:avLst/>
+          </a:prstGeom>
+          <a:noFill xmlns:a="http://schemas.openxmlformats.org/drawingml/2006/main"/>
+          <a:ln xmlns:a="http://schemas.openxmlformats.org/drawingml/2006/main" w="0">
+            <a:noFill/>
+          </a:ln>
+        </p:spPr>
+        <p:txBody>
+          <a:bodyPr xmlns:a="http://schemas.openxmlformats.org/drawingml/2006/main" wrap="none" lIns="0" tIns="0" rIns="0" bIns="0" anchor="ctr">
+            <a:noAutofit/>
+          </a:bodyPr>
+          <a:lstStyle xmlns:a="http://schemas.openxmlformats.org/drawingml/2006/main"/>
+          <a:p xmlns:a="http://schemas.openxmlformats.org/drawingml/2006/main">
+            <a:pPr algn="ctr">
+              <a:defRPr sz="1725" b="0">
+                <a:solidFill>
+                  <a:srgbClr val="000000"/>
+                </a:solidFill>
+                <a:latin typeface="Arial"/>
+                <a:ea typeface="Arial"/>
+                <a:cs typeface="Arial"/>
+              </a:defRPr>
+            </a:pPr>
+            <a:r>
+              <a:rPr sz="1725" b="0">
+                <a:solidFill>
+                  <a:srgbClr val="000000"/>
+                </a:solidFill>
+                <a:latin typeface="Arial"/>
+                <a:ea typeface="Arial"/>
+                <a:cs typeface="Arial"/>
+              </a:rPr>
+              <a:t>Composition of representation operators</a:t>
+            </a:r>
+          </a:p>
+        </p:txBody>
+      </p:sp>
+      <p:sp>
+        <p:nvSpPr>
+          <p:cNvPr id="9" name="properties-title">
+            <a:extLst xmlns:a="http://schemas.openxmlformats.org/drawingml/2006/main">
+              <a:ext uri="{FF2B5EF4-FFF2-40B4-BE49-F238E27FC236}">
+                <a16:creationId xmlns:a16="http://schemas.microsoft.com/office/drawing/2014/main" id="{6FE60F50-D6C0-4138-A430-EC8DA246C20B}"/>
+              </a:ext>
+            </a:extLst>
+          </p:cNvPr>
+          <p:cNvSpPr>
+            <a:spLocks xmlns:a="http://schemas.openxmlformats.org/drawingml/2006/main" noGrp="1"/>
+          </p:cNvSpPr>
+          <p:nvPr/>
+        </p:nvSpPr>
+        <p:spPr>
+          <a:xfrm xmlns:a="http://schemas.openxmlformats.org/drawingml/2006/main">
+            <a:off x="5905500" y="1171575"/>
+            <a:ext cx="8763000" cy="333375"/>
+          </a:xfrm>
+          <a:prstGeom xmlns:a="http://schemas.openxmlformats.org/drawingml/2006/main" prst="rect">
+            <a:avLst/>
+          </a:prstGeom>
+          <a:noFill xmlns:a="http://schemas.openxmlformats.org/drawingml/2006/main"/>
+          <a:ln xmlns:a="http://schemas.openxmlformats.org/drawingml/2006/main" w="0">
+            <a:noFill/>
+          </a:ln>
+        </p:spPr>
+        <p:txBody>
+          <a:bodyPr xmlns:a="http://schemas.openxmlformats.org/drawingml/2006/main" wrap="none" lIns="0" tIns="0" rIns="0" bIns="0" anchor="ctr">
+            <a:noAutofit/>
+          </a:bodyPr>
+          <a:lstStyle xmlns:a="http://schemas.openxmlformats.org/drawingml/2006/main"/>
+          <a:p xmlns:a="http://schemas.openxmlformats.org/drawingml/2006/main">
+            <a:pPr algn="ctr">
+              <a:defRPr sz="2100" b="1">
+                <a:solidFill>
+                  <a:srgbClr val="000000"/>
+                </a:solidFill>
+                <a:latin typeface="Arial"/>
+                <a:ea typeface="Arial"/>
+                <a:cs typeface="Arial"/>
+              </a:defRPr>
+            </a:pPr>
+            <a:r>
+              <a:rPr sz="2100" b="1">
+                <a:solidFill>
+                  <a:srgbClr val="000000"/>
+                </a:solidFill>
+                <a:latin typeface="Arial"/>
+                <a:ea typeface="Arial"/>
+                <a:cs typeface="Arial"/>
+              </a:rPr>
+              <a:t>Evaluation dimensions</a:t>
+            </a:r>
+          </a:p>
+        </p:txBody>
+      </p:sp>
+      <p:sp>
+        <p:nvSpPr>
+          <p:cNvPr id="10" name="properties-1">
+            <a:extLst xmlns:a="http://schemas.openxmlformats.org/drawingml/2006/main">
+              <a:ext uri="{FF2B5EF4-FFF2-40B4-BE49-F238E27FC236}">
+                <a16:creationId xmlns:a16="http://schemas.microsoft.com/office/drawing/2014/main" id="{32541B6D-1CA6-4C2B-AE58-FB6150D35BF8}"/>
+              </a:ext>
+            </a:extLst>
+          </p:cNvPr>
+          <p:cNvSpPr>
+            <a:spLocks xmlns:a="http://schemas.openxmlformats.org/drawingml/2006/main" noGrp="1"/>
+          </p:cNvSpPr>
+          <p:nvPr/>
+        </p:nvSpPr>
+        <p:spPr>
+          <a:xfrm xmlns:a="http://schemas.openxmlformats.org/drawingml/2006/main">
+            <a:off x="5905500" y="1562100"/>
+            <a:ext cx="8763000" cy="285750"/>
+          </a:xfrm>
+          <a:prstGeom xmlns:a="http://schemas.openxmlformats.org/drawingml/2006/main" prst="rect">
+            <a:avLst/>
+          </a:prstGeom>
+          <a:noFill xmlns:a="http://schemas.openxmlformats.org/drawingml/2006/main"/>
+          <a:ln xmlns:a="http://schemas.openxmlformats.org/drawingml/2006/main" w="0">
+            <a:noFill/>
+          </a:ln>
+        </p:spPr>
+        <p:txBody>
+          <a:bodyPr xmlns:a="http://schemas.openxmlformats.org/drawingml/2006/main" wrap="none" lIns="0" tIns="0" rIns="0" bIns="0" anchor="ctr">
+            <a:noAutofit/>
+          </a:bodyPr>
+          <a:lstStyle xmlns:a="http://schemas.openxmlformats.org/drawingml/2006/main"/>
+          <a:p xmlns:a="http://schemas.openxmlformats.org/drawingml/2006/main">
+            <a:pPr algn="ctr">
+              <a:defRPr sz="1950" b="0">
+                <a:solidFill>
+                  <a:srgbClr val="000000"/>
+                </a:solidFill>
+                <a:latin typeface="Arial"/>
+                <a:ea typeface="Arial"/>
+                <a:cs typeface="Arial"/>
+              </a:defRPr>
+            </a:pPr>
+            <a:r>
+              <a:rPr sz="1950" b="0">
+                <a:solidFill>
+                  <a:srgbClr val="000000"/>
+                </a:solidFill>
+                <a:latin typeface="Arial"/>
+                <a:ea typeface="Arial"/>
+                <a:cs typeface="Arial"/>
+              </a:rPr>
+              <a:t>Information preservation, distance preservation</a:t>
+            </a:r>
+          </a:p>
+        </p:txBody>
+      </p:sp>
+      <p:sp>
+        <p:nvSpPr>
+          <p:cNvPr id="11" name="properties-2">
+            <a:extLst xmlns:a="http://schemas.openxmlformats.org/drawingml/2006/main">
+              <a:ext uri="{FF2B5EF4-FFF2-40B4-BE49-F238E27FC236}">
+                <a16:creationId xmlns:a16="http://schemas.microsoft.com/office/drawing/2014/main" id="{BB88831D-108A-4663-B82D-51FD9FF39CDB}"/>
+              </a:ext>
+            </a:extLst>
+          </p:cNvPr>
+          <p:cNvSpPr>
+            <a:spLocks xmlns:a="http://schemas.openxmlformats.org/drawingml/2006/main" noGrp="1"/>
+          </p:cNvSpPr>
+          <p:nvPr/>
+        </p:nvSpPr>
+        <p:spPr>
+          <a:xfrm xmlns:a="http://schemas.openxmlformats.org/drawingml/2006/main">
+            <a:off x="5905500" y="1895475"/>
+            <a:ext cx="8763000" cy="285750"/>
+          </a:xfrm>
+          <a:prstGeom xmlns:a="http://schemas.openxmlformats.org/drawingml/2006/main" prst="rect">
+            <a:avLst/>
+          </a:prstGeom>
+          <a:noFill xmlns:a="http://schemas.openxmlformats.org/drawingml/2006/main"/>
+          <a:ln xmlns:a="http://schemas.openxmlformats.org/drawingml/2006/main" w="0">
+            <a:noFill/>
+          </a:ln>
+        </p:spPr>
+        <p:txBody>
+          <a:bodyPr xmlns:a="http://schemas.openxmlformats.org/drawingml/2006/main" wrap="none" lIns="0" tIns="0" rIns="0" bIns="0" anchor="ctr">
+            <a:noAutofit/>
+          </a:bodyPr>
+          <a:lstStyle xmlns:a="http://schemas.openxmlformats.org/drawingml/2006/main"/>
+          <a:p xmlns:a="http://schemas.openxmlformats.org/drawingml/2006/main">
+            <a:pPr algn="ctr">
+              <a:defRPr sz="1950" b="0">
+                <a:solidFill>
+                  <a:srgbClr val="000000"/>
+                </a:solidFill>
+                <a:latin typeface="Arial"/>
+                <a:ea typeface="Arial"/>
+                <a:cs typeface="Arial"/>
+              </a:defRPr>
+            </a:pPr>
+            <a:r>
+              <a:rPr sz="1950" b="0">
+                <a:solidFill>
+                  <a:srgbClr val="000000"/>
+                </a:solidFill>
+                <a:latin typeface="Arial"/>
+                <a:ea typeface="Arial"/>
+                <a:cs typeface="Arial"/>
+              </a:rPr>
+              <a:t>Invariance, reconstructability, commutativity</a:t>
+            </a:r>
+          </a:p>
+        </p:txBody>
+      </p:sp>
+      <p:sp>
+        <p:nvSpPr>
+          <p:cNvPr id="12" name="theory-families">
+            <a:extLst xmlns:a="http://schemas.openxmlformats.org/drawingml/2006/main">
+              <a:ext uri="{FF2B5EF4-FFF2-40B4-BE49-F238E27FC236}">
+                <a16:creationId xmlns:a16="http://schemas.microsoft.com/office/drawing/2014/main" id="{4684E15C-9274-490E-810D-78F4D2D4009F}"/>
+              </a:ext>
+            </a:extLst>
+          </p:cNvPr>
+          <p:cNvSpPr>
+            <a:spLocks xmlns:a="http://schemas.openxmlformats.org/drawingml/2006/main" noGrp="1"/>
+          </p:cNvSpPr>
+          <p:nvPr/>
+        </p:nvSpPr>
+        <p:spPr>
+          <a:xfrm xmlns:a="http://schemas.openxmlformats.org/drawingml/2006/main">
+            <a:off x="7620000" y="2286000"/>
+            <a:ext cx="0" cy="247650"/>
           </a:xfrm>
           <a:prstGeom xmlns:a="http://schemas.openxmlformats.org/drawingml/2006/main" prst="line">
             <a:avLst/>
           </a:prstGeom>
           <a:noFill xmlns:a="http://schemas.openxmlformats.org/drawingml/2006/main"/>
-          <a:ln xmlns:a="http://schemas.openxmlformats.org/drawingml/2006/main" w="15240">
+          <a:ln xmlns:a="http://schemas.openxmlformats.org/drawingml/2006/main" w="17145">
             <a:solidFill>
               <a:srgbClr val="000000"/>
             </a:solidFill>
@@ -1213,28 +1687,30 @@
       </p:sp>
       <p:sp>
         <p:nvSpPr>
-          <p:cNvPr id="6" name="left-connection-0">
-            <a:extLst xmlns:a="http://schemas.openxmlformats.org/drawingml/2006/main">
-              <a:ext uri="{FF2B5EF4-FFF2-40B4-BE49-F238E27FC236}">
-                <a16:creationId xmlns:a16="http://schemas.microsoft.com/office/drawing/2014/main" id="{BB427F0E-A327-4310-AE58-3FB1E6D90A91}"/>
-              </a:ext>
-            </a:extLst>
-          </p:cNvPr>
-          <p:cNvSpPr>
-            <a:spLocks xmlns:a="http://schemas.openxmlformats.org/drawingml/2006/main" noGrp="1"/>
-          </p:cNvSpPr>
-          <p:nvPr/>
-        </p:nvSpPr>
-        <p:spPr>
-          <a:xfrm xmlns:a="http://schemas.openxmlformats.org/drawingml/2006/main">
-            <a:off x="3619500" y="1404938"/>
-            <a:ext cx="404813" cy="0"/>
-          </a:xfrm>
-          <a:prstGeom xmlns:a="http://schemas.openxmlformats.org/drawingml/2006/main" prst="line">
-            <a:avLst/>
-          </a:prstGeom>
-          <a:noFill xmlns:a="http://schemas.openxmlformats.org/drawingml/2006/main"/>
-          <a:ln xmlns:a="http://schemas.openxmlformats.org/drawingml/2006/main" w="15240">
+          <p:cNvPr id="13" name="representation-families">
+            <a:extLst xmlns:a="http://schemas.openxmlformats.org/drawingml/2006/main">
+              <a:ext uri="{FF2B5EF4-FFF2-40B4-BE49-F238E27FC236}">
+                <a16:creationId xmlns:a16="http://schemas.microsoft.com/office/drawing/2014/main" id="{E90C2171-DE6D-49BB-B550-567332F3C31F}"/>
+              </a:ext>
+            </a:extLst>
+          </p:cNvPr>
+          <p:cNvSpPr>
+            <a:spLocks xmlns:a="http://schemas.openxmlformats.org/drawingml/2006/main" noGrp="1"/>
+          </p:cNvSpPr>
+          <p:nvPr/>
+        </p:nvSpPr>
+        <p:spPr>
+          <a:xfrm xmlns:a="http://schemas.openxmlformats.org/drawingml/2006/main">
+            <a:off x="381000" y="2533650"/>
+            <a:ext cx="14478000" cy="3533775"/>
+          </a:xfrm>
+          <a:prstGeom xmlns:a="http://schemas.openxmlformats.org/drawingml/2006/main" prst="rect">
+            <a:avLst/>
+          </a:prstGeom>
+          <a:solidFill xmlns:a="http://schemas.openxmlformats.org/drawingml/2006/main">
+            <a:srgbClr val="FFFFFF"/>
+          </a:solidFill>
+          <a:ln xmlns:a="http://schemas.openxmlformats.org/drawingml/2006/main" w="17145">
             <a:solidFill>
               <a:srgbClr val="000000"/>
             </a:solidFill>
@@ -1244,28 +1720,87 @@
       </p:sp>
       <p:sp>
         <p:nvSpPr>
-          <p:cNvPr id="7" name="right-connection-0">
-            <a:extLst xmlns:a="http://schemas.openxmlformats.org/drawingml/2006/main">
-              <a:ext uri="{FF2B5EF4-FFF2-40B4-BE49-F238E27FC236}">
-                <a16:creationId xmlns:a16="http://schemas.microsoft.com/office/drawing/2014/main" id="{808716AC-4E1C-4542-AFD6-1107035D89C6}"/>
-              </a:ext>
-            </a:extLst>
-          </p:cNvPr>
-          <p:cNvSpPr>
-            <a:spLocks xmlns:a="http://schemas.openxmlformats.org/drawingml/2006/main" noGrp="1"/>
-          </p:cNvSpPr>
-          <p:nvPr/>
-        </p:nvSpPr>
-        <p:spPr>
-          <a:xfrm xmlns:a="http://schemas.openxmlformats.org/drawingml/2006/main">
-            <a:off x="8167688" y="1404938"/>
-            <a:ext cx="404813" cy="0"/>
-          </a:xfrm>
-          <a:prstGeom xmlns:a="http://schemas.openxmlformats.org/drawingml/2006/main" prst="line">
-            <a:avLst/>
-          </a:prstGeom>
-          <a:noFill xmlns:a="http://schemas.openxmlformats.org/drawingml/2006/main"/>
-          <a:ln xmlns:a="http://schemas.openxmlformats.org/drawingml/2006/main" w="15240">
+          <p:cNvPr id="14" name="families-title">
+            <a:extLst xmlns:a="http://schemas.openxmlformats.org/drawingml/2006/main">
+              <a:ext uri="{FF2B5EF4-FFF2-40B4-BE49-F238E27FC236}">
+                <a16:creationId xmlns:a16="http://schemas.microsoft.com/office/drawing/2014/main" id="{8DAA8CC2-5A95-415A-9274-E338CD1BF695}"/>
+              </a:ext>
+            </a:extLst>
+          </p:cNvPr>
+          <p:cNvSpPr>
+            <a:spLocks xmlns:a="http://schemas.openxmlformats.org/drawingml/2006/main" noGrp="1"/>
+          </p:cNvSpPr>
+          <p:nvPr/>
+        </p:nvSpPr>
+        <p:spPr>
+          <a:xfrm xmlns:a="http://schemas.openxmlformats.org/drawingml/2006/main">
+            <a:off x="571500" y="2628900"/>
+            <a:ext cx="14097000" cy="333375"/>
+          </a:xfrm>
+          <a:prstGeom xmlns:a="http://schemas.openxmlformats.org/drawingml/2006/main" prst="rect">
+            <a:avLst/>
+          </a:prstGeom>
+          <a:noFill xmlns:a="http://schemas.openxmlformats.org/drawingml/2006/main"/>
+          <a:ln xmlns:a="http://schemas.openxmlformats.org/drawingml/2006/main" w="0">
+            <a:noFill/>
+          </a:ln>
+        </p:spPr>
+        <p:txBody>
+          <a:bodyPr xmlns:a="http://schemas.openxmlformats.org/drawingml/2006/main" wrap="none" lIns="0" tIns="0" rIns="0" bIns="0" anchor="ctr">
+            <a:noAutofit/>
+          </a:bodyPr>
+          <a:lstStyle xmlns:a="http://schemas.openxmlformats.org/drawingml/2006/main"/>
+          <a:p xmlns:a="http://schemas.openxmlformats.org/drawingml/2006/main">
+            <a:pPr algn="ctr">
+              <a:defRPr sz="2250" b="1">
+                <a:solidFill>
+                  <a:srgbClr val="000000"/>
+                </a:solidFill>
+                <a:latin typeface="Arial"/>
+                <a:ea typeface="Arial"/>
+                <a:cs typeface="Arial"/>
+              </a:defRPr>
+            </a:pPr>
+            <a:r>
+              <a:rPr sz="2250" b="1">
+                <a:solidFill>
+                  <a:srgbClr val="000000"/>
+                </a:solidFill>
+                <a:latin typeface="Arial"/>
+                <a:ea typeface="Arial"/>
+                <a:cs typeface="Arial"/>
+              </a:rPr>
+              <a:t>Composable representation families</a:t>
+            </a:r>
+          </a:p>
+        </p:txBody>
+      </p:sp>
+      <p:sp>
+        <p:nvSpPr>
+          <p:cNvPr id="15" name="vectorial">
+            <a:extLst xmlns:a="http://schemas.openxmlformats.org/drawingml/2006/main">
+              <a:ext uri="{FF2B5EF4-FFF2-40B4-BE49-F238E27FC236}">
+                <a16:creationId xmlns:a16="http://schemas.microsoft.com/office/drawing/2014/main" id="{A2371507-ACF0-46CC-9355-A2E239517839}"/>
+              </a:ext>
+            </a:extLst>
+          </p:cNvPr>
+          <p:cNvSpPr>
+            <a:spLocks xmlns:a="http://schemas.openxmlformats.org/drawingml/2006/main" noGrp="1"/>
+          </p:cNvSpPr>
+          <p:nvPr/>
+        </p:nvSpPr>
+        <p:spPr>
+          <a:xfrm xmlns:a="http://schemas.openxmlformats.org/drawingml/2006/main">
+            <a:off x="571500" y="3105150"/>
+            <a:ext cx="4572000" cy="1314450"/>
+          </a:xfrm>
+          <a:prstGeom xmlns:a="http://schemas.openxmlformats.org/drawingml/2006/main" prst="rect">
+            <a:avLst/>
+          </a:prstGeom>
+          <a:solidFill xmlns:a="http://schemas.openxmlformats.org/drawingml/2006/main">
+            <a:srgbClr val="FFFFFF"/>
+          </a:solidFill>
+          <a:ln xmlns:a="http://schemas.openxmlformats.org/drawingml/2006/main" w="17145">
             <a:solidFill>
               <a:srgbClr val="000000"/>
             </a:solidFill>
@@ -1275,28 +1810,201 @@
       </p:sp>
       <p:sp>
         <p:nvSpPr>
-          <p:cNvPr id="8" name="left-connection-1">
-            <a:extLst xmlns:a="http://schemas.openxmlformats.org/drawingml/2006/main">
-              <a:ext uri="{FF2B5EF4-FFF2-40B4-BE49-F238E27FC236}">
-                <a16:creationId xmlns:a16="http://schemas.microsoft.com/office/drawing/2014/main" id="{187C922A-349B-461A-982E-AC1D2122E51A}"/>
-              </a:ext>
-            </a:extLst>
-          </p:cNvPr>
-          <p:cNvSpPr>
-            <a:spLocks xmlns:a="http://schemas.openxmlformats.org/drawingml/2006/main" noGrp="1"/>
-          </p:cNvSpPr>
-          <p:nvPr/>
-        </p:nvSpPr>
-        <p:spPr>
-          <a:xfrm xmlns:a="http://schemas.openxmlformats.org/drawingml/2006/main">
-            <a:off x="3619500" y="3309938"/>
-            <a:ext cx="404813" cy="0"/>
-          </a:xfrm>
-          <a:prstGeom xmlns:a="http://schemas.openxmlformats.org/drawingml/2006/main" prst="line">
-            <a:avLst/>
-          </a:prstGeom>
-          <a:noFill xmlns:a="http://schemas.openxmlformats.org/drawingml/2006/main"/>
-          <a:ln xmlns:a="http://schemas.openxmlformats.org/drawingml/2006/main" w="15240">
+          <p:cNvPr id="16" name="vectorial-title">
+            <a:extLst xmlns:a="http://schemas.openxmlformats.org/drawingml/2006/main">
+              <a:ext uri="{FF2B5EF4-FFF2-40B4-BE49-F238E27FC236}">
+                <a16:creationId xmlns:a16="http://schemas.microsoft.com/office/drawing/2014/main" id="{9FC2528B-90B4-45BF-87C4-1974F9BEE070}"/>
+              </a:ext>
+            </a:extLst>
+          </p:cNvPr>
+          <p:cNvSpPr>
+            <a:spLocks xmlns:a="http://schemas.openxmlformats.org/drawingml/2006/main" noGrp="1"/>
+          </p:cNvSpPr>
+          <p:nvPr/>
+        </p:nvSpPr>
+        <p:spPr>
+          <a:xfrm xmlns:a="http://schemas.openxmlformats.org/drawingml/2006/main">
+            <a:off x="666750" y="3219450"/>
+            <a:ext cx="4381500" cy="333375"/>
+          </a:xfrm>
+          <a:prstGeom xmlns:a="http://schemas.openxmlformats.org/drawingml/2006/main" prst="rect">
+            <a:avLst/>
+          </a:prstGeom>
+          <a:noFill xmlns:a="http://schemas.openxmlformats.org/drawingml/2006/main"/>
+          <a:ln xmlns:a="http://schemas.openxmlformats.org/drawingml/2006/main" w="0">
+            <a:noFill/>
+          </a:ln>
+        </p:spPr>
+        <p:txBody>
+          <a:bodyPr xmlns:a="http://schemas.openxmlformats.org/drawingml/2006/main" wrap="none" lIns="0" tIns="0" rIns="0" bIns="0" anchor="ctr">
+            <a:noAutofit/>
+          </a:bodyPr>
+          <a:lstStyle xmlns:a="http://schemas.openxmlformats.org/drawingml/2006/main"/>
+          <a:p xmlns:a="http://schemas.openxmlformats.org/drawingml/2006/main">
+            <a:pPr algn="ctr">
+              <a:defRPr sz="2025" b="1">
+                <a:solidFill>
+                  <a:srgbClr val="000000"/>
+                </a:solidFill>
+                <a:latin typeface="Arial"/>
+                <a:ea typeface="Arial"/>
+                <a:cs typeface="Arial"/>
+              </a:defRPr>
+            </a:pPr>
+            <a:r>
+              <a:rPr sz="2025" b="1">
+                <a:solidFill>
+                  <a:srgbClr val="000000"/>
+                </a:solidFill>
+                <a:latin typeface="Arial"/>
+                <a:ea typeface="Arial"/>
+                <a:cs typeface="Arial"/>
+              </a:rPr>
+              <a:t>Vectorial representations</a:t>
+            </a:r>
+          </a:p>
+        </p:txBody>
+      </p:sp>
+      <p:sp>
+        <p:nvSpPr>
+          <p:cNvPr id="17" name="vectorial-detail-0">
+            <a:extLst xmlns:a="http://schemas.openxmlformats.org/drawingml/2006/main">
+              <a:ext uri="{FF2B5EF4-FFF2-40B4-BE49-F238E27FC236}">
+                <a16:creationId xmlns:a16="http://schemas.microsoft.com/office/drawing/2014/main" id="{C7644B78-0511-46FB-B6AB-39ED06B1043E}"/>
+              </a:ext>
+            </a:extLst>
+          </p:cNvPr>
+          <p:cNvSpPr>
+            <a:spLocks xmlns:a="http://schemas.openxmlformats.org/drawingml/2006/main" noGrp="1"/>
+          </p:cNvSpPr>
+          <p:nvPr/>
+        </p:nvSpPr>
+        <p:spPr>
+          <a:xfrm xmlns:a="http://schemas.openxmlformats.org/drawingml/2006/main">
+            <a:off x="666750" y="3638550"/>
+            <a:ext cx="4381500" cy="266700"/>
+          </a:xfrm>
+          <a:prstGeom xmlns:a="http://schemas.openxmlformats.org/drawingml/2006/main" prst="rect">
+            <a:avLst/>
+          </a:prstGeom>
+          <a:noFill xmlns:a="http://schemas.openxmlformats.org/drawingml/2006/main"/>
+          <a:ln xmlns:a="http://schemas.openxmlformats.org/drawingml/2006/main" w="0">
+            <a:noFill/>
+          </a:ln>
+        </p:spPr>
+        <p:txBody>
+          <a:bodyPr xmlns:a="http://schemas.openxmlformats.org/drawingml/2006/main" wrap="none" lIns="0" tIns="0" rIns="0" bIns="0" anchor="ctr">
+            <a:noAutofit/>
+          </a:bodyPr>
+          <a:lstStyle xmlns:a="http://schemas.openxmlformats.org/drawingml/2006/main"/>
+          <a:p xmlns:a="http://schemas.openxmlformats.org/drawingml/2006/main">
+            <a:pPr algn="ctr">
+              <a:defRPr sz="1725" b="0">
+                <a:solidFill>
+                  <a:srgbClr val="000000"/>
+                </a:solidFill>
+                <a:latin typeface="Arial"/>
+                <a:ea typeface="Arial"/>
+                <a:cs typeface="Arial"/>
+              </a:defRPr>
+            </a:pPr>
+            <a:r>
+              <a:rPr sz="1725" b="0">
+                <a:solidFill>
+                  <a:srgbClr val="000000"/>
+                </a:solidFill>
+                <a:latin typeface="Arial"/>
+                <a:ea typeface="Arial"/>
+                <a:cs typeface="Arial"/>
+              </a:rPr>
+              <a:t>PAA, SAA, PLA, APCA</a:t>
+            </a:r>
+          </a:p>
+        </p:txBody>
+      </p:sp>
+      <p:sp>
+        <p:nvSpPr>
+          <p:cNvPr id="18" name="vectorial-detail-1">
+            <a:extLst xmlns:a="http://schemas.openxmlformats.org/drawingml/2006/main">
+              <a:ext uri="{FF2B5EF4-FFF2-40B4-BE49-F238E27FC236}">
+                <a16:creationId xmlns:a16="http://schemas.microsoft.com/office/drawing/2014/main" id="{BF6B1490-EBB6-45FC-B258-18BAD3C16648}"/>
+              </a:ext>
+            </a:extLst>
+          </p:cNvPr>
+          <p:cNvSpPr>
+            <a:spLocks xmlns:a="http://schemas.openxmlformats.org/drawingml/2006/main" noGrp="1"/>
+          </p:cNvSpPr>
+          <p:nvPr/>
+        </p:nvSpPr>
+        <p:spPr>
+          <a:xfrm xmlns:a="http://schemas.openxmlformats.org/drawingml/2006/main">
+            <a:off x="666750" y="3914775"/>
+            <a:ext cx="4381500" cy="266700"/>
+          </a:xfrm>
+          <a:prstGeom xmlns:a="http://schemas.openxmlformats.org/drawingml/2006/main" prst="rect">
+            <a:avLst/>
+          </a:prstGeom>
+          <a:noFill xmlns:a="http://schemas.openxmlformats.org/drawingml/2006/main"/>
+          <a:ln xmlns:a="http://schemas.openxmlformats.org/drawingml/2006/main" w="0">
+            <a:noFill/>
+          </a:ln>
+        </p:spPr>
+        <p:txBody>
+          <a:bodyPr xmlns:a="http://schemas.openxmlformats.org/drawingml/2006/main" wrap="none" lIns="0" tIns="0" rIns="0" bIns="0" anchor="ctr">
+            <a:noAutofit/>
+          </a:bodyPr>
+          <a:lstStyle xmlns:a="http://schemas.openxmlformats.org/drawingml/2006/main"/>
+          <a:p xmlns:a="http://schemas.openxmlformats.org/drawingml/2006/main">
+            <a:pPr algn="ctr">
+              <a:defRPr sz="1725" b="0">
+                <a:solidFill>
+                  <a:srgbClr val="000000"/>
+                </a:solidFill>
+                <a:latin typeface="Arial"/>
+                <a:ea typeface="Arial"/>
+                <a:cs typeface="Arial"/>
+              </a:defRPr>
+            </a:pPr>
+            <a:r>
+              <a:rPr sz="1725" b="0">
+                <a:solidFill>
+                  <a:srgbClr val="000000"/>
+                </a:solidFill>
+                <a:latin typeface="Arial"/>
+                <a:ea typeface="Arial"/>
+                <a:cs typeface="Arial"/>
+              </a:rPr>
+              <a:t>DFT, DWT, DCT, PCA</a:t>
+            </a:r>
+          </a:p>
+        </p:txBody>
+      </p:sp>
+      <p:sp>
+        <p:nvSpPr>
+          <p:cNvPr id="19" name="component">
+            <a:extLst xmlns:a="http://schemas.openxmlformats.org/drawingml/2006/main">
+              <a:ext uri="{FF2B5EF4-FFF2-40B4-BE49-F238E27FC236}">
+                <a16:creationId xmlns:a16="http://schemas.microsoft.com/office/drawing/2014/main" id="{8E4ED1AB-72ED-420E-935C-CE4D9CAEE643}"/>
+              </a:ext>
+            </a:extLst>
+          </p:cNvPr>
+          <p:cNvSpPr>
+            <a:spLocks xmlns:a="http://schemas.openxmlformats.org/drawingml/2006/main" noGrp="1"/>
+          </p:cNvSpPr>
+          <p:nvPr/>
+        </p:nvSpPr>
+        <p:spPr>
+          <a:xfrm xmlns:a="http://schemas.openxmlformats.org/drawingml/2006/main">
+            <a:off x="5334000" y="3105150"/>
+            <a:ext cx="4572000" cy="1314450"/>
+          </a:xfrm>
+          <a:prstGeom xmlns:a="http://schemas.openxmlformats.org/drawingml/2006/main" prst="rect">
+            <a:avLst/>
+          </a:prstGeom>
+          <a:solidFill xmlns:a="http://schemas.openxmlformats.org/drawingml/2006/main">
+            <a:srgbClr val="FFFFFF"/>
+          </a:solidFill>
+          <a:ln xmlns:a="http://schemas.openxmlformats.org/drawingml/2006/main" w="17145">
             <a:solidFill>
               <a:srgbClr val="000000"/>
             </a:solidFill>
@@ -1306,28 +2014,201 @@
       </p:sp>
       <p:sp>
         <p:nvSpPr>
-          <p:cNvPr id="9" name="right-connection-1">
-            <a:extLst xmlns:a="http://schemas.openxmlformats.org/drawingml/2006/main">
-              <a:ext uri="{FF2B5EF4-FFF2-40B4-BE49-F238E27FC236}">
-                <a16:creationId xmlns:a16="http://schemas.microsoft.com/office/drawing/2014/main" id="{B3A3DE80-BF2F-431E-99F5-DF0C58041A0B}"/>
-              </a:ext>
-            </a:extLst>
-          </p:cNvPr>
-          <p:cNvSpPr>
-            <a:spLocks xmlns:a="http://schemas.openxmlformats.org/drawingml/2006/main" noGrp="1"/>
-          </p:cNvSpPr>
-          <p:nvPr/>
-        </p:nvSpPr>
-        <p:spPr>
-          <a:xfrm xmlns:a="http://schemas.openxmlformats.org/drawingml/2006/main">
-            <a:off x="8167688" y="3309938"/>
-            <a:ext cx="404813" cy="0"/>
-          </a:xfrm>
-          <a:prstGeom xmlns:a="http://schemas.openxmlformats.org/drawingml/2006/main" prst="line">
-            <a:avLst/>
-          </a:prstGeom>
-          <a:noFill xmlns:a="http://schemas.openxmlformats.org/drawingml/2006/main"/>
-          <a:ln xmlns:a="http://schemas.openxmlformats.org/drawingml/2006/main" w="15240">
+          <p:cNvPr id="20" name="component-title">
+            <a:extLst xmlns:a="http://schemas.openxmlformats.org/drawingml/2006/main">
+              <a:ext uri="{FF2B5EF4-FFF2-40B4-BE49-F238E27FC236}">
+                <a16:creationId xmlns:a16="http://schemas.microsoft.com/office/drawing/2014/main" id="{14638AAE-3982-4D97-915A-689FA9BE2E5F}"/>
+              </a:ext>
+            </a:extLst>
+          </p:cNvPr>
+          <p:cNvSpPr>
+            <a:spLocks xmlns:a="http://schemas.openxmlformats.org/drawingml/2006/main" noGrp="1"/>
+          </p:cNvSpPr>
+          <p:nvPr/>
+        </p:nvSpPr>
+        <p:spPr>
+          <a:xfrm xmlns:a="http://schemas.openxmlformats.org/drawingml/2006/main">
+            <a:off x="5429250" y="3219450"/>
+            <a:ext cx="4381500" cy="333375"/>
+          </a:xfrm>
+          <a:prstGeom xmlns:a="http://schemas.openxmlformats.org/drawingml/2006/main" prst="rect">
+            <a:avLst/>
+          </a:prstGeom>
+          <a:noFill xmlns:a="http://schemas.openxmlformats.org/drawingml/2006/main"/>
+          <a:ln xmlns:a="http://schemas.openxmlformats.org/drawingml/2006/main" w="0">
+            <a:noFill/>
+          </a:ln>
+        </p:spPr>
+        <p:txBody>
+          <a:bodyPr xmlns:a="http://schemas.openxmlformats.org/drawingml/2006/main" wrap="none" lIns="0" tIns="0" rIns="0" bIns="0" anchor="ctr">
+            <a:noAutofit/>
+          </a:bodyPr>
+          <a:lstStyle xmlns:a="http://schemas.openxmlformats.org/drawingml/2006/main"/>
+          <a:p xmlns:a="http://schemas.openxmlformats.org/drawingml/2006/main">
+            <a:pPr algn="ctr">
+              <a:defRPr sz="2025" b="1">
+                <a:solidFill>
+                  <a:srgbClr val="000000"/>
+                </a:solidFill>
+                <a:latin typeface="Arial"/>
+                <a:ea typeface="Arial"/>
+                <a:cs typeface="Arial"/>
+              </a:defRPr>
+            </a:pPr>
+            <a:r>
+              <a:rPr sz="2025" b="1">
+                <a:solidFill>
+                  <a:srgbClr val="000000"/>
+                </a:solidFill>
+                <a:latin typeface="Arial"/>
+                <a:ea typeface="Arial"/>
+                <a:cs typeface="Arial"/>
+              </a:rPr>
+              <a:t>Component representations</a:t>
+            </a:r>
+          </a:p>
+        </p:txBody>
+      </p:sp>
+      <p:sp>
+        <p:nvSpPr>
+          <p:cNvPr id="21" name="component-detail-0">
+            <a:extLst xmlns:a="http://schemas.openxmlformats.org/drawingml/2006/main">
+              <a:ext uri="{FF2B5EF4-FFF2-40B4-BE49-F238E27FC236}">
+                <a16:creationId xmlns:a16="http://schemas.microsoft.com/office/drawing/2014/main" id="{D32E29CB-4BDC-49CF-BB2D-921703463F27}"/>
+              </a:ext>
+            </a:extLst>
+          </p:cNvPr>
+          <p:cNvSpPr>
+            <a:spLocks xmlns:a="http://schemas.openxmlformats.org/drawingml/2006/main" noGrp="1"/>
+          </p:cNvSpPr>
+          <p:nvPr/>
+        </p:nvSpPr>
+        <p:spPr>
+          <a:xfrm xmlns:a="http://schemas.openxmlformats.org/drawingml/2006/main">
+            <a:off x="5429250" y="3638550"/>
+            <a:ext cx="4381500" cy="266700"/>
+          </a:xfrm>
+          <a:prstGeom xmlns:a="http://schemas.openxmlformats.org/drawingml/2006/main" prst="rect">
+            <a:avLst/>
+          </a:prstGeom>
+          <a:noFill xmlns:a="http://schemas.openxmlformats.org/drawingml/2006/main"/>
+          <a:ln xmlns:a="http://schemas.openxmlformats.org/drawingml/2006/main" w="0">
+            <a:noFill/>
+          </a:ln>
+        </p:spPr>
+        <p:txBody>
+          <a:bodyPr xmlns:a="http://schemas.openxmlformats.org/drawingml/2006/main" wrap="none" lIns="0" tIns="0" rIns="0" bIns="0" anchor="ctr">
+            <a:noAutofit/>
+          </a:bodyPr>
+          <a:lstStyle xmlns:a="http://schemas.openxmlformats.org/drawingml/2006/main"/>
+          <a:p xmlns:a="http://schemas.openxmlformats.org/drawingml/2006/main">
+            <a:pPr algn="ctr">
+              <a:defRPr sz="1575" b="0">
+                <a:solidFill>
+                  <a:srgbClr val="000000"/>
+                </a:solidFill>
+                <a:latin typeface="Arial"/>
+                <a:ea typeface="Arial"/>
+                <a:cs typeface="Arial"/>
+              </a:defRPr>
+            </a:pPr>
+            <a:r>
+              <a:rPr sz="1575" b="0">
+                <a:solidFill>
+                  <a:srgbClr val="000000"/>
+                </a:solidFill>
+                <a:latin typeface="Arial"/>
+                <a:ea typeface="Arial"/>
+                <a:cs typeface="Arial"/>
+              </a:rPr>
+              <a:t>EMD, SSA, STL</a:t>
+            </a:r>
+          </a:p>
+        </p:txBody>
+      </p:sp>
+      <p:sp>
+        <p:nvSpPr>
+          <p:cNvPr id="22" name="component-detail-1">
+            <a:extLst xmlns:a="http://schemas.openxmlformats.org/drawingml/2006/main">
+              <a:ext uri="{FF2B5EF4-FFF2-40B4-BE49-F238E27FC236}">
+                <a16:creationId xmlns:a16="http://schemas.microsoft.com/office/drawing/2014/main" id="{5BE93A29-FDED-413D-BA47-E79CC4E31121}"/>
+              </a:ext>
+            </a:extLst>
+          </p:cNvPr>
+          <p:cNvSpPr>
+            <a:spLocks xmlns:a="http://schemas.openxmlformats.org/drawingml/2006/main" noGrp="1"/>
+          </p:cNvSpPr>
+          <p:nvPr/>
+        </p:nvSpPr>
+        <p:spPr>
+          <a:xfrm xmlns:a="http://schemas.openxmlformats.org/drawingml/2006/main">
+            <a:off x="5429250" y="3914775"/>
+            <a:ext cx="4381500" cy="266700"/>
+          </a:xfrm>
+          <a:prstGeom xmlns:a="http://schemas.openxmlformats.org/drawingml/2006/main" prst="rect">
+            <a:avLst/>
+          </a:prstGeom>
+          <a:noFill xmlns:a="http://schemas.openxmlformats.org/drawingml/2006/main"/>
+          <a:ln xmlns:a="http://schemas.openxmlformats.org/drawingml/2006/main" w="0">
+            <a:noFill/>
+          </a:ln>
+        </p:spPr>
+        <p:txBody>
+          <a:bodyPr xmlns:a="http://schemas.openxmlformats.org/drawingml/2006/main" wrap="none" lIns="0" tIns="0" rIns="0" bIns="0" anchor="ctr">
+            <a:noAutofit/>
+          </a:bodyPr>
+          <a:lstStyle xmlns:a="http://schemas.openxmlformats.org/drawingml/2006/main"/>
+          <a:p xmlns:a="http://schemas.openxmlformats.org/drawingml/2006/main">
+            <a:pPr algn="ctr">
+              <a:defRPr sz="1575" b="0">
+                <a:solidFill>
+                  <a:srgbClr val="000000"/>
+                </a:solidFill>
+                <a:latin typeface="Arial"/>
+                <a:ea typeface="Arial"/>
+                <a:cs typeface="Arial"/>
+              </a:defRPr>
+            </a:pPr>
+            <a:r>
+              <a:rPr sz="1575" b="0">
+                <a:solidFill>
+                  <a:srgbClr val="000000"/>
+                </a:solidFill>
+                <a:latin typeface="Arial"/>
+                <a:ea typeface="Arial"/>
+                <a:cs typeface="Arial"/>
+              </a:rPr>
+              <a:t>Work: DeTime, TSDecompose-Benchmark</a:t>
+            </a:r>
+          </a:p>
+        </p:txBody>
+      </p:sp>
+      <p:sp>
+        <p:nvSpPr>
+          <p:cNvPr id="23" name="symbolic">
+            <a:extLst xmlns:a="http://schemas.openxmlformats.org/drawingml/2006/main">
+              <a:ext uri="{FF2B5EF4-FFF2-40B4-BE49-F238E27FC236}">
+                <a16:creationId xmlns:a16="http://schemas.microsoft.com/office/drawing/2014/main" id="{053347D6-E773-444A-BF9F-D12791BA2DEA}"/>
+              </a:ext>
+            </a:extLst>
+          </p:cNvPr>
+          <p:cNvSpPr>
+            <a:spLocks xmlns:a="http://schemas.openxmlformats.org/drawingml/2006/main" noGrp="1"/>
+          </p:cNvSpPr>
+          <p:nvPr/>
+        </p:nvSpPr>
+        <p:spPr>
+          <a:xfrm xmlns:a="http://schemas.openxmlformats.org/drawingml/2006/main">
+            <a:off x="10096500" y="3105150"/>
+            <a:ext cx="4572000" cy="1314450"/>
+          </a:xfrm>
+          <a:prstGeom xmlns:a="http://schemas.openxmlformats.org/drawingml/2006/main" prst="rect">
+            <a:avLst/>
+          </a:prstGeom>
+          <a:solidFill xmlns:a="http://schemas.openxmlformats.org/drawingml/2006/main">
+            <a:srgbClr val="FFFFFF"/>
+          </a:solidFill>
+          <a:ln xmlns:a="http://schemas.openxmlformats.org/drawingml/2006/main" w="17145">
             <a:solidFill>
               <a:srgbClr val="000000"/>
             </a:solidFill>
@@ -1337,28 +2218,201 @@
       </p:sp>
       <p:sp>
         <p:nvSpPr>
-          <p:cNvPr id="10" name="left-connection-2">
-            <a:extLst xmlns:a="http://schemas.openxmlformats.org/drawingml/2006/main">
-              <a:ext uri="{FF2B5EF4-FFF2-40B4-BE49-F238E27FC236}">
-                <a16:creationId xmlns:a16="http://schemas.microsoft.com/office/drawing/2014/main" id="{AF14ADF6-788D-4E1F-AB5A-205B370523DE}"/>
-              </a:ext>
-            </a:extLst>
-          </p:cNvPr>
-          <p:cNvSpPr>
-            <a:spLocks xmlns:a="http://schemas.openxmlformats.org/drawingml/2006/main" noGrp="1"/>
-          </p:cNvSpPr>
-          <p:nvPr/>
-        </p:nvSpPr>
-        <p:spPr>
-          <a:xfrm xmlns:a="http://schemas.openxmlformats.org/drawingml/2006/main">
-            <a:off x="3619500" y="5214938"/>
-            <a:ext cx="404813" cy="0"/>
-          </a:xfrm>
-          <a:prstGeom xmlns:a="http://schemas.openxmlformats.org/drawingml/2006/main" prst="line">
-            <a:avLst/>
-          </a:prstGeom>
-          <a:noFill xmlns:a="http://schemas.openxmlformats.org/drawingml/2006/main"/>
-          <a:ln xmlns:a="http://schemas.openxmlformats.org/drawingml/2006/main" w="15240">
+          <p:cNvPr id="24" name="symbolic-title">
+            <a:extLst xmlns:a="http://schemas.openxmlformats.org/drawingml/2006/main">
+              <a:ext uri="{FF2B5EF4-FFF2-40B4-BE49-F238E27FC236}">
+                <a16:creationId xmlns:a16="http://schemas.microsoft.com/office/drawing/2014/main" id="{30EB4E05-8CB6-4CAE-8358-97B2CC2851C0}"/>
+              </a:ext>
+            </a:extLst>
+          </p:cNvPr>
+          <p:cNvSpPr>
+            <a:spLocks xmlns:a="http://schemas.openxmlformats.org/drawingml/2006/main" noGrp="1"/>
+          </p:cNvSpPr>
+          <p:nvPr/>
+        </p:nvSpPr>
+        <p:spPr>
+          <a:xfrm xmlns:a="http://schemas.openxmlformats.org/drawingml/2006/main">
+            <a:off x="10191750" y="3219450"/>
+            <a:ext cx="4381500" cy="333375"/>
+          </a:xfrm>
+          <a:prstGeom xmlns:a="http://schemas.openxmlformats.org/drawingml/2006/main" prst="rect">
+            <a:avLst/>
+          </a:prstGeom>
+          <a:noFill xmlns:a="http://schemas.openxmlformats.org/drawingml/2006/main"/>
+          <a:ln xmlns:a="http://schemas.openxmlformats.org/drawingml/2006/main" w="0">
+            <a:noFill/>
+          </a:ln>
+        </p:spPr>
+        <p:txBody>
+          <a:bodyPr xmlns:a="http://schemas.openxmlformats.org/drawingml/2006/main" wrap="none" lIns="0" tIns="0" rIns="0" bIns="0" anchor="ctr">
+            <a:noAutofit/>
+          </a:bodyPr>
+          <a:lstStyle xmlns:a="http://schemas.openxmlformats.org/drawingml/2006/main"/>
+          <a:p xmlns:a="http://schemas.openxmlformats.org/drawingml/2006/main">
+            <a:pPr algn="ctr">
+              <a:defRPr sz="2025" b="1">
+                <a:solidFill>
+                  <a:srgbClr val="000000"/>
+                </a:solidFill>
+                <a:latin typeface="Arial"/>
+                <a:ea typeface="Arial"/>
+                <a:cs typeface="Arial"/>
+              </a:defRPr>
+            </a:pPr>
+            <a:r>
+              <a:rPr sz="2025" b="1">
+                <a:solidFill>
+                  <a:srgbClr val="000000"/>
+                </a:solidFill>
+                <a:latin typeface="Arial"/>
+                <a:ea typeface="Arial"/>
+                <a:cs typeface="Arial"/>
+              </a:rPr>
+              <a:t>Symbolic representations</a:t>
+            </a:r>
+          </a:p>
+        </p:txBody>
+      </p:sp>
+      <p:sp>
+        <p:nvSpPr>
+          <p:cNvPr id="25" name="symbolic-detail-0">
+            <a:extLst xmlns:a="http://schemas.openxmlformats.org/drawingml/2006/main">
+              <a:ext uri="{FF2B5EF4-FFF2-40B4-BE49-F238E27FC236}">
+                <a16:creationId xmlns:a16="http://schemas.microsoft.com/office/drawing/2014/main" id="{CA905138-4394-496B-8566-C8C03A0A512E}"/>
+              </a:ext>
+            </a:extLst>
+          </p:cNvPr>
+          <p:cNvSpPr>
+            <a:spLocks xmlns:a="http://schemas.openxmlformats.org/drawingml/2006/main" noGrp="1"/>
+          </p:cNvSpPr>
+          <p:nvPr/>
+        </p:nvSpPr>
+        <p:spPr>
+          <a:xfrm xmlns:a="http://schemas.openxmlformats.org/drawingml/2006/main">
+            <a:off x="10191750" y="3638550"/>
+            <a:ext cx="4381500" cy="266700"/>
+          </a:xfrm>
+          <a:prstGeom xmlns:a="http://schemas.openxmlformats.org/drawingml/2006/main" prst="rect">
+            <a:avLst/>
+          </a:prstGeom>
+          <a:noFill xmlns:a="http://schemas.openxmlformats.org/drawingml/2006/main"/>
+          <a:ln xmlns:a="http://schemas.openxmlformats.org/drawingml/2006/main" w="0">
+            <a:noFill/>
+          </a:ln>
+        </p:spPr>
+        <p:txBody>
+          <a:bodyPr xmlns:a="http://schemas.openxmlformats.org/drawingml/2006/main" wrap="none" lIns="0" tIns="0" rIns="0" bIns="0" anchor="ctr">
+            <a:noAutofit/>
+          </a:bodyPr>
+          <a:lstStyle xmlns:a="http://schemas.openxmlformats.org/drawingml/2006/main"/>
+          <a:p xmlns:a="http://schemas.openxmlformats.org/drawingml/2006/main">
+            <a:pPr algn="ctr">
+              <a:defRPr sz="1725" b="0">
+                <a:solidFill>
+                  <a:srgbClr val="000000"/>
+                </a:solidFill>
+                <a:latin typeface="Arial"/>
+                <a:ea typeface="Arial"/>
+                <a:cs typeface="Arial"/>
+              </a:defRPr>
+            </a:pPr>
+            <a:r>
+              <a:rPr sz="1725" b="0">
+                <a:solidFill>
+                  <a:srgbClr val="000000"/>
+                </a:solidFill>
+                <a:latin typeface="Arial"/>
+                <a:ea typeface="Arial"/>
+                <a:cs typeface="Arial"/>
+              </a:rPr>
+              <a:t>SAX, SAA-SAX, SFA, ABBA</a:t>
+            </a:r>
+          </a:p>
+        </p:txBody>
+      </p:sp>
+      <p:sp>
+        <p:nvSpPr>
+          <p:cNvPr id="26" name="symbolic-detail-1">
+            <a:extLst xmlns:a="http://schemas.openxmlformats.org/drawingml/2006/main">
+              <a:ext uri="{FF2B5EF4-FFF2-40B4-BE49-F238E27FC236}">
+                <a16:creationId xmlns:a16="http://schemas.microsoft.com/office/drawing/2014/main" id="{39FDF516-8069-4D9F-B082-1ABFA38A07EC}"/>
+              </a:ext>
+            </a:extLst>
+          </p:cNvPr>
+          <p:cNvSpPr>
+            <a:spLocks xmlns:a="http://schemas.openxmlformats.org/drawingml/2006/main" noGrp="1"/>
+          </p:cNvSpPr>
+          <p:nvPr/>
+        </p:nvSpPr>
+        <p:spPr>
+          <a:xfrm xmlns:a="http://schemas.openxmlformats.org/drawingml/2006/main">
+            <a:off x="10191750" y="3914775"/>
+            <a:ext cx="4381500" cy="266700"/>
+          </a:xfrm>
+          <a:prstGeom xmlns:a="http://schemas.openxmlformats.org/drawingml/2006/main" prst="rect">
+            <a:avLst/>
+          </a:prstGeom>
+          <a:noFill xmlns:a="http://schemas.openxmlformats.org/drawingml/2006/main"/>
+          <a:ln xmlns:a="http://schemas.openxmlformats.org/drawingml/2006/main" w="0">
+            <a:noFill/>
+          </a:ln>
+        </p:spPr>
+        <p:txBody>
+          <a:bodyPr xmlns:a="http://schemas.openxmlformats.org/drawingml/2006/main" wrap="none" lIns="0" tIns="0" rIns="0" bIns="0" anchor="ctr">
+            <a:noAutofit/>
+          </a:bodyPr>
+          <a:lstStyle xmlns:a="http://schemas.openxmlformats.org/drawingml/2006/main"/>
+          <a:p xmlns:a="http://schemas.openxmlformats.org/drawingml/2006/main">
+            <a:pPr algn="ctr">
+              <a:defRPr sz="1725" b="0">
+                <a:solidFill>
+                  <a:srgbClr val="000000"/>
+                </a:solidFill>
+                <a:latin typeface="Arial"/>
+                <a:ea typeface="Arial"/>
+                <a:cs typeface="Arial"/>
+              </a:defRPr>
+            </a:pPr>
+            <a:r>
+              <a:rPr sz="1725" b="0">
+                <a:solidFill>
+                  <a:srgbClr val="000000"/>
+                </a:solidFill>
+                <a:latin typeface="Arial"/>
+                <a:ea typeface="Arial"/>
+                <a:cs typeface="Arial"/>
+              </a:rPr>
+              <a:t>Work: temporal tokenization</a:t>
+            </a:r>
+          </a:p>
+        </p:txBody>
+      </p:sp>
+      <p:sp>
+        <p:nvSpPr>
+          <p:cNvPr id="27" name="features">
+            <a:extLst xmlns:a="http://schemas.openxmlformats.org/drawingml/2006/main">
+              <a:ext uri="{FF2B5EF4-FFF2-40B4-BE49-F238E27FC236}">
+                <a16:creationId xmlns:a16="http://schemas.microsoft.com/office/drawing/2014/main" id="{B533C830-647C-461C-87CD-02F631DA088D}"/>
+              </a:ext>
+            </a:extLst>
+          </p:cNvPr>
+          <p:cNvSpPr>
+            <a:spLocks xmlns:a="http://schemas.openxmlformats.org/drawingml/2006/main" noGrp="1"/>
+          </p:cNvSpPr>
+          <p:nvPr/>
+        </p:nvSpPr>
+        <p:spPr>
+          <a:xfrm xmlns:a="http://schemas.openxmlformats.org/drawingml/2006/main">
+            <a:off x="571500" y="4572000"/>
+            <a:ext cx="4572000" cy="1314450"/>
+          </a:xfrm>
+          <a:prstGeom xmlns:a="http://schemas.openxmlformats.org/drawingml/2006/main" prst="rect">
+            <a:avLst/>
+          </a:prstGeom>
+          <a:solidFill xmlns:a="http://schemas.openxmlformats.org/drawingml/2006/main">
+            <a:srgbClr val="FFFFFF"/>
+          </a:solidFill>
+          <a:ln xmlns:a="http://schemas.openxmlformats.org/drawingml/2006/main" w="17145">
             <a:solidFill>
               <a:srgbClr val="000000"/>
             </a:solidFill>
@@ -1368,28 +2422,201 @@
       </p:sp>
       <p:sp>
         <p:nvSpPr>
-          <p:cNvPr id="11" name="right-connection-2">
-            <a:extLst xmlns:a="http://schemas.openxmlformats.org/drawingml/2006/main">
-              <a:ext uri="{FF2B5EF4-FFF2-40B4-BE49-F238E27FC236}">
-                <a16:creationId xmlns:a16="http://schemas.microsoft.com/office/drawing/2014/main" id="{DFAA9936-ED78-473F-8793-D2B850E109C8}"/>
-              </a:ext>
-            </a:extLst>
-          </p:cNvPr>
-          <p:cNvSpPr>
-            <a:spLocks xmlns:a="http://schemas.openxmlformats.org/drawingml/2006/main" noGrp="1"/>
-          </p:cNvSpPr>
-          <p:nvPr/>
-        </p:nvSpPr>
-        <p:spPr>
-          <a:xfrm xmlns:a="http://schemas.openxmlformats.org/drawingml/2006/main">
-            <a:off x="8167688" y="5214938"/>
-            <a:ext cx="404813" cy="0"/>
-          </a:xfrm>
-          <a:prstGeom xmlns:a="http://schemas.openxmlformats.org/drawingml/2006/main" prst="line">
-            <a:avLst/>
-          </a:prstGeom>
-          <a:noFill xmlns:a="http://schemas.openxmlformats.org/drawingml/2006/main"/>
-          <a:ln xmlns:a="http://schemas.openxmlformats.org/drawingml/2006/main" w="15240">
+          <p:cNvPr id="28" name="features-title">
+            <a:extLst xmlns:a="http://schemas.openxmlformats.org/drawingml/2006/main">
+              <a:ext uri="{FF2B5EF4-FFF2-40B4-BE49-F238E27FC236}">
+                <a16:creationId xmlns:a16="http://schemas.microsoft.com/office/drawing/2014/main" id="{C6D93C33-B1E8-4ED1-AD03-637630F8E0EC}"/>
+              </a:ext>
+            </a:extLst>
+          </p:cNvPr>
+          <p:cNvSpPr>
+            <a:spLocks xmlns:a="http://schemas.openxmlformats.org/drawingml/2006/main" noGrp="1"/>
+          </p:cNvSpPr>
+          <p:nvPr/>
+        </p:nvSpPr>
+        <p:spPr>
+          <a:xfrm xmlns:a="http://schemas.openxmlformats.org/drawingml/2006/main">
+            <a:off x="666750" y="4686300"/>
+            <a:ext cx="4381500" cy="333375"/>
+          </a:xfrm>
+          <a:prstGeom xmlns:a="http://schemas.openxmlformats.org/drawingml/2006/main" prst="rect">
+            <a:avLst/>
+          </a:prstGeom>
+          <a:noFill xmlns:a="http://schemas.openxmlformats.org/drawingml/2006/main"/>
+          <a:ln xmlns:a="http://schemas.openxmlformats.org/drawingml/2006/main" w="0">
+            <a:noFill/>
+          </a:ln>
+        </p:spPr>
+        <p:txBody>
+          <a:bodyPr xmlns:a="http://schemas.openxmlformats.org/drawingml/2006/main" wrap="none" lIns="0" tIns="0" rIns="0" bIns="0" anchor="ctr">
+            <a:noAutofit/>
+          </a:bodyPr>
+          <a:lstStyle xmlns:a="http://schemas.openxmlformats.org/drawingml/2006/main"/>
+          <a:p xmlns:a="http://schemas.openxmlformats.org/drawingml/2006/main">
+            <a:pPr algn="ctr">
+              <a:defRPr sz="2025" b="1">
+                <a:solidFill>
+                  <a:srgbClr val="000000"/>
+                </a:solidFill>
+                <a:latin typeface="Arial"/>
+                <a:ea typeface="Arial"/>
+                <a:cs typeface="Arial"/>
+              </a:defRPr>
+            </a:pPr>
+            <a:r>
+              <a:rPr sz="2025" b="1">
+                <a:solidFill>
+                  <a:srgbClr val="000000"/>
+                </a:solidFill>
+                <a:latin typeface="Arial"/>
+                <a:ea typeface="Arial"/>
+                <a:cs typeface="Arial"/>
+              </a:rPr>
+              <a:t>Statistical &amp; dynamical features</a:t>
+            </a:r>
+          </a:p>
+        </p:txBody>
+      </p:sp>
+      <p:sp>
+        <p:nvSpPr>
+          <p:cNvPr id="29" name="features-detail-0">
+            <a:extLst xmlns:a="http://schemas.openxmlformats.org/drawingml/2006/main">
+              <a:ext uri="{FF2B5EF4-FFF2-40B4-BE49-F238E27FC236}">
+                <a16:creationId xmlns:a16="http://schemas.microsoft.com/office/drawing/2014/main" id="{9292D46B-AC90-4EAE-A331-547C959DC759}"/>
+              </a:ext>
+            </a:extLst>
+          </p:cNvPr>
+          <p:cNvSpPr>
+            <a:spLocks xmlns:a="http://schemas.openxmlformats.org/drawingml/2006/main" noGrp="1"/>
+          </p:cNvSpPr>
+          <p:nvPr/>
+        </p:nvSpPr>
+        <p:spPr>
+          <a:xfrm xmlns:a="http://schemas.openxmlformats.org/drawingml/2006/main">
+            <a:off x="666750" y="5105400"/>
+            <a:ext cx="4381500" cy="266700"/>
+          </a:xfrm>
+          <a:prstGeom xmlns:a="http://schemas.openxmlformats.org/drawingml/2006/main" prst="rect">
+            <a:avLst/>
+          </a:prstGeom>
+          <a:noFill xmlns:a="http://schemas.openxmlformats.org/drawingml/2006/main"/>
+          <a:ln xmlns:a="http://schemas.openxmlformats.org/drawingml/2006/main" w="0">
+            <a:noFill/>
+          </a:ln>
+        </p:spPr>
+        <p:txBody>
+          <a:bodyPr xmlns:a="http://schemas.openxmlformats.org/drawingml/2006/main" wrap="none" lIns="0" tIns="0" rIns="0" bIns="0" anchor="ctr">
+            <a:noAutofit/>
+          </a:bodyPr>
+          <a:lstStyle xmlns:a="http://schemas.openxmlformats.org/drawingml/2006/main"/>
+          <a:p xmlns:a="http://schemas.openxmlformats.org/drawingml/2006/main">
+            <a:pPr algn="ctr">
+              <a:defRPr sz="1575" b="0">
+                <a:solidFill>
+                  <a:srgbClr val="000000"/>
+                </a:solidFill>
+                <a:latin typeface="Arial"/>
+                <a:ea typeface="Arial"/>
+                <a:cs typeface="Arial"/>
+              </a:defRPr>
+            </a:pPr>
+            <a:r>
+              <a:rPr sz="1575" b="0">
+                <a:solidFill>
+                  <a:srgbClr val="000000"/>
+                </a:solidFill>
+                <a:latin typeface="Arial"/>
+                <a:ea typeface="Arial"/>
+                <a:cs typeface="Arial"/>
+              </a:rPr>
+              <a:t>Statistical moments, entropy, recurrence</a:t>
+            </a:r>
+          </a:p>
+        </p:txBody>
+      </p:sp>
+      <p:sp>
+        <p:nvSpPr>
+          <p:cNvPr id="30" name="features-detail-1">
+            <a:extLst xmlns:a="http://schemas.openxmlformats.org/drawingml/2006/main">
+              <a:ext uri="{FF2B5EF4-FFF2-40B4-BE49-F238E27FC236}">
+                <a16:creationId xmlns:a16="http://schemas.microsoft.com/office/drawing/2014/main" id="{BAF8FF90-D48C-4D27-9440-BBC0E8F381AF}"/>
+              </a:ext>
+            </a:extLst>
+          </p:cNvPr>
+          <p:cNvSpPr>
+            <a:spLocks xmlns:a="http://schemas.openxmlformats.org/drawingml/2006/main" noGrp="1"/>
+          </p:cNvSpPr>
+          <p:nvPr/>
+        </p:nvSpPr>
+        <p:spPr>
+          <a:xfrm xmlns:a="http://schemas.openxmlformats.org/drawingml/2006/main">
+            <a:off x="666750" y="5381625"/>
+            <a:ext cx="4381500" cy="266700"/>
+          </a:xfrm>
+          <a:prstGeom xmlns:a="http://schemas.openxmlformats.org/drawingml/2006/main" prst="rect">
+            <a:avLst/>
+          </a:prstGeom>
+          <a:noFill xmlns:a="http://schemas.openxmlformats.org/drawingml/2006/main"/>
+          <a:ln xmlns:a="http://schemas.openxmlformats.org/drawingml/2006/main" w="0">
+            <a:noFill/>
+          </a:ln>
+        </p:spPr>
+        <p:txBody>
+          <a:bodyPr xmlns:a="http://schemas.openxmlformats.org/drawingml/2006/main" wrap="none" lIns="0" tIns="0" rIns="0" bIns="0" anchor="ctr">
+            <a:noAutofit/>
+          </a:bodyPr>
+          <a:lstStyle xmlns:a="http://schemas.openxmlformats.org/drawingml/2006/main"/>
+          <a:p xmlns:a="http://schemas.openxmlformats.org/drawingml/2006/main">
+            <a:pPr algn="ctr">
+              <a:defRPr sz="1575" b="0">
+                <a:solidFill>
+                  <a:srgbClr val="000000"/>
+                </a:solidFill>
+                <a:latin typeface="Arial"/>
+                <a:ea typeface="Arial"/>
+                <a:cs typeface="Arial"/>
+              </a:defRPr>
+            </a:pPr>
+            <a:r>
+              <a:rPr sz="1575" b="0">
+                <a:solidFill>
+                  <a:srgbClr val="000000"/>
+                </a:solidFill>
+                <a:latin typeface="Arial"/>
+                <a:ea typeface="Arial"/>
+                <a:cs typeface="Arial"/>
+              </a:rPr>
+              <a:t>SampEn, PE, RQA</a:t>
+            </a:r>
+          </a:p>
+        </p:txBody>
+      </p:sp>
+      <p:sp>
+        <p:nvSpPr>
+          <p:cNvPr id="31" name="structural">
+            <a:extLst xmlns:a="http://schemas.openxmlformats.org/drawingml/2006/main">
+              <a:ext uri="{FF2B5EF4-FFF2-40B4-BE49-F238E27FC236}">
+                <a16:creationId xmlns:a16="http://schemas.microsoft.com/office/drawing/2014/main" id="{A60F2C33-8CFB-4525-9633-827A9E012578}"/>
+              </a:ext>
+            </a:extLst>
+          </p:cNvPr>
+          <p:cNvSpPr>
+            <a:spLocks xmlns:a="http://schemas.openxmlformats.org/drawingml/2006/main" noGrp="1"/>
+          </p:cNvSpPr>
+          <p:nvPr/>
+        </p:nvSpPr>
+        <p:spPr>
+          <a:xfrm xmlns:a="http://schemas.openxmlformats.org/drawingml/2006/main">
+            <a:off x="5334000" y="4572000"/>
+            <a:ext cx="4572000" cy="1314450"/>
+          </a:xfrm>
+          <a:prstGeom xmlns:a="http://schemas.openxmlformats.org/drawingml/2006/main" prst="rect">
+            <a:avLst/>
+          </a:prstGeom>
+          <a:solidFill xmlns:a="http://schemas.openxmlformats.org/drawingml/2006/main">
+            <a:srgbClr val="FFFFFF"/>
+          </a:solidFill>
+          <a:ln xmlns:a="http://schemas.openxmlformats.org/drawingml/2006/main" w="17145">
             <a:solidFill>
               <a:srgbClr val="000000"/>
             </a:solidFill>
@@ -1399,22 +2626,193 @@
       </p:sp>
       <p:sp>
         <p:nvSpPr>
-          <p:cNvPr id="12" name="temporal-representation">
-            <a:extLst xmlns:a="http://schemas.openxmlformats.org/drawingml/2006/main">
-              <a:ext uri="{FF2B5EF4-FFF2-40B4-BE49-F238E27FC236}">
-                <a16:creationId xmlns:a16="http://schemas.microsoft.com/office/drawing/2014/main" id="{2E16DBB3-282E-4276-9AD8-4D9605B1D3DA}"/>
-              </a:ext>
-            </a:extLst>
-          </p:cNvPr>
-          <p:cNvSpPr>
-            <a:spLocks xmlns:a="http://schemas.openxmlformats.org/drawingml/2006/main" noGrp="1"/>
-          </p:cNvSpPr>
-          <p:nvPr/>
-        </p:nvSpPr>
-        <p:spPr>
-          <a:xfrm xmlns:a="http://schemas.openxmlformats.org/drawingml/2006/main">
-            <a:off x="4429125" y="2643188"/>
-            <a:ext cx="3333750" cy="1333500"/>
+          <p:cNvPr id="32" name="structural-title">
+            <a:extLst xmlns:a="http://schemas.openxmlformats.org/drawingml/2006/main">
+              <a:ext uri="{FF2B5EF4-FFF2-40B4-BE49-F238E27FC236}">
+                <a16:creationId xmlns:a16="http://schemas.microsoft.com/office/drawing/2014/main" id="{DE42A067-113C-4170-9EC7-16A752010827}"/>
+              </a:ext>
+            </a:extLst>
+          </p:cNvPr>
+          <p:cNvSpPr>
+            <a:spLocks xmlns:a="http://schemas.openxmlformats.org/drawingml/2006/main" noGrp="1"/>
+          </p:cNvSpPr>
+          <p:nvPr/>
+        </p:nvSpPr>
+        <p:spPr>
+          <a:xfrm xmlns:a="http://schemas.openxmlformats.org/drawingml/2006/main">
+            <a:off x="5429250" y="4686300"/>
+            <a:ext cx="4381500" cy="333375"/>
+          </a:xfrm>
+          <a:prstGeom xmlns:a="http://schemas.openxmlformats.org/drawingml/2006/main" prst="rect">
+            <a:avLst/>
+          </a:prstGeom>
+          <a:noFill xmlns:a="http://schemas.openxmlformats.org/drawingml/2006/main"/>
+          <a:ln xmlns:a="http://schemas.openxmlformats.org/drawingml/2006/main" w="0">
+            <a:noFill/>
+          </a:ln>
+        </p:spPr>
+        <p:txBody>
+          <a:bodyPr xmlns:a="http://schemas.openxmlformats.org/drawingml/2006/main" wrap="none" lIns="0" tIns="0" rIns="0" bIns="0" anchor="ctr">
+            <a:noAutofit/>
+          </a:bodyPr>
+          <a:lstStyle xmlns:a="http://schemas.openxmlformats.org/drawingml/2006/main"/>
+          <a:p xmlns:a="http://schemas.openxmlformats.org/drawingml/2006/main">
+            <a:pPr algn="ctr">
+              <a:defRPr sz="2025" b="1">
+                <a:solidFill>
+                  <a:srgbClr val="000000"/>
+                </a:solidFill>
+                <a:latin typeface="Arial"/>
+                <a:ea typeface="Arial"/>
+                <a:cs typeface="Arial"/>
+              </a:defRPr>
+            </a:pPr>
+            <a:r>
+              <a:rPr sz="2025" b="1">
+                <a:solidFill>
+                  <a:srgbClr val="000000"/>
+                </a:solidFill>
+                <a:latin typeface="Arial"/>
+                <a:ea typeface="Arial"/>
+                <a:cs typeface="Arial"/>
+              </a:rPr>
+              <a:t>Image &amp; graph representations</a:t>
+            </a:r>
+          </a:p>
+        </p:txBody>
+      </p:sp>
+      <p:sp>
+        <p:nvSpPr>
+          <p:cNvPr id="33" name="structural-detail-0">
+            <a:extLst xmlns:a="http://schemas.openxmlformats.org/drawingml/2006/main">
+              <a:ext uri="{FF2B5EF4-FFF2-40B4-BE49-F238E27FC236}">
+                <a16:creationId xmlns:a16="http://schemas.microsoft.com/office/drawing/2014/main" id="{128CEEC8-27FC-4898-B541-5E0F07B0CAF7}"/>
+              </a:ext>
+            </a:extLst>
+          </p:cNvPr>
+          <p:cNvSpPr>
+            <a:spLocks xmlns:a="http://schemas.openxmlformats.org/drawingml/2006/main" noGrp="1"/>
+          </p:cNvSpPr>
+          <p:nvPr/>
+        </p:nvSpPr>
+        <p:spPr>
+          <a:xfrm xmlns:a="http://schemas.openxmlformats.org/drawingml/2006/main">
+            <a:off x="5429250" y="5105400"/>
+            <a:ext cx="4381500" cy="266700"/>
+          </a:xfrm>
+          <a:prstGeom xmlns:a="http://schemas.openxmlformats.org/drawingml/2006/main" prst="rect">
+            <a:avLst/>
+          </a:prstGeom>
+          <a:noFill xmlns:a="http://schemas.openxmlformats.org/drawingml/2006/main"/>
+          <a:ln xmlns:a="http://schemas.openxmlformats.org/drawingml/2006/main" w="0">
+            <a:noFill/>
+          </a:ln>
+        </p:spPr>
+        <p:txBody>
+          <a:bodyPr xmlns:a="http://schemas.openxmlformats.org/drawingml/2006/main" wrap="none" lIns="0" tIns="0" rIns="0" bIns="0" anchor="ctr">
+            <a:noAutofit/>
+          </a:bodyPr>
+          <a:lstStyle xmlns:a="http://schemas.openxmlformats.org/drawingml/2006/main"/>
+          <a:p xmlns:a="http://schemas.openxmlformats.org/drawingml/2006/main">
+            <a:pPr algn="ctr">
+              <a:defRPr sz="1725" b="0">
+                <a:solidFill>
+                  <a:srgbClr val="000000"/>
+                </a:solidFill>
+                <a:latin typeface="Arial"/>
+                <a:ea typeface="Arial"/>
+                <a:cs typeface="Arial"/>
+              </a:defRPr>
+            </a:pPr>
+            <a:r>
+              <a:rPr sz="1725" b="0">
+                <a:solidFill>
+                  <a:srgbClr val="000000"/>
+                </a:solidFill>
+                <a:latin typeface="Arial"/>
+                <a:ea typeface="Arial"/>
+                <a:cs typeface="Arial"/>
+              </a:rPr>
+              <a:t>GAF, MTF, RP, visibility graphs</a:t>
+            </a:r>
+          </a:p>
+        </p:txBody>
+      </p:sp>
+      <p:sp>
+        <p:nvSpPr>
+          <p:cNvPr id="34" name="structural-detail-1">
+            <a:extLst xmlns:a="http://schemas.openxmlformats.org/drawingml/2006/main">
+              <a:ext uri="{FF2B5EF4-FFF2-40B4-BE49-F238E27FC236}">
+                <a16:creationId xmlns:a16="http://schemas.microsoft.com/office/drawing/2014/main" id="{2A2AF773-63A8-408D-8534-B940B76041B5}"/>
+              </a:ext>
+            </a:extLst>
+          </p:cNvPr>
+          <p:cNvSpPr>
+            <a:spLocks xmlns:a="http://schemas.openxmlformats.org/drawingml/2006/main" noGrp="1"/>
+          </p:cNvSpPr>
+          <p:nvPr/>
+        </p:nvSpPr>
+        <p:spPr>
+          <a:xfrm xmlns:a="http://schemas.openxmlformats.org/drawingml/2006/main">
+            <a:off x="5429250" y="5381625"/>
+            <a:ext cx="4381500" cy="266700"/>
+          </a:xfrm>
+          <a:prstGeom xmlns:a="http://schemas.openxmlformats.org/drawingml/2006/main" prst="rect">
+            <a:avLst/>
+          </a:prstGeom>
+          <a:noFill xmlns:a="http://schemas.openxmlformats.org/drawingml/2006/main"/>
+          <a:ln xmlns:a="http://schemas.openxmlformats.org/drawingml/2006/main" w="0">
+            <a:noFill/>
+          </a:ln>
+        </p:spPr>
+        <p:txBody>
+          <a:bodyPr xmlns:a="http://schemas.openxmlformats.org/drawingml/2006/main" wrap="none" lIns="0" tIns="0" rIns="0" bIns="0" anchor="ctr">
+            <a:noAutofit/>
+          </a:bodyPr>
+          <a:lstStyle xmlns:a="http://schemas.openxmlformats.org/drawingml/2006/main"/>
+          <a:p xmlns:a="http://schemas.openxmlformats.org/drawingml/2006/main">
+            <a:pPr algn="ctr">
+              <a:defRPr sz="1725" b="0">
+                <a:solidFill>
+                  <a:srgbClr val="000000"/>
+                </a:solidFill>
+                <a:latin typeface="Arial"/>
+                <a:ea typeface="Arial"/>
+                <a:cs typeface="Arial"/>
+              </a:defRPr>
+            </a:pPr>
+            <a:r>
+              <a:rPr sz="1725" b="0">
+                <a:solidFill>
+                  <a:srgbClr val="000000"/>
+                </a:solidFill>
+                <a:latin typeface="Arial"/>
+                <a:ea typeface="Arial"/>
+                <a:cs typeface="Arial"/>
+              </a:rPr>
+              <a:t>Time-frequency maps: STFT, CWT</a:t>
+            </a:r>
+          </a:p>
+        </p:txBody>
+      </p:sp>
+      <p:sp>
+        <p:nvSpPr>
+          <p:cNvPr id="35" name="learned">
+            <a:extLst xmlns:a="http://schemas.openxmlformats.org/drawingml/2006/main">
+              <a:ext uri="{FF2B5EF4-FFF2-40B4-BE49-F238E27FC236}">
+                <a16:creationId xmlns:a16="http://schemas.microsoft.com/office/drawing/2014/main" id="{F77C7EA8-9CC0-46E2-B782-8A1B2461EED2}"/>
+              </a:ext>
+            </a:extLst>
+          </p:cNvPr>
+          <p:cNvSpPr>
+            <a:spLocks xmlns:a="http://schemas.openxmlformats.org/drawingml/2006/main" noGrp="1"/>
+          </p:cNvSpPr>
+          <p:nvPr/>
+        </p:nvSpPr>
+        <p:spPr>
+          <a:xfrm xmlns:a="http://schemas.openxmlformats.org/drawingml/2006/main">
+            <a:off x="10096500" y="4572000"/>
+            <a:ext cx="4572000" cy="1314450"/>
           </a:xfrm>
           <a:prstGeom xmlns:a="http://schemas.openxmlformats.org/drawingml/2006/main" prst="rect">
             <a:avLst/>
@@ -1422,7 +2820,7 @@
           <a:solidFill xmlns:a="http://schemas.openxmlformats.org/drawingml/2006/main">
             <a:srgbClr val="FFFFFF"/>
           </a:solidFill>
-          <a:ln xmlns:a="http://schemas.openxmlformats.org/drawingml/2006/main" w="19050">
+          <a:ln xmlns:a="http://schemas.openxmlformats.org/drawingml/2006/main" w="17145">
             <a:solidFill>
               <a:srgbClr val="000000"/>
             </a:solidFill>
@@ -1432,22 +2830,22 @@
       </p:sp>
       <p:sp>
         <p:nvSpPr>
-          <p:cNvPr id="13" name="core-label">
-            <a:extLst xmlns:a="http://schemas.openxmlformats.org/drawingml/2006/main">
-              <a:ext uri="{FF2B5EF4-FFF2-40B4-BE49-F238E27FC236}">
-                <a16:creationId xmlns:a16="http://schemas.microsoft.com/office/drawing/2014/main" id="{F13903FD-4371-4A78-9DC6-2CFFA8151500}"/>
-              </a:ext>
-            </a:extLst>
-          </p:cNvPr>
-          <p:cNvSpPr>
-            <a:spLocks xmlns:a="http://schemas.openxmlformats.org/drawingml/2006/main" noGrp="1"/>
-          </p:cNvSpPr>
-          <p:nvPr/>
-        </p:nvSpPr>
-        <p:spPr>
-          <a:xfrm xmlns:a="http://schemas.openxmlformats.org/drawingml/2006/main">
-            <a:off x="4572000" y="2843213"/>
-            <a:ext cx="3048000" cy="933450"/>
+          <p:cNvPr id="36" name="learned-title">
+            <a:extLst xmlns:a="http://schemas.openxmlformats.org/drawingml/2006/main">
+              <a:ext uri="{FF2B5EF4-FFF2-40B4-BE49-F238E27FC236}">
+                <a16:creationId xmlns:a16="http://schemas.microsoft.com/office/drawing/2014/main" id="{A2356EFD-F970-41F0-A04B-86BEA486A8F9}"/>
+              </a:ext>
+            </a:extLst>
+          </p:cNvPr>
+          <p:cNvSpPr>
+            <a:spLocks xmlns:a="http://schemas.openxmlformats.org/drawingml/2006/main" noGrp="1"/>
+          </p:cNvSpPr>
+          <p:nvPr/>
+        </p:nvSpPr>
+        <p:spPr>
+          <a:xfrm xmlns:a="http://schemas.openxmlformats.org/drawingml/2006/main">
+            <a:off x="10191750" y="4686300"/>
+            <a:ext cx="4381500" cy="333375"/>
           </a:xfrm>
           <a:prstGeom xmlns:a="http://schemas.openxmlformats.org/drawingml/2006/main" prst="rect">
             <a:avLst/>
@@ -1464,78 +2862,167 @@
           <a:lstStyle xmlns:a="http://schemas.openxmlformats.org/drawingml/2006/main"/>
           <a:p xmlns:a="http://schemas.openxmlformats.org/drawingml/2006/main">
             <a:pPr algn="ctr">
-              <a:defRPr sz="2850" b="1">
-                <a:solidFill>
-                  <a:srgbClr val="000000"/>
-                </a:solidFill>
-                <a:latin typeface="Arial"/>
-                <a:ea typeface="Arial"/>
-                <a:cs typeface="Arial"/>
-              </a:defRPr>
-            </a:pPr>
-            <a:r>
-              <a:rPr sz="2850" b="1">
-                <a:solidFill>
-                  <a:srgbClr val="000000"/>
-                </a:solidFill>
-                <a:latin typeface="Arial"/>
-                <a:ea typeface="Arial"/>
-                <a:cs typeface="Arial"/>
-              </a:rPr>
-              <a:t>Temporal</a:t>
-            </a:r>
-          </a:p>
-          <a:p xmlns:a="http://schemas.openxmlformats.org/drawingml/2006/main">
-            <a:pPr algn="ctr">
-              <a:defRPr sz="2850" b="1">
-                <a:solidFill>
-                  <a:srgbClr val="000000"/>
-                </a:solidFill>
-                <a:latin typeface="Arial"/>
-                <a:ea typeface="Arial"/>
-                <a:cs typeface="Arial"/>
-              </a:defRPr>
-            </a:pPr>
-            <a:r>
-              <a:rPr sz="2850" b="1">
-                <a:solidFill>
-                  <a:srgbClr val="000000"/>
-                </a:solidFill>
-                <a:latin typeface="Arial"/>
-                <a:ea typeface="Arial"/>
-                <a:cs typeface="Arial"/>
-              </a:rPr>
-              <a:t>Representation</a:t>
-            </a:r>
-          </a:p>
-        </p:txBody>
-      </p:sp>
-      <p:sp>
-        <p:nvSpPr>
-          <p:cNvPr id="14" name="symbolic">
-            <a:extLst xmlns:a="http://schemas.openxmlformats.org/drawingml/2006/main">
-              <a:ext uri="{FF2B5EF4-FFF2-40B4-BE49-F238E27FC236}">
-                <a16:creationId xmlns:a16="http://schemas.microsoft.com/office/drawing/2014/main" id="{7E6D3CC2-014F-456B-B27F-76E4A04F9768}"/>
-              </a:ext>
-            </a:extLst>
-          </p:cNvPr>
-          <p:cNvSpPr>
-            <a:spLocks xmlns:a="http://schemas.openxmlformats.org/drawingml/2006/main" noGrp="1"/>
-          </p:cNvSpPr>
-          <p:nvPr/>
-        </p:nvSpPr>
-        <p:spPr>
-          <a:xfrm xmlns:a="http://schemas.openxmlformats.org/drawingml/2006/main">
-            <a:off x="381000" y="762000"/>
-            <a:ext cx="3238500" cy="1285875"/>
-          </a:xfrm>
-          <a:prstGeom xmlns:a="http://schemas.openxmlformats.org/drawingml/2006/main" prst="rect">
-            <a:avLst/>
-          </a:prstGeom>
-          <a:solidFill xmlns:a="http://schemas.openxmlformats.org/drawingml/2006/main">
-            <a:srgbClr val="FFFFFF"/>
-          </a:solidFill>
-          <a:ln xmlns:a="http://schemas.openxmlformats.org/drawingml/2006/main" w="15240">
+              <a:defRPr sz="2025" b="1">
+                <a:solidFill>
+                  <a:srgbClr val="000000"/>
+                </a:solidFill>
+                <a:latin typeface="Arial"/>
+                <a:ea typeface="Arial"/>
+                <a:cs typeface="Arial"/>
+              </a:defRPr>
+            </a:pPr>
+            <a:r>
+              <a:rPr sz="2025" b="1">
+                <a:solidFill>
+                  <a:srgbClr val="000000"/>
+                </a:solidFill>
+                <a:latin typeface="Arial"/>
+                <a:ea typeface="Arial"/>
+                <a:cs typeface="Arial"/>
+              </a:rPr>
+              <a:t>Learned embeddings</a:t>
+            </a:r>
+          </a:p>
+        </p:txBody>
+      </p:sp>
+      <p:sp>
+        <p:nvSpPr>
+          <p:cNvPr id="37" name="learned-detail-0">
+            <a:extLst xmlns:a="http://schemas.openxmlformats.org/drawingml/2006/main">
+              <a:ext uri="{FF2B5EF4-FFF2-40B4-BE49-F238E27FC236}">
+                <a16:creationId xmlns:a16="http://schemas.microsoft.com/office/drawing/2014/main" id="{81B79702-2D26-4A63-BB35-96FF26D6C6FE}"/>
+              </a:ext>
+            </a:extLst>
+          </p:cNvPr>
+          <p:cNvSpPr>
+            <a:spLocks xmlns:a="http://schemas.openxmlformats.org/drawingml/2006/main" noGrp="1"/>
+          </p:cNvSpPr>
+          <p:nvPr/>
+        </p:nvSpPr>
+        <p:spPr>
+          <a:xfrm xmlns:a="http://schemas.openxmlformats.org/drawingml/2006/main">
+            <a:off x="10191750" y="5105400"/>
+            <a:ext cx="4381500" cy="266700"/>
+          </a:xfrm>
+          <a:prstGeom xmlns:a="http://schemas.openxmlformats.org/drawingml/2006/main" prst="rect">
+            <a:avLst/>
+          </a:prstGeom>
+          <a:noFill xmlns:a="http://schemas.openxmlformats.org/drawingml/2006/main"/>
+          <a:ln xmlns:a="http://schemas.openxmlformats.org/drawingml/2006/main" w="0">
+            <a:noFill/>
+          </a:ln>
+        </p:spPr>
+        <p:txBody>
+          <a:bodyPr xmlns:a="http://schemas.openxmlformats.org/drawingml/2006/main" wrap="none" lIns="0" tIns="0" rIns="0" bIns="0" anchor="ctr">
+            <a:noAutofit/>
+          </a:bodyPr>
+          <a:lstStyle xmlns:a="http://schemas.openxmlformats.org/drawingml/2006/main"/>
+          <a:p xmlns:a="http://schemas.openxmlformats.org/drawingml/2006/main">
+            <a:pPr algn="ctr">
+              <a:defRPr sz="1575" b="0">
+                <a:solidFill>
+                  <a:srgbClr val="000000"/>
+                </a:solidFill>
+                <a:latin typeface="Arial"/>
+                <a:ea typeface="Arial"/>
+                <a:cs typeface="Arial"/>
+              </a:defRPr>
+            </a:pPr>
+            <a:r>
+              <a:rPr sz="1575" b="0">
+                <a:solidFill>
+                  <a:srgbClr val="000000"/>
+                </a:solidFill>
+                <a:latin typeface="Arial"/>
+                <a:ea typeface="Arial"/>
+                <a:cs typeface="Arial"/>
+              </a:rPr>
+              <a:t>Neural encoders and latent representations</a:t>
+            </a:r>
+          </a:p>
+        </p:txBody>
+      </p:sp>
+      <p:sp>
+        <p:nvSpPr>
+          <p:cNvPr id="38" name="learned-detail-1">
+            <a:extLst xmlns:a="http://schemas.openxmlformats.org/drawingml/2006/main">
+              <a:ext uri="{FF2B5EF4-FFF2-40B4-BE49-F238E27FC236}">
+                <a16:creationId xmlns:a16="http://schemas.microsoft.com/office/drawing/2014/main" id="{F70A9523-44F7-47D9-801C-270C37337249}"/>
+              </a:ext>
+            </a:extLst>
+          </p:cNvPr>
+          <p:cNvSpPr>
+            <a:spLocks xmlns:a="http://schemas.openxmlformats.org/drawingml/2006/main" noGrp="1"/>
+          </p:cNvSpPr>
+          <p:nvPr/>
+        </p:nvSpPr>
+        <p:spPr>
+          <a:xfrm xmlns:a="http://schemas.openxmlformats.org/drawingml/2006/main">
+            <a:off x="10191750" y="5381625"/>
+            <a:ext cx="4381500" cy="266700"/>
+          </a:xfrm>
+          <a:prstGeom xmlns:a="http://schemas.openxmlformats.org/drawingml/2006/main" prst="rect">
+            <a:avLst/>
+          </a:prstGeom>
+          <a:noFill xmlns:a="http://schemas.openxmlformats.org/drawingml/2006/main"/>
+          <a:ln xmlns:a="http://schemas.openxmlformats.org/drawingml/2006/main" w="0">
+            <a:noFill/>
+          </a:ln>
+        </p:spPr>
+        <p:txBody>
+          <a:bodyPr xmlns:a="http://schemas.openxmlformats.org/drawingml/2006/main" wrap="none" lIns="0" tIns="0" rIns="0" bIns="0" anchor="ctr">
+            <a:noAutofit/>
+          </a:bodyPr>
+          <a:lstStyle xmlns:a="http://schemas.openxmlformats.org/drawingml/2006/main"/>
+          <a:p xmlns:a="http://schemas.openxmlformats.org/drawingml/2006/main">
+            <a:pPr algn="ctr">
+              <a:defRPr sz="1575" b="0">
+                <a:solidFill>
+                  <a:srgbClr val="000000"/>
+                </a:solidFill>
+                <a:latin typeface="Arial"/>
+                <a:ea typeface="Arial"/>
+                <a:cs typeface="Arial"/>
+              </a:defRPr>
+            </a:pPr>
+            <a:r>
+              <a:rPr sz="1575" b="0">
+                <a:solidFill>
+                  <a:srgbClr val="000000"/>
+                </a:solidFill>
+                <a:latin typeface="Arial"/>
+                <a:ea typeface="Arial"/>
+                <a:cs typeface="Arial"/>
+              </a:rPr>
+              <a:t>Extension: foundation and world models</a:t>
+            </a:r>
+          </a:p>
+        </p:txBody>
+      </p:sp>
+      <p:sp>
+        <p:nvSpPr>
+          <p:cNvPr id="39" name="families-stem">
+            <a:extLst xmlns:a="http://schemas.openxmlformats.org/drawingml/2006/main">
+              <a:ext uri="{FF2B5EF4-FFF2-40B4-BE49-F238E27FC236}">
+                <a16:creationId xmlns:a16="http://schemas.microsoft.com/office/drawing/2014/main" id="{45934D0F-8959-4F86-A1B7-4B144158352B}"/>
+              </a:ext>
+            </a:extLst>
+          </p:cNvPr>
+          <p:cNvSpPr>
+            <a:spLocks xmlns:a="http://schemas.openxmlformats.org/drawingml/2006/main" noGrp="1"/>
+          </p:cNvSpPr>
+          <p:nvPr/>
+        </p:nvSpPr>
+        <p:spPr>
+          <a:xfrm xmlns:a="http://schemas.openxmlformats.org/drawingml/2006/main">
+            <a:off x="7620000" y="6067425"/>
+            <a:ext cx="0" cy="123825"/>
+          </a:xfrm>
+          <a:prstGeom xmlns:a="http://schemas.openxmlformats.org/drawingml/2006/main" prst="line">
+            <a:avLst/>
+          </a:prstGeom>
+          <a:noFill xmlns:a="http://schemas.openxmlformats.org/drawingml/2006/main"/>
+          <a:ln xmlns:a="http://schemas.openxmlformats.org/drawingml/2006/main" w="17145">
             <a:solidFill>
               <a:srgbClr val="000000"/>
             </a:solidFill>
@@ -1545,201 +3032,28 @@
       </p:sp>
       <p:sp>
         <p:nvSpPr>
-          <p:cNvPr id="15" name="symbolic-label">
-            <a:extLst xmlns:a="http://schemas.openxmlformats.org/drawingml/2006/main">
-              <a:ext uri="{FF2B5EF4-FFF2-40B4-BE49-F238E27FC236}">
-                <a16:creationId xmlns:a16="http://schemas.microsoft.com/office/drawing/2014/main" id="{4BC3F3F4-93EF-461F-9834-6CDFB09E6827}"/>
-              </a:ext>
-            </a:extLst>
-          </p:cNvPr>
-          <p:cNvSpPr>
-            <a:spLocks xmlns:a="http://schemas.openxmlformats.org/drawingml/2006/main" noGrp="1"/>
-          </p:cNvSpPr>
-          <p:nvPr/>
-        </p:nvSpPr>
-        <p:spPr>
-          <a:xfrm xmlns:a="http://schemas.openxmlformats.org/drawingml/2006/main">
-            <a:off x="495300" y="942975"/>
-            <a:ext cx="3009900" cy="342900"/>
-          </a:xfrm>
-          <a:prstGeom xmlns:a="http://schemas.openxmlformats.org/drawingml/2006/main" prst="rect">
-            <a:avLst/>
-          </a:prstGeom>
-          <a:noFill xmlns:a="http://schemas.openxmlformats.org/drawingml/2006/main"/>
-          <a:ln xmlns:a="http://schemas.openxmlformats.org/drawingml/2006/main" w="0">
-            <a:noFill/>
-          </a:ln>
-        </p:spPr>
-        <p:txBody>
-          <a:bodyPr xmlns:a="http://schemas.openxmlformats.org/drawingml/2006/main" wrap="none" lIns="0" tIns="0" rIns="0" bIns="0" anchor="ctr">
-            <a:noAutofit/>
-          </a:bodyPr>
-          <a:lstStyle xmlns:a="http://schemas.openxmlformats.org/drawingml/2006/main"/>
-          <a:p xmlns:a="http://schemas.openxmlformats.org/drawingml/2006/main">
-            <a:pPr algn="ctr">
-              <a:defRPr sz="1950" b="1">
-                <a:solidFill>
-                  <a:srgbClr val="000000"/>
-                </a:solidFill>
-                <a:latin typeface="Arial"/>
-                <a:ea typeface="Arial"/>
-                <a:cs typeface="Arial"/>
-              </a:defRPr>
-            </a:pPr>
-            <a:r>
-              <a:rPr sz="1950" b="1">
-                <a:solidFill>
-                  <a:srgbClr val="000000"/>
-                </a:solidFill>
-                <a:latin typeface="Arial"/>
-                <a:ea typeface="Arial"/>
-                <a:cs typeface="Arial"/>
-              </a:rPr>
-              <a:t>Symbolic representation</a:t>
-            </a:r>
-          </a:p>
-        </p:txBody>
-      </p:sp>
-      <p:sp>
-        <p:nvSpPr>
-          <p:cNvPr id="16" name="symbolic-detail-0">
-            <a:extLst xmlns:a="http://schemas.openxmlformats.org/drawingml/2006/main">
-              <a:ext uri="{FF2B5EF4-FFF2-40B4-BE49-F238E27FC236}">
-                <a16:creationId xmlns:a16="http://schemas.microsoft.com/office/drawing/2014/main" id="{971EE153-1D44-495F-91F4-BA2EC8EE30F5}"/>
-              </a:ext>
-            </a:extLst>
-          </p:cNvPr>
-          <p:cNvSpPr>
-            <a:spLocks xmlns:a="http://schemas.openxmlformats.org/drawingml/2006/main" noGrp="1"/>
-          </p:cNvSpPr>
-          <p:nvPr/>
-        </p:nvSpPr>
-        <p:spPr>
-          <a:xfrm xmlns:a="http://schemas.openxmlformats.org/drawingml/2006/main">
-            <a:off x="495300" y="1371600"/>
-            <a:ext cx="3009900" cy="257175"/>
-          </a:xfrm>
-          <a:prstGeom xmlns:a="http://schemas.openxmlformats.org/drawingml/2006/main" prst="rect">
-            <a:avLst/>
-          </a:prstGeom>
-          <a:noFill xmlns:a="http://schemas.openxmlformats.org/drawingml/2006/main"/>
-          <a:ln xmlns:a="http://schemas.openxmlformats.org/drawingml/2006/main" w="0">
-            <a:noFill/>
-          </a:ln>
-        </p:spPr>
-        <p:txBody>
-          <a:bodyPr xmlns:a="http://schemas.openxmlformats.org/drawingml/2006/main" wrap="none" lIns="0" tIns="0" rIns="0" bIns="0" anchor="ctr">
-            <a:noAutofit/>
-          </a:bodyPr>
-          <a:lstStyle xmlns:a="http://schemas.openxmlformats.org/drawingml/2006/main"/>
-          <a:p xmlns:a="http://schemas.openxmlformats.org/drawingml/2006/main">
-            <a:pPr algn="ctr">
-              <a:defRPr sz="1575" b="0">
-                <a:solidFill>
-                  <a:srgbClr val="000000"/>
-                </a:solidFill>
-                <a:latin typeface="Arial"/>
-                <a:ea typeface="Arial"/>
-                <a:cs typeface="Arial"/>
-              </a:defRPr>
-            </a:pPr>
-            <a:r>
-              <a:rPr sz="1575" b="0">
-                <a:solidFill>
-                  <a:srgbClr val="000000"/>
-                </a:solidFill>
-                <a:latin typeface="Arial"/>
-                <a:ea typeface="Arial"/>
-                <a:cs typeface="Arial"/>
-              </a:rPr>
-              <a:t>e.g., SAX, SAA-SAX</a:t>
-            </a:r>
-          </a:p>
-        </p:txBody>
-      </p:sp>
-      <p:sp>
-        <p:nvSpPr>
-          <p:cNvPr id="17" name="symbolic-detail-1">
-            <a:extLst xmlns:a="http://schemas.openxmlformats.org/drawingml/2006/main">
-              <a:ext uri="{FF2B5EF4-FFF2-40B4-BE49-F238E27FC236}">
-                <a16:creationId xmlns:a16="http://schemas.microsoft.com/office/drawing/2014/main" id="{0B5E98EB-2588-458F-89C4-1499DB3CBCDA}"/>
-              </a:ext>
-            </a:extLst>
-          </p:cNvPr>
-          <p:cNvSpPr>
-            <a:spLocks xmlns:a="http://schemas.openxmlformats.org/drawingml/2006/main" noGrp="1"/>
-          </p:cNvSpPr>
-          <p:nvPr/>
-        </p:nvSpPr>
-        <p:spPr>
-          <a:xfrm xmlns:a="http://schemas.openxmlformats.org/drawingml/2006/main">
-            <a:off x="495300" y="1647825"/>
-            <a:ext cx="3009900" cy="257175"/>
-          </a:xfrm>
-          <a:prstGeom xmlns:a="http://schemas.openxmlformats.org/drawingml/2006/main" prst="rect">
-            <a:avLst/>
-          </a:prstGeom>
-          <a:noFill xmlns:a="http://schemas.openxmlformats.org/drawingml/2006/main"/>
-          <a:ln xmlns:a="http://schemas.openxmlformats.org/drawingml/2006/main" w="0">
-            <a:noFill/>
-          </a:ln>
-        </p:spPr>
-        <p:txBody>
-          <a:bodyPr xmlns:a="http://schemas.openxmlformats.org/drawingml/2006/main" wrap="none" lIns="0" tIns="0" rIns="0" bIns="0" anchor="ctr">
-            <a:noAutofit/>
-          </a:bodyPr>
-          <a:lstStyle xmlns:a="http://schemas.openxmlformats.org/drawingml/2006/main"/>
-          <a:p xmlns:a="http://schemas.openxmlformats.org/drawingml/2006/main">
-            <a:pPr algn="ctr">
-              <a:defRPr sz="1575" b="0">
-                <a:solidFill>
-                  <a:srgbClr val="000000"/>
-                </a:solidFill>
-                <a:latin typeface="Arial"/>
-                <a:ea typeface="Arial"/>
-                <a:cs typeface="Arial"/>
-              </a:defRPr>
-            </a:pPr>
-            <a:r>
-              <a:rPr sz="1575" b="0">
-                <a:solidFill>
-                  <a:srgbClr val="000000"/>
-                </a:solidFill>
-                <a:latin typeface="Arial"/>
-                <a:ea typeface="Arial"/>
-                <a:cs typeface="Arial"/>
-              </a:rPr>
-              <a:t>Temporal tokenization</a:t>
-            </a:r>
-          </a:p>
-        </p:txBody>
-      </p:sp>
-      <p:sp>
-        <p:nvSpPr>
-          <p:cNvPr id="18" name="compression">
-            <a:extLst xmlns:a="http://schemas.openxmlformats.org/drawingml/2006/main">
-              <a:ext uri="{FF2B5EF4-FFF2-40B4-BE49-F238E27FC236}">
-                <a16:creationId xmlns:a16="http://schemas.microsoft.com/office/drawing/2014/main" id="{6BCA0279-A424-40DA-95F8-9820E782130C}"/>
-              </a:ext>
-            </a:extLst>
-          </p:cNvPr>
-          <p:cNvSpPr>
-            <a:spLocks xmlns:a="http://schemas.openxmlformats.org/drawingml/2006/main" noGrp="1"/>
-          </p:cNvSpPr>
-          <p:nvPr/>
-        </p:nvSpPr>
-        <p:spPr>
-          <a:xfrm xmlns:a="http://schemas.openxmlformats.org/drawingml/2006/main">
-            <a:off x="381000" y="2667000"/>
-            <a:ext cx="3238500" cy="1285875"/>
-          </a:xfrm>
-          <a:prstGeom xmlns:a="http://schemas.openxmlformats.org/drawingml/2006/main" prst="rect">
-            <a:avLst/>
-          </a:prstGeom>
-          <a:solidFill xmlns:a="http://schemas.openxmlformats.org/drawingml/2006/main">
-            <a:srgbClr val="FFFFFF"/>
-          </a:solidFill>
-          <a:ln xmlns:a="http://schemas.openxmlformats.org/drawingml/2006/main" w="15240">
+          <p:cNvPr id="40" name="comparison-task-branch">
+            <a:extLst xmlns:a="http://schemas.openxmlformats.org/drawingml/2006/main">
+              <a:ext uri="{FF2B5EF4-FFF2-40B4-BE49-F238E27FC236}">
+                <a16:creationId xmlns:a16="http://schemas.microsoft.com/office/drawing/2014/main" id="{D9B175F0-749D-42F6-A0DA-8FEA8AB6741C}"/>
+              </a:ext>
+            </a:extLst>
+          </p:cNvPr>
+          <p:cNvSpPr>
+            <a:spLocks xmlns:a="http://schemas.openxmlformats.org/drawingml/2006/main" noGrp="1"/>
+          </p:cNvSpPr>
+          <p:nvPr/>
+        </p:nvSpPr>
+        <p:spPr>
+          <a:xfrm xmlns:a="http://schemas.openxmlformats.org/drawingml/2006/main">
+            <a:off x="3857625" y="6191250"/>
+            <a:ext cx="7524750" cy="0"/>
+          </a:xfrm>
+          <a:prstGeom xmlns:a="http://schemas.openxmlformats.org/drawingml/2006/main" prst="line">
+            <a:avLst/>
+          </a:prstGeom>
+          <a:noFill xmlns:a="http://schemas.openxmlformats.org/drawingml/2006/main"/>
+          <a:ln xmlns:a="http://schemas.openxmlformats.org/drawingml/2006/main" w="17145">
             <a:solidFill>
               <a:srgbClr val="000000"/>
             </a:solidFill>
@@ -1749,201 +3063,28 @@
       </p:sp>
       <p:sp>
         <p:nvSpPr>
-          <p:cNvPr id="19" name="compression-label">
-            <a:extLst xmlns:a="http://schemas.openxmlformats.org/drawingml/2006/main">
-              <a:ext uri="{FF2B5EF4-FFF2-40B4-BE49-F238E27FC236}">
-                <a16:creationId xmlns:a16="http://schemas.microsoft.com/office/drawing/2014/main" id="{816C9DA9-0B88-4537-8A29-0FF7A518F3CA}"/>
-              </a:ext>
-            </a:extLst>
-          </p:cNvPr>
-          <p:cNvSpPr>
-            <a:spLocks xmlns:a="http://schemas.openxmlformats.org/drawingml/2006/main" noGrp="1"/>
-          </p:cNvSpPr>
-          <p:nvPr/>
-        </p:nvSpPr>
-        <p:spPr>
-          <a:xfrm xmlns:a="http://schemas.openxmlformats.org/drawingml/2006/main">
-            <a:off x="495300" y="2847975"/>
-            <a:ext cx="3009900" cy="342900"/>
-          </a:xfrm>
-          <a:prstGeom xmlns:a="http://schemas.openxmlformats.org/drawingml/2006/main" prst="rect">
-            <a:avLst/>
-          </a:prstGeom>
-          <a:noFill xmlns:a="http://schemas.openxmlformats.org/drawingml/2006/main"/>
-          <a:ln xmlns:a="http://schemas.openxmlformats.org/drawingml/2006/main" w="0">
-            <a:noFill/>
-          </a:ln>
-        </p:spPr>
-        <p:txBody>
-          <a:bodyPr xmlns:a="http://schemas.openxmlformats.org/drawingml/2006/main" wrap="none" lIns="0" tIns="0" rIns="0" bIns="0" anchor="ctr">
-            <a:noAutofit/>
-          </a:bodyPr>
-          <a:lstStyle xmlns:a="http://schemas.openxmlformats.org/drawingml/2006/main"/>
-          <a:p xmlns:a="http://schemas.openxmlformats.org/drawingml/2006/main">
-            <a:pPr algn="ctr">
-              <a:defRPr sz="1950" b="1">
-                <a:solidFill>
-                  <a:srgbClr val="000000"/>
-                </a:solidFill>
-                <a:latin typeface="Arial"/>
-                <a:ea typeface="Arial"/>
-                <a:cs typeface="Arial"/>
-              </a:defRPr>
-            </a:pPr>
-            <a:r>
-              <a:rPr sz="1950" b="1">
-                <a:solidFill>
-                  <a:srgbClr val="000000"/>
-                </a:solidFill>
-                <a:latin typeface="Arial"/>
-                <a:ea typeface="Arial"/>
-                <a:cs typeface="Arial"/>
-              </a:rPr>
-              <a:t>Compression</a:t>
-            </a:r>
-          </a:p>
-        </p:txBody>
-      </p:sp>
-      <p:sp>
-        <p:nvSpPr>
-          <p:cNvPr id="20" name="compression-detail-0">
-            <a:extLst xmlns:a="http://schemas.openxmlformats.org/drawingml/2006/main">
-              <a:ext uri="{FF2B5EF4-FFF2-40B4-BE49-F238E27FC236}">
-                <a16:creationId xmlns:a16="http://schemas.microsoft.com/office/drawing/2014/main" id="{A84A8E18-9F32-48EB-A1B8-553F5E7D2757}"/>
-              </a:ext>
-            </a:extLst>
-          </p:cNvPr>
-          <p:cNvSpPr>
-            <a:spLocks xmlns:a="http://schemas.openxmlformats.org/drawingml/2006/main" noGrp="1"/>
-          </p:cNvSpPr>
-          <p:nvPr/>
-        </p:nvSpPr>
-        <p:spPr>
-          <a:xfrm xmlns:a="http://schemas.openxmlformats.org/drawingml/2006/main">
-            <a:off x="495300" y="3276600"/>
-            <a:ext cx="3009900" cy="257175"/>
-          </a:xfrm>
-          <a:prstGeom xmlns:a="http://schemas.openxmlformats.org/drawingml/2006/main" prst="rect">
-            <a:avLst/>
-          </a:prstGeom>
-          <a:noFill xmlns:a="http://schemas.openxmlformats.org/drawingml/2006/main"/>
-          <a:ln xmlns:a="http://schemas.openxmlformats.org/drawingml/2006/main" w="0">
-            <a:noFill/>
-          </a:ln>
-        </p:spPr>
-        <p:txBody>
-          <a:bodyPr xmlns:a="http://schemas.openxmlformats.org/drawingml/2006/main" wrap="none" lIns="0" tIns="0" rIns="0" bIns="0" anchor="ctr">
-            <a:noAutofit/>
-          </a:bodyPr>
-          <a:lstStyle xmlns:a="http://schemas.openxmlformats.org/drawingml/2006/main"/>
-          <a:p xmlns:a="http://schemas.openxmlformats.org/drawingml/2006/main">
-            <a:pPr algn="ctr">
-              <a:defRPr sz="1575" b="0">
-                <a:solidFill>
-                  <a:srgbClr val="000000"/>
-                </a:solidFill>
-                <a:latin typeface="Arial"/>
-                <a:ea typeface="Arial"/>
-                <a:cs typeface="Arial"/>
-              </a:defRPr>
-            </a:pPr>
-            <a:r>
-              <a:rPr sz="1575" b="0">
-                <a:solidFill>
-                  <a:srgbClr val="000000"/>
-                </a:solidFill>
-                <a:latin typeface="Arial"/>
-                <a:ea typeface="Arial"/>
-                <a:cs typeface="Arial"/>
-              </a:rPr>
-              <a:t>Aggregation and approximation</a:t>
-            </a:r>
-          </a:p>
-        </p:txBody>
-      </p:sp>
-      <p:sp>
-        <p:nvSpPr>
-          <p:cNvPr id="21" name="compression-detail-1">
-            <a:extLst xmlns:a="http://schemas.openxmlformats.org/drawingml/2006/main">
-              <a:ext uri="{FF2B5EF4-FFF2-40B4-BE49-F238E27FC236}">
-                <a16:creationId xmlns:a16="http://schemas.microsoft.com/office/drawing/2014/main" id="{AB877DB0-AE5E-44B0-AB6F-8B1524368C48}"/>
-              </a:ext>
-            </a:extLst>
-          </p:cNvPr>
-          <p:cNvSpPr>
-            <a:spLocks xmlns:a="http://schemas.openxmlformats.org/drawingml/2006/main" noGrp="1"/>
-          </p:cNvSpPr>
-          <p:nvPr/>
-        </p:nvSpPr>
-        <p:spPr>
-          <a:xfrm xmlns:a="http://schemas.openxmlformats.org/drawingml/2006/main">
-            <a:off x="495300" y="3552825"/>
-            <a:ext cx="3009900" cy="257175"/>
-          </a:xfrm>
-          <a:prstGeom xmlns:a="http://schemas.openxmlformats.org/drawingml/2006/main" prst="rect">
-            <a:avLst/>
-          </a:prstGeom>
-          <a:noFill xmlns:a="http://schemas.openxmlformats.org/drawingml/2006/main"/>
-          <a:ln xmlns:a="http://schemas.openxmlformats.org/drawingml/2006/main" w="0">
-            <a:noFill/>
-          </a:ln>
-        </p:spPr>
-        <p:txBody>
-          <a:bodyPr xmlns:a="http://schemas.openxmlformats.org/drawingml/2006/main" wrap="none" lIns="0" tIns="0" rIns="0" bIns="0" anchor="ctr">
-            <a:noAutofit/>
-          </a:bodyPr>
-          <a:lstStyle xmlns:a="http://schemas.openxmlformats.org/drawingml/2006/main"/>
-          <a:p xmlns:a="http://schemas.openxmlformats.org/drawingml/2006/main">
-            <a:pPr algn="ctr">
-              <a:defRPr sz="1575" b="0">
-                <a:solidFill>
-                  <a:srgbClr val="000000"/>
-                </a:solidFill>
-                <a:latin typeface="Arial"/>
-                <a:ea typeface="Arial"/>
-                <a:cs typeface="Arial"/>
-              </a:defRPr>
-            </a:pPr>
-            <a:r>
-              <a:rPr sz="1575" b="0">
-                <a:solidFill>
-                  <a:srgbClr val="000000"/>
-                </a:solidFill>
-                <a:latin typeface="Arial"/>
-                <a:ea typeface="Arial"/>
-                <a:cs typeface="Arial"/>
-              </a:rPr>
-              <a:t>e.g., PAA, SAX, SAA-SAX</a:t>
-            </a:r>
-          </a:p>
-        </p:txBody>
-      </p:sp>
-      <p:sp>
-        <p:nvSpPr>
-          <p:cNvPr id="22" name="frequency">
-            <a:extLst xmlns:a="http://schemas.openxmlformats.org/drawingml/2006/main">
-              <a:ext uri="{FF2B5EF4-FFF2-40B4-BE49-F238E27FC236}">
-                <a16:creationId xmlns:a16="http://schemas.microsoft.com/office/drawing/2014/main" id="{FB5F2FCA-8CFF-495E-B92D-F018F03E7792}"/>
-              </a:ext>
-            </a:extLst>
-          </p:cNvPr>
-          <p:cNvSpPr>
-            <a:spLocks xmlns:a="http://schemas.openxmlformats.org/drawingml/2006/main" noGrp="1"/>
-          </p:cNvSpPr>
-          <p:nvPr/>
-        </p:nvSpPr>
-        <p:spPr>
-          <a:xfrm xmlns:a="http://schemas.openxmlformats.org/drawingml/2006/main">
-            <a:off x="381000" y="4572000"/>
-            <a:ext cx="3238500" cy="1285875"/>
-          </a:xfrm>
-          <a:prstGeom xmlns:a="http://schemas.openxmlformats.org/drawingml/2006/main" prst="rect">
-            <a:avLst/>
-          </a:prstGeom>
-          <a:solidFill xmlns:a="http://schemas.openxmlformats.org/drawingml/2006/main">
-            <a:srgbClr val="FFFFFF"/>
-          </a:solidFill>
-          <a:ln xmlns:a="http://schemas.openxmlformats.org/drawingml/2006/main" w="15240">
+          <p:cNvPr id="41" name="comparison-connection">
+            <a:extLst xmlns:a="http://schemas.openxmlformats.org/drawingml/2006/main">
+              <a:ext uri="{FF2B5EF4-FFF2-40B4-BE49-F238E27FC236}">
+                <a16:creationId xmlns:a16="http://schemas.microsoft.com/office/drawing/2014/main" id="{08BEC999-16DF-4BD9-AAFD-2AA34EC55201}"/>
+              </a:ext>
+            </a:extLst>
+          </p:cNvPr>
+          <p:cNvSpPr>
+            <a:spLocks xmlns:a="http://schemas.openxmlformats.org/drawingml/2006/main" noGrp="1"/>
+          </p:cNvSpPr>
+          <p:nvPr/>
+        </p:nvSpPr>
+        <p:spPr>
+          <a:xfrm xmlns:a="http://schemas.openxmlformats.org/drawingml/2006/main">
+            <a:off x="3857625" y="6191250"/>
+            <a:ext cx="0" cy="161925"/>
+          </a:xfrm>
+          <a:prstGeom xmlns:a="http://schemas.openxmlformats.org/drawingml/2006/main" prst="line">
+            <a:avLst/>
+          </a:prstGeom>
+          <a:noFill xmlns:a="http://schemas.openxmlformats.org/drawingml/2006/main"/>
+          <a:ln xmlns:a="http://schemas.openxmlformats.org/drawingml/2006/main" w="17145">
             <a:solidFill>
               <a:srgbClr val="000000"/>
             </a:solidFill>
@@ -1953,87 +3094,28 @@
       </p:sp>
       <p:sp>
         <p:nvSpPr>
-          <p:cNvPr id="23" name="frequency-label">
-            <a:extLst xmlns:a="http://schemas.openxmlformats.org/drawingml/2006/main">
-              <a:ext uri="{FF2B5EF4-FFF2-40B4-BE49-F238E27FC236}">
-                <a16:creationId xmlns:a16="http://schemas.microsoft.com/office/drawing/2014/main" id="{38A63B3E-E111-4AA0-B365-C74B452590FA}"/>
-              </a:ext>
-            </a:extLst>
-          </p:cNvPr>
-          <p:cNvSpPr>
-            <a:spLocks xmlns:a="http://schemas.openxmlformats.org/drawingml/2006/main" noGrp="1"/>
-          </p:cNvSpPr>
-          <p:nvPr/>
-        </p:nvSpPr>
-        <p:spPr>
-          <a:xfrm xmlns:a="http://schemas.openxmlformats.org/drawingml/2006/main">
-            <a:off x="495300" y="5043488"/>
-            <a:ext cx="3009900" cy="342900"/>
-          </a:xfrm>
-          <a:prstGeom xmlns:a="http://schemas.openxmlformats.org/drawingml/2006/main" prst="rect">
-            <a:avLst/>
-          </a:prstGeom>
-          <a:noFill xmlns:a="http://schemas.openxmlformats.org/drawingml/2006/main"/>
-          <a:ln xmlns:a="http://schemas.openxmlformats.org/drawingml/2006/main" w="0">
-            <a:noFill/>
-          </a:ln>
-        </p:spPr>
-        <p:txBody>
-          <a:bodyPr xmlns:a="http://schemas.openxmlformats.org/drawingml/2006/main" wrap="none" lIns="0" tIns="0" rIns="0" bIns="0" anchor="ctr">
-            <a:noAutofit/>
-          </a:bodyPr>
-          <a:lstStyle xmlns:a="http://schemas.openxmlformats.org/drawingml/2006/main"/>
-          <a:p xmlns:a="http://schemas.openxmlformats.org/drawingml/2006/main">
-            <a:pPr algn="ctr">
-              <a:defRPr sz="1950" b="1">
-                <a:solidFill>
-                  <a:srgbClr val="000000"/>
-                </a:solidFill>
-                <a:latin typeface="Arial"/>
-                <a:ea typeface="Arial"/>
-                <a:cs typeface="Arial"/>
-              </a:defRPr>
-            </a:pPr>
-            <a:r>
-              <a:rPr sz="1950" b="1">
-                <a:solidFill>
-                  <a:srgbClr val="000000"/>
-                </a:solidFill>
-                <a:latin typeface="Arial"/>
-                <a:ea typeface="Arial"/>
-                <a:cs typeface="Arial"/>
-              </a:rPr>
-              <a:t>Frequency conversion</a:t>
-            </a:r>
-          </a:p>
-        </p:txBody>
-      </p:sp>
-      <p:sp>
-        <p:nvSpPr>
-          <p:cNvPr id="24" name="similarity">
-            <a:extLst xmlns:a="http://schemas.openxmlformats.org/drawingml/2006/main">
-              <a:ext uri="{FF2B5EF4-FFF2-40B4-BE49-F238E27FC236}">
-                <a16:creationId xmlns:a16="http://schemas.microsoft.com/office/drawing/2014/main" id="{6BDBB74B-BA66-4E57-8356-D59CA7E75D97}"/>
-              </a:ext>
-            </a:extLst>
-          </p:cNvPr>
-          <p:cNvSpPr>
-            <a:spLocks xmlns:a="http://schemas.openxmlformats.org/drawingml/2006/main" noGrp="1"/>
-          </p:cNvSpPr>
-          <p:nvPr/>
-        </p:nvSpPr>
-        <p:spPr>
-          <a:xfrm xmlns:a="http://schemas.openxmlformats.org/drawingml/2006/main">
-            <a:off x="8572500" y="762000"/>
-            <a:ext cx="3238500" cy="1285875"/>
-          </a:xfrm>
-          <a:prstGeom xmlns:a="http://schemas.openxmlformats.org/drawingml/2006/main" prst="rect">
-            <a:avLst/>
-          </a:prstGeom>
-          <a:solidFill xmlns:a="http://schemas.openxmlformats.org/drawingml/2006/main">
-            <a:srgbClr val="FFFFFF"/>
-          </a:solidFill>
-          <a:ln xmlns:a="http://schemas.openxmlformats.org/drawingml/2006/main" w="15240">
+          <p:cNvPr id="42" name="task-connection">
+            <a:extLst xmlns:a="http://schemas.openxmlformats.org/drawingml/2006/main">
+              <a:ext uri="{FF2B5EF4-FFF2-40B4-BE49-F238E27FC236}">
+                <a16:creationId xmlns:a16="http://schemas.microsoft.com/office/drawing/2014/main" id="{B5AF91BD-F9C1-44E7-8616-595550D3BDCC}"/>
+              </a:ext>
+            </a:extLst>
+          </p:cNvPr>
+          <p:cNvSpPr>
+            <a:spLocks xmlns:a="http://schemas.openxmlformats.org/drawingml/2006/main" noGrp="1"/>
+          </p:cNvSpPr>
+          <p:nvPr/>
+        </p:nvSpPr>
+        <p:spPr>
+          <a:xfrm xmlns:a="http://schemas.openxmlformats.org/drawingml/2006/main">
+            <a:off x="11382375" y="6191250"/>
+            <a:ext cx="0" cy="161925"/>
+          </a:xfrm>
+          <a:prstGeom xmlns:a="http://schemas.openxmlformats.org/drawingml/2006/main" prst="line">
+            <a:avLst/>
+          </a:prstGeom>
+          <a:noFill xmlns:a="http://schemas.openxmlformats.org/drawingml/2006/main"/>
+          <a:ln xmlns:a="http://schemas.openxmlformats.org/drawingml/2006/main" w="17145">
             <a:solidFill>
               <a:srgbClr val="000000"/>
             </a:solidFill>
@@ -2043,136 +3125,22 @@
       </p:sp>
       <p:sp>
         <p:nvSpPr>
-          <p:cNvPr id="25" name="similarity-label">
-            <a:extLst xmlns:a="http://schemas.openxmlformats.org/drawingml/2006/main">
-              <a:ext uri="{FF2B5EF4-FFF2-40B4-BE49-F238E27FC236}">
-                <a16:creationId xmlns:a16="http://schemas.microsoft.com/office/drawing/2014/main" id="{62AFE795-93E0-4072-BB82-216B3D3595CD}"/>
-              </a:ext>
-            </a:extLst>
-          </p:cNvPr>
-          <p:cNvSpPr>
-            <a:spLocks xmlns:a="http://schemas.openxmlformats.org/drawingml/2006/main" noGrp="1"/>
-          </p:cNvSpPr>
-          <p:nvPr/>
-        </p:nvSpPr>
-        <p:spPr>
-          <a:xfrm xmlns:a="http://schemas.openxmlformats.org/drawingml/2006/main">
-            <a:off x="8686800" y="942975"/>
-            <a:ext cx="3009900" cy="342900"/>
-          </a:xfrm>
-          <a:prstGeom xmlns:a="http://schemas.openxmlformats.org/drawingml/2006/main" prst="rect">
-            <a:avLst/>
-          </a:prstGeom>
-          <a:noFill xmlns:a="http://schemas.openxmlformats.org/drawingml/2006/main"/>
-          <a:ln xmlns:a="http://schemas.openxmlformats.org/drawingml/2006/main" w="0">
-            <a:noFill/>
-          </a:ln>
-        </p:spPr>
-        <p:txBody>
-          <a:bodyPr xmlns:a="http://schemas.openxmlformats.org/drawingml/2006/main" wrap="none" lIns="0" tIns="0" rIns="0" bIns="0" anchor="ctr">
-            <a:noAutofit/>
-          </a:bodyPr>
-          <a:lstStyle xmlns:a="http://schemas.openxmlformats.org/drawingml/2006/main"/>
-          <a:p xmlns:a="http://schemas.openxmlformats.org/drawingml/2006/main">
-            <a:pPr algn="ctr">
-              <a:defRPr sz="1950" b="1">
-                <a:solidFill>
-                  <a:srgbClr val="000000"/>
-                </a:solidFill>
-                <a:latin typeface="Arial"/>
-                <a:ea typeface="Arial"/>
-                <a:cs typeface="Arial"/>
-              </a:defRPr>
-            </a:pPr>
-            <a:r>
-              <a:rPr sz="1950" b="1">
-                <a:solidFill>
-                  <a:srgbClr val="000000"/>
-                </a:solidFill>
-                <a:latin typeface="Arial"/>
-                <a:ea typeface="Arial"/>
-                <a:cs typeface="Arial"/>
-              </a:rPr>
-              <a:t>Similarity measurement</a:t>
-            </a:r>
-          </a:p>
-        </p:txBody>
-      </p:sp>
-      <p:sp>
-        <p:nvSpPr>
-          <p:cNvPr id="26" name="similarity-detail-0">
-            <a:extLst xmlns:a="http://schemas.openxmlformats.org/drawingml/2006/main">
-              <a:ext uri="{FF2B5EF4-FFF2-40B4-BE49-F238E27FC236}">
-                <a16:creationId xmlns:a16="http://schemas.microsoft.com/office/drawing/2014/main" id="{6BD6B866-DD7C-4204-A2C1-60815907FC45}"/>
-              </a:ext>
-            </a:extLst>
-          </p:cNvPr>
-          <p:cNvSpPr>
-            <a:spLocks xmlns:a="http://schemas.openxmlformats.org/drawingml/2006/main" noGrp="1"/>
-          </p:cNvSpPr>
-          <p:nvPr/>
-        </p:nvSpPr>
-        <p:spPr>
-          <a:xfrm xmlns:a="http://schemas.openxmlformats.org/drawingml/2006/main">
-            <a:off x="8686800" y="1428750"/>
-            <a:ext cx="3009900" cy="257175"/>
-          </a:xfrm>
-          <a:prstGeom xmlns:a="http://schemas.openxmlformats.org/drawingml/2006/main" prst="rect">
-            <a:avLst/>
-          </a:prstGeom>
-          <a:noFill xmlns:a="http://schemas.openxmlformats.org/drawingml/2006/main"/>
-          <a:ln xmlns:a="http://schemas.openxmlformats.org/drawingml/2006/main" w="0">
-            <a:noFill/>
-          </a:ln>
-        </p:spPr>
-        <p:txBody>
-          <a:bodyPr xmlns:a="http://schemas.openxmlformats.org/drawingml/2006/main" wrap="none" lIns="0" tIns="0" rIns="0" bIns="0" anchor="ctr">
-            <a:noAutofit/>
-          </a:bodyPr>
-          <a:lstStyle xmlns:a="http://schemas.openxmlformats.org/drawingml/2006/main"/>
-          <a:p xmlns:a="http://schemas.openxmlformats.org/drawingml/2006/main">
-            <a:pPr algn="ctr">
-              <a:defRPr sz="1575" b="0">
-                <a:solidFill>
-                  <a:srgbClr val="000000"/>
-                </a:solidFill>
-                <a:latin typeface="Arial"/>
-                <a:ea typeface="Arial"/>
-                <a:cs typeface="Arial"/>
-              </a:defRPr>
-            </a:pPr>
-            <a:r>
-              <a:rPr sz="1575" b="0">
-                <a:solidFill>
-                  <a:srgbClr val="000000"/>
-                </a:solidFill>
-                <a:latin typeface="Arial"/>
-                <a:ea typeface="Arial"/>
-                <a:cs typeface="Arial"/>
-              </a:rPr>
-              <a:t>EchoTime</a:t>
-            </a:r>
-          </a:p>
-        </p:txBody>
-      </p:sp>
-      <p:sp>
-        <p:nvSpPr>
-          <p:cNvPr id="27" name="forecasting">
-            <a:extLst xmlns:a="http://schemas.openxmlformats.org/drawingml/2006/main">
-              <a:ext uri="{FF2B5EF4-FFF2-40B4-BE49-F238E27FC236}">
-                <a16:creationId xmlns:a16="http://schemas.microsoft.com/office/drawing/2014/main" id="{8E3FC92D-19CF-45EB-98D0-5F5E6604BBC8}"/>
-              </a:ext>
-            </a:extLst>
-          </p:cNvPr>
-          <p:cNvSpPr>
-            <a:spLocks xmlns:a="http://schemas.openxmlformats.org/drawingml/2006/main" noGrp="1"/>
-          </p:cNvSpPr>
-          <p:nvPr/>
-        </p:nvSpPr>
-        <p:spPr>
-          <a:xfrm xmlns:a="http://schemas.openxmlformats.org/drawingml/2006/main">
-            <a:off x="8572500" y="2667000"/>
-            <a:ext cx="3238500" cy="1285875"/>
+          <p:cNvPr id="43" name="comparison">
+            <a:extLst xmlns:a="http://schemas.openxmlformats.org/drawingml/2006/main">
+              <a:ext uri="{FF2B5EF4-FFF2-40B4-BE49-F238E27FC236}">
+                <a16:creationId xmlns:a16="http://schemas.microsoft.com/office/drawing/2014/main" id="{D253C617-56CB-4C25-BE43-6D861D872432}"/>
+              </a:ext>
+            </a:extLst>
+          </p:cNvPr>
+          <p:cNvSpPr>
+            <a:spLocks xmlns:a="http://schemas.openxmlformats.org/drawingml/2006/main" noGrp="1"/>
+          </p:cNvSpPr>
+          <p:nvPr/>
+        </p:nvSpPr>
+        <p:spPr>
+          <a:xfrm xmlns:a="http://schemas.openxmlformats.org/drawingml/2006/main">
+            <a:off x="381000" y="6353175"/>
+            <a:ext cx="6953250" cy="1314450"/>
           </a:xfrm>
           <a:prstGeom xmlns:a="http://schemas.openxmlformats.org/drawingml/2006/main" prst="rect">
             <a:avLst/>
@@ -2180,7 +3148,7 @@
           <a:solidFill xmlns:a="http://schemas.openxmlformats.org/drawingml/2006/main">
             <a:srgbClr val="FFFFFF"/>
           </a:solidFill>
-          <a:ln xmlns:a="http://schemas.openxmlformats.org/drawingml/2006/main" w="15240">
+          <a:ln xmlns:a="http://schemas.openxmlformats.org/drawingml/2006/main" w="17145">
             <a:solidFill>
               <a:srgbClr val="000000"/>
             </a:solidFill>
@@ -2190,22 +3158,22 @@
       </p:sp>
       <p:sp>
         <p:nvSpPr>
-          <p:cNvPr id="28" name="forecasting-label">
-            <a:extLst xmlns:a="http://schemas.openxmlformats.org/drawingml/2006/main">
-              <a:ext uri="{FF2B5EF4-FFF2-40B4-BE49-F238E27FC236}">
-                <a16:creationId xmlns:a16="http://schemas.microsoft.com/office/drawing/2014/main" id="{B5EC96EC-E6FB-443B-B4E1-E989FD59A5C9}"/>
-              </a:ext>
-            </a:extLst>
-          </p:cNvPr>
-          <p:cNvSpPr>
-            <a:spLocks xmlns:a="http://schemas.openxmlformats.org/drawingml/2006/main" noGrp="1"/>
-          </p:cNvSpPr>
-          <p:nvPr/>
-        </p:nvSpPr>
-        <p:spPr>
-          <a:xfrm xmlns:a="http://schemas.openxmlformats.org/drawingml/2006/main">
-            <a:off x="8686800" y="2847975"/>
-            <a:ext cx="3009900" cy="342900"/>
+          <p:cNvPr id="44" name="comparison-title">
+            <a:extLst xmlns:a="http://schemas.openxmlformats.org/drawingml/2006/main">
+              <a:ext uri="{FF2B5EF4-FFF2-40B4-BE49-F238E27FC236}">
+                <a16:creationId xmlns:a16="http://schemas.microsoft.com/office/drawing/2014/main" id="{A65F962A-6E03-48F8-AF20-80300EAAA699}"/>
+              </a:ext>
+            </a:extLst>
+          </p:cNvPr>
+          <p:cNvSpPr>
+            <a:spLocks xmlns:a="http://schemas.openxmlformats.org/drawingml/2006/main" noGrp="1"/>
+          </p:cNvSpPr>
+          <p:nvPr/>
+        </p:nvSpPr>
+        <p:spPr>
+          <a:xfrm xmlns:a="http://schemas.openxmlformats.org/drawingml/2006/main">
+            <a:off x="523875" y="6419850"/>
+            <a:ext cx="6667500" cy="323850"/>
           </a:xfrm>
           <a:prstGeom xmlns:a="http://schemas.openxmlformats.org/drawingml/2006/main" prst="rect">
             <a:avLst/>
@@ -2222,47 +3190,47 @@
           <a:lstStyle xmlns:a="http://schemas.openxmlformats.org/drawingml/2006/main"/>
           <a:p xmlns:a="http://schemas.openxmlformats.org/drawingml/2006/main">
             <a:pPr algn="ctr">
-              <a:defRPr sz="1950" b="1">
-                <a:solidFill>
-                  <a:srgbClr val="000000"/>
-                </a:solidFill>
-                <a:latin typeface="Arial"/>
-                <a:ea typeface="Arial"/>
-                <a:cs typeface="Arial"/>
-              </a:defRPr>
-            </a:pPr>
-            <a:r>
-              <a:rPr sz="1950" b="1">
-                <a:solidFill>
-                  <a:srgbClr val="000000"/>
-                </a:solidFill>
-                <a:latin typeface="Arial"/>
-                <a:ea typeface="Arial"/>
-                <a:cs typeface="Arial"/>
-              </a:rPr>
-              <a:t>Forecasting</a:t>
-            </a:r>
-          </a:p>
-        </p:txBody>
-      </p:sp>
-      <p:sp>
-        <p:nvSpPr>
-          <p:cNvPr id="29" name="forecasting-detail-0">
-            <a:extLst xmlns:a="http://schemas.openxmlformats.org/drawingml/2006/main">
-              <a:ext uri="{FF2B5EF4-FFF2-40B4-BE49-F238E27FC236}">
-                <a16:creationId xmlns:a16="http://schemas.microsoft.com/office/drawing/2014/main" id="{878AFE96-9F6A-4163-969A-DD7C7172DCC8}"/>
-              </a:ext>
-            </a:extLst>
-          </p:cNvPr>
-          <p:cNvSpPr>
-            <a:spLocks xmlns:a="http://schemas.openxmlformats.org/drawingml/2006/main" noGrp="1"/>
-          </p:cNvSpPr>
-          <p:nvPr/>
-        </p:nvSpPr>
-        <p:spPr>
-          <a:xfrm xmlns:a="http://schemas.openxmlformats.org/drawingml/2006/main">
-            <a:off x="8686800" y="3276600"/>
-            <a:ext cx="3009900" cy="257175"/>
+              <a:defRPr sz="2100" b="1">
+                <a:solidFill>
+                  <a:srgbClr val="000000"/>
+                </a:solidFill>
+                <a:latin typeface="Arial"/>
+                <a:ea typeface="Arial"/>
+                <a:cs typeface="Arial"/>
+              </a:defRPr>
+            </a:pPr>
+            <a:r>
+              <a:rPr sz="2100" b="1">
+                <a:solidFill>
+                  <a:srgbClr val="000000"/>
+                </a:solidFill>
+                <a:latin typeface="Arial"/>
+                <a:ea typeface="Arial"/>
+                <a:cs typeface="Arial"/>
+              </a:rPr>
+              <a:t>Comparison and relational features</a:t>
+            </a:r>
+          </a:p>
+        </p:txBody>
+      </p:sp>
+      <p:sp>
+        <p:nvSpPr>
+          <p:cNvPr id="45" name="comparison-pairwise">
+            <a:extLst xmlns:a="http://schemas.openxmlformats.org/drawingml/2006/main">
+              <a:ext uri="{FF2B5EF4-FFF2-40B4-BE49-F238E27FC236}">
+                <a16:creationId xmlns:a16="http://schemas.microsoft.com/office/drawing/2014/main" id="{C61A1840-9272-4236-870F-6D2CBC9D0078}"/>
+              </a:ext>
+            </a:extLst>
+          </p:cNvPr>
+          <p:cNvSpPr>
+            <a:spLocks xmlns:a="http://schemas.openxmlformats.org/drawingml/2006/main" noGrp="1"/>
+          </p:cNvSpPr>
+          <p:nvPr/>
+        </p:nvSpPr>
+        <p:spPr>
+          <a:xfrm xmlns:a="http://schemas.openxmlformats.org/drawingml/2006/main">
+            <a:off x="523875" y="6772275"/>
+            <a:ext cx="6667500" cy="257175"/>
           </a:xfrm>
           <a:prstGeom xmlns:a="http://schemas.openxmlformats.org/drawingml/2006/main" prst="rect">
             <a:avLst/>
@@ -2279,47 +3247,47 @@
           <a:lstStyle xmlns:a="http://schemas.openxmlformats.org/drawingml/2006/main"/>
           <a:p xmlns:a="http://schemas.openxmlformats.org/drawingml/2006/main">
             <a:pPr algn="ctr">
-              <a:defRPr sz="1575" b="0">
-                <a:solidFill>
-                  <a:srgbClr val="000000"/>
-                </a:solidFill>
-                <a:latin typeface="Arial"/>
-                <a:ea typeface="Arial"/>
-                <a:cs typeface="Arial"/>
-              </a:defRPr>
-            </a:pPr>
-            <a:r>
-              <a:rPr sz="1575" b="0">
-                <a:solidFill>
-                  <a:srgbClr val="000000"/>
-                </a:solidFill>
-                <a:latin typeface="Arial"/>
-                <a:ea typeface="Arial"/>
-                <a:cs typeface="Arial"/>
-              </a:rPr>
-              <a:t>Retrieval-augmented forecasting</a:t>
-            </a:r>
-          </a:p>
-        </p:txBody>
-      </p:sp>
-      <p:sp>
-        <p:nvSpPr>
-          <p:cNvPr id="30" name="forecasting-detail-1">
-            <a:extLst xmlns:a="http://schemas.openxmlformats.org/drawingml/2006/main">
-              <a:ext uri="{FF2B5EF4-FFF2-40B4-BE49-F238E27FC236}">
-                <a16:creationId xmlns:a16="http://schemas.microsoft.com/office/drawing/2014/main" id="{7557BB4A-1DD0-4388-92EB-B21DE78F1314}"/>
-              </a:ext>
-            </a:extLst>
-          </p:cNvPr>
-          <p:cNvSpPr>
-            <a:spLocks xmlns:a="http://schemas.openxmlformats.org/drawingml/2006/main" noGrp="1"/>
-          </p:cNvSpPr>
-          <p:nvPr/>
-        </p:nvSpPr>
-        <p:spPr>
-          <a:xfrm xmlns:a="http://schemas.openxmlformats.org/drawingml/2006/main">
-            <a:off x="8686800" y="3552825"/>
-            <a:ext cx="3009900" cy="257175"/>
+              <a:defRPr sz="1800" b="0">
+                <a:solidFill>
+                  <a:srgbClr val="000000"/>
+                </a:solidFill>
+                <a:latin typeface="Arial"/>
+                <a:ea typeface="Arial"/>
+                <a:cs typeface="Arial"/>
+              </a:defRPr>
+            </a:pPr>
+            <a:r>
+              <a:rPr sz="1800" b="0">
+                <a:solidFill>
+                  <a:srgbClr val="000000"/>
+                </a:solidFill>
+                <a:latin typeface="Arial"/>
+                <a:ea typeface="Arial"/>
+                <a:cs typeface="Arial"/>
+              </a:rPr>
+              <a:t>Pairwise distances: Euclidean, DTW</a:t>
+            </a:r>
+          </a:p>
+        </p:txBody>
+      </p:sp>
+      <p:sp>
+        <p:nvSpPr>
+          <p:cNvPr id="46" name="comparison-features">
+            <a:extLst xmlns:a="http://schemas.openxmlformats.org/drawingml/2006/main">
+              <a:ext uri="{FF2B5EF4-FFF2-40B4-BE49-F238E27FC236}">
+                <a16:creationId xmlns:a16="http://schemas.microsoft.com/office/drawing/2014/main" id="{1F336104-63A7-4832-830F-148C2B937572}"/>
+              </a:ext>
+            </a:extLst>
+          </p:cNvPr>
+          <p:cNvSpPr>
+            <a:spLocks xmlns:a="http://schemas.openxmlformats.org/drawingml/2006/main" noGrp="1"/>
+          </p:cNvSpPr>
+          <p:nvPr/>
+        </p:nvSpPr>
+        <p:spPr>
+          <a:xfrm xmlns:a="http://schemas.openxmlformats.org/drawingml/2006/main">
+            <a:off x="523875" y="7077075"/>
+            <a:ext cx="6667500" cy="247650"/>
           </a:xfrm>
           <a:prstGeom xmlns:a="http://schemas.openxmlformats.org/drawingml/2006/main" prst="rect">
             <a:avLst/>
@@ -2336,47 +3304,104 @@
           <a:lstStyle xmlns:a="http://schemas.openxmlformats.org/drawingml/2006/main"/>
           <a:p xmlns:a="http://schemas.openxmlformats.org/drawingml/2006/main">
             <a:pPr algn="ctr">
-              <a:defRPr sz="1575" b="0">
-                <a:solidFill>
-                  <a:srgbClr val="000000"/>
-                </a:solidFill>
-                <a:latin typeface="Arial"/>
-                <a:ea typeface="Arial"/>
-                <a:cs typeface="Arial"/>
-              </a:defRPr>
-            </a:pPr>
-            <a:r>
-              <a:rPr sz="1575" b="0">
-                <a:solidFill>
-                  <a:srgbClr val="000000"/>
-                </a:solidFill>
-                <a:latin typeface="Arial"/>
-                <a:ea typeface="Arial"/>
-                <a:cs typeface="Arial"/>
-              </a:rPr>
-              <a:t>Multi-output prediction</a:t>
-            </a:r>
-          </a:p>
-        </p:txBody>
-      </p:sp>
-      <p:sp>
-        <p:nvSpPr>
-          <p:cNvPr id="31" name="classification">
-            <a:extLst xmlns:a="http://schemas.openxmlformats.org/drawingml/2006/main">
-              <a:ext uri="{FF2B5EF4-FFF2-40B4-BE49-F238E27FC236}">
-                <a16:creationId xmlns:a16="http://schemas.microsoft.com/office/drawing/2014/main" id="{DD9747FB-F239-45EC-8068-E14B4E7F69CB}"/>
-              </a:ext>
-            </a:extLst>
-          </p:cNvPr>
-          <p:cNvSpPr>
-            <a:spLocks xmlns:a="http://schemas.openxmlformats.org/drawingml/2006/main" noGrp="1"/>
-          </p:cNvSpPr>
-          <p:nvPr/>
-        </p:nvSpPr>
-        <p:spPr>
-          <a:xfrm xmlns:a="http://schemas.openxmlformats.org/drawingml/2006/main">
-            <a:off x="8572500" y="4572000"/>
-            <a:ext cx="3238500" cy="1285875"/>
+              <a:defRPr sz="1650" b="0">
+                <a:solidFill>
+                  <a:srgbClr val="000000"/>
+                </a:solidFill>
+                <a:latin typeface="Arial"/>
+                <a:ea typeface="Arial"/>
+                <a:cs typeface="Arial"/>
+              </a:defRPr>
+            </a:pPr>
+            <a:r>
+              <a:rPr sz="1650" b="0">
+                <a:solidFill>
+                  <a:srgbClr val="000000"/>
+                </a:solidFill>
+                <a:latin typeface="Arial"/>
+                <a:ea typeface="Arial"/>
+                <a:cs typeface="Arial"/>
+              </a:rPr>
+              <a:t>Relational features: Matrix Profile, Shapelet Transform</a:t>
+            </a:r>
+          </a:p>
+        </p:txBody>
+      </p:sp>
+      <p:sp>
+        <p:nvSpPr>
+          <p:cNvPr id="47" name="comparison-work">
+            <a:extLst xmlns:a="http://schemas.openxmlformats.org/drawingml/2006/main">
+              <a:ext uri="{FF2B5EF4-FFF2-40B4-BE49-F238E27FC236}">
+                <a16:creationId xmlns:a16="http://schemas.microsoft.com/office/drawing/2014/main" id="{A0517B14-704B-4E07-81B7-7C869E666834}"/>
+              </a:ext>
+            </a:extLst>
+          </p:cNvPr>
+          <p:cNvSpPr>
+            <a:spLocks xmlns:a="http://schemas.openxmlformats.org/drawingml/2006/main" noGrp="1"/>
+          </p:cNvSpPr>
+          <p:nvPr/>
+        </p:nvSpPr>
+        <p:spPr>
+          <a:xfrm xmlns:a="http://schemas.openxmlformats.org/drawingml/2006/main">
+            <a:off x="523875" y="7372350"/>
+            <a:ext cx="6667500" cy="238125"/>
+          </a:xfrm>
+          <a:prstGeom xmlns:a="http://schemas.openxmlformats.org/drawingml/2006/main" prst="rect">
+            <a:avLst/>
+          </a:prstGeom>
+          <a:noFill xmlns:a="http://schemas.openxmlformats.org/drawingml/2006/main"/>
+          <a:ln xmlns:a="http://schemas.openxmlformats.org/drawingml/2006/main" w="0">
+            <a:noFill/>
+          </a:ln>
+        </p:spPr>
+        <p:txBody>
+          <a:bodyPr xmlns:a="http://schemas.openxmlformats.org/drawingml/2006/main" wrap="none" lIns="0" tIns="0" rIns="0" bIns="0" anchor="ctr">
+            <a:noAutofit/>
+          </a:bodyPr>
+          <a:lstStyle xmlns:a="http://schemas.openxmlformats.org/drawingml/2006/main"/>
+          <a:p xmlns:a="http://schemas.openxmlformats.org/drawingml/2006/main">
+            <a:pPr algn="ctr">
+              <a:defRPr sz="1650" b="0">
+                <a:solidFill>
+                  <a:srgbClr val="000000"/>
+                </a:solidFill>
+                <a:latin typeface="Arial"/>
+                <a:ea typeface="Arial"/>
+                <a:cs typeface="Arial"/>
+              </a:defRPr>
+            </a:pPr>
+            <a:r>
+              <a:rPr sz="1650" b="0">
+                <a:solidFill>
+                  <a:srgbClr val="000000"/>
+                </a:solidFill>
+                <a:latin typeface="Arial"/>
+                <a:ea typeface="Arial"/>
+                <a:cs typeface="Arial"/>
+              </a:rPr>
+              <a:t>Work: EchoTime and structural retrieval</a:t>
+            </a:r>
+          </a:p>
+        </p:txBody>
+      </p:sp>
+      <p:sp>
+        <p:nvSpPr>
+          <p:cNvPr id="48" name="tasks">
+            <a:extLst xmlns:a="http://schemas.openxmlformats.org/drawingml/2006/main">
+              <a:ext uri="{FF2B5EF4-FFF2-40B4-BE49-F238E27FC236}">
+                <a16:creationId xmlns:a16="http://schemas.microsoft.com/office/drawing/2014/main" id="{5C9D2DB1-2596-460F-AE98-E80AE879EE96}"/>
+              </a:ext>
+            </a:extLst>
+          </p:cNvPr>
+          <p:cNvSpPr>
+            <a:spLocks xmlns:a="http://schemas.openxmlformats.org/drawingml/2006/main" noGrp="1"/>
+          </p:cNvSpPr>
+          <p:nvPr/>
+        </p:nvSpPr>
+        <p:spPr>
+          <a:xfrm xmlns:a="http://schemas.openxmlformats.org/drawingml/2006/main">
+            <a:off x="7905750" y="6353175"/>
+            <a:ext cx="6953250" cy="1314450"/>
           </a:xfrm>
           <a:prstGeom xmlns:a="http://schemas.openxmlformats.org/drawingml/2006/main" prst="rect">
             <a:avLst/>
@@ -2384,7 +3409,7 @@
           <a:solidFill xmlns:a="http://schemas.openxmlformats.org/drawingml/2006/main">
             <a:srgbClr val="FFFFFF"/>
           </a:solidFill>
-          <a:ln xmlns:a="http://schemas.openxmlformats.org/drawingml/2006/main" w="15240">
+          <a:ln xmlns:a="http://schemas.openxmlformats.org/drawingml/2006/main" w="17145">
             <a:solidFill>
               <a:srgbClr val="000000"/>
             </a:solidFill>
@@ -2394,22 +3419,22 @@
       </p:sp>
       <p:sp>
         <p:nvSpPr>
-          <p:cNvPr id="32" name="classification-label">
-            <a:extLst xmlns:a="http://schemas.openxmlformats.org/drawingml/2006/main">
-              <a:ext uri="{FF2B5EF4-FFF2-40B4-BE49-F238E27FC236}">
-                <a16:creationId xmlns:a16="http://schemas.microsoft.com/office/drawing/2014/main" id="{5D6715FD-3C8A-4C54-9032-6C379B92190C}"/>
-              </a:ext>
-            </a:extLst>
-          </p:cNvPr>
-          <p:cNvSpPr>
-            <a:spLocks xmlns:a="http://schemas.openxmlformats.org/drawingml/2006/main" noGrp="1"/>
-          </p:cNvSpPr>
-          <p:nvPr/>
-        </p:nvSpPr>
-        <p:spPr>
-          <a:xfrm xmlns:a="http://schemas.openxmlformats.org/drawingml/2006/main">
-            <a:off x="8686800" y="4752975"/>
-            <a:ext cx="3009900" cy="342900"/>
+          <p:cNvPr id="49" name="tasks-title">
+            <a:extLst xmlns:a="http://schemas.openxmlformats.org/drawingml/2006/main">
+              <a:ext uri="{FF2B5EF4-FFF2-40B4-BE49-F238E27FC236}">
+                <a16:creationId xmlns:a16="http://schemas.microsoft.com/office/drawing/2014/main" id="{C159090B-4CC7-4EDC-A456-10BE4D9A130C}"/>
+              </a:ext>
+            </a:extLst>
+          </p:cNvPr>
+          <p:cNvSpPr>
+            <a:spLocks xmlns:a="http://schemas.openxmlformats.org/drawingml/2006/main" noGrp="1"/>
+          </p:cNvSpPr>
+          <p:nvPr/>
+        </p:nvSpPr>
+        <p:spPr>
+          <a:xfrm xmlns:a="http://schemas.openxmlformats.org/drawingml/2006/main">
+            <a:off x="8048625" y="6419850"/>
+            <a:ext cx="6667500" cy="323850"/>
           </a:xfrm>
           <a:prstGeom xmlns:a="http://schemas.openxmlformats.org/drawingml/2006/main" prst="rect">
             <a:avLst/>
@@ -2426,47 +3451,47 @@
           <a:lstStyle xmlns:a="http://schemas.openxmlformats.org/drawingml/2006/main"/>
           <a:p xmlns:a="http://schemas.openxmlformats.org/drawingml/2006/main">
             <a:pPr algn="ctr">
-              <a:defRPr sz="1950" b="1">
-                <a:solidFill>
-                  <a:srgbClr val="000000"/>
-                </a:solidFill>
-                <a:latin typeface="Arial"/>
-                <a:ea typeface="Arial"/>
-                <a:cs typeface="Arial"/>
-              </a:defRPr>
-            </a:pPr>
-            <a:r>
-              <a:rPr sz="1950" b="1">
-                <a:solidFill>
-                  <a:srgbClr val="000000"/>
-                </a:solidFill>
-                <a:latin typeface="Arial"/>
-                <a:ea typeface="Arial"/>
-                <a:cs typeface="Arial"/>
-              </a:rPr>
-              <a:t>Classification</a:t>
-            </a:r>
-          </a:p>
-        </p:txBody>
-      </p:sp>
-      <p:sp>
-        <p:nvSpPr>
-          <p:cNvPr id="33" name="classification-detail-0">
-            <a:extLst xmlns:a="http://schemas.openxmlformats.org/drawingml/2006/main">
-              <a:ext uri="{FF2B5EF4-FFF2-40B4-BE49-F238E27FC236}">
-                <a16:creationId xmlns:a16="http://schemas.microsoft.com/office/drawing/2014/main" id="{71FC8874-464F-4737-88FA-586E1DD5D473}"/>
-              </a:ext>
-            </a:extLst>
-          </p:cNvPr>
-          <p:cNvSpPr>
-            <a:spLocks xmlns:a="http://schemas.openxmlformats.org/drawingml/2006/main" noGrp="1"/>
-          </p:cNvSpPr>
-          <p:nvPr/>
-        </p:nvSpPr>
-        <p:spPr>
-          <a:xfrm xmlns:a="http://schemas.openxmlformats.org/drawingml/2006/main">
-            <a:off x="8686800" y="5238750"/>
-            <a:ext cx="3009900" cy="257175"/>
+              <a:defRPr sz="2100" b="1">
+                <a:solidFill>
+                  <a:srgbClr val="000000"/>
+                </a:solidFill>
+                <a:latin typeface="Arial"/>
+                <a:ea typeface="Arial"/>
+                <a:cs typeface="Arial"/>
+              </a:defRPr>
+            </a:pPr>
+            <a:r>
+              <a:rPr sz="2100" b="1">
+                <a:solidFill>
+                  <a:srgbClr val="000000"/>
+                </a:solidFill>
+                <a:latin typeface="Arial"/>
+                <a:ea typeface="Arial"/>
+                <a:cs typeface="Arial"/>
+              </a:rPr>
+              <a:t>Downstream tasks</a:t>
+            </a:r>
+          </a:p>
+        </p:txBody>
+      </p:sp>
+      <p:sp>
+        <p:nvSpPr>
+          <p:cNvPr id="50" name="tasks-1">
+            <a:extLst xmlns:a="http://schemas.openxmlformats.org/drawingml/2006/main">
+              <a:ext uri="{FF2B5EF4-FFF2-40B4-BE49-F238E27FC236}">
+                <a16:creationId xmlns:a16="http://schemas.microsoft.com/office/drawing/2014/main" id="{0988740A-F820-4E3C-92A5-23D7FE18D750}"/>
+              </a:ext>
+            </a:extLst>
+          </p:cNvPr>
+          <p:cNvSpPr>
+            <a:spLocks xmlns:a="http://schemas.openxmlformats.org/drawingml/2006/main" noGrp="1"/>
+          </p:cNvSpPr>
+          <p:nvPr/>
+        </p:nvSpPr>
+        <p:spPr>
+          <a:xfrm xmlns:a="http://schemas.openxmlformats.org/drawingml/2006/main">
+            <a:off x="8048625" y="6772275"/>
+            <a:ext cx="6667500" cy="257175"/>
           </a:xfrm>
           <a:prstGeom xmlns:a="http://schemas.openxmlformats.org/drawingml/2006/main" prst="rect">
             <a:avLst/>
@@ -2483,6 +3508,120 @@
           <a:lstStyle xmlns:a="http://schemas.openxmlformats.org/drawingml/2006/main"/>
           <a:p xmlns:a="http://schemas.openxmlformats.org/drawingml/2006/main">
             <a:pPr algn="ctr">
+              <a:defRPr sz="1800" b="0">
+                <a:solidFill>
+                  <a:srgbClr val="000000"/>
+                </a:solidFill>
+                <a:latin typeface="Arial"/>
+                <a:ea typeface="Arial"/>
+                <a:cs typeface="Arial"/>
+              </a:defRPr>
+            </a:pPr>
+            <a:r>
+              <a:rPr sz="1800" b="0">
+                <a:solidFill>
+                  <a:srgbClr val="000000"/>
+                </a:solidFill>
+                <a:latin typeface="Arial"/>
+                <a:ea typeface="Arial"/>
+                <a:cs typeface="Arial"/>
+              </a:rPr>
+              <a:t>Forecasting and regression, classification</a:t>
+            </a:r>
+          </a:p>
+        </p:txBody>
+      </p:sp>
+      <p:sp>
+        <p:nvSpPr>
+          <p:cNvPr id="51" name="tasks-2">
+            <a:extLst xmlns:a="http://schemas.openxmlformats.org/drawingml/2006/main">
+              <a:ext uri="{FF2B5EF4-FFF2-40B4-BE49-F238E27FC236}">
+                <a16:creationId xmlns:a16="http://schemas.microsoft.com/office/drawing/2014/main" id="{D3A7ED46-A927-4E7D-838D-D2C10ABA23E4}"/>
+              </a:ext>
+            </a:extLst>
+          </p:cNvPr>
+          <p:cNvSpPr>
+            <a:spLocks xmlns:a="http://schemas.openxmlformats.org/drawingml/2006/main" noGrp="1"/>
+          </p:cNvSpPr>
+          <p:nvPr/>
+        </p:nvSpPr>
+        <p:spPr>
+          <a:xfrm xmlns:a="http://schemas.openxmlformats.org/drawingml/2006/main">
+            <a:off x="8048625" y="7067550"/>
+            <a:ext cx="6667500" cy="247650"/>
+          </a:xfrm>
+          <a:prstGeom xmlns:a="http://schemas.openxmlformats.org/drawingml/2006/main" prst="rect">
+            <a:avLst/>
+          </a:prstGeom>
+          <a:noFill xmlns:a="http://schemas.openxmlformats.org/drawingml/2006/main"/>
+          <a:ln xmlns:a="http://schemas.openxmlformats.org/drawingml/2006/main" w="0">
+            <a:noFill/>
+          </a:ln>
+        </p:spPr>
+        <p:txBody>
+          <a:bodyPr xmlns:a="http://schemas.openxmlformats.org/drawingml/2006/main" wrap="none" lIns="0" tIns="0" rIns="0" bIns="0" anchor="ctr">
+            <a:noAutofit/>
+          </a:bodyPr>
+          <a:lstStyle xmlns:a="http://schemas.openxmlformats.org/drawingml/2006/main"/>
+          <a:p xmlns:a="http://schemas.openxmlformats.org/drawingml/2006/main">
+            <a:pPr algn="ctr">
+              <a:defRPr sz="1800" b="0">
+                <a:solidFill>
+                  <a:srgbClr val="000000"/>
+                </a:solidFill>
+                <a:latin typeface="Arial"/>
+                <a:ea typeface="Arial"/>
+                <a:cs typeface="Arial"/>
+              </a:defRPr>
+            </a:pPr>
+            <a:r>
+              <a:rPr sz="1800" b="0">
+                <a:solidFill>
+                  <a:srgbClr val="000000"/>
+                </a:solidFill>
+                <a:latin typeface="Arial"/>
+                <a:ea typeface="Arial"/>
+                <a:cs typeface="Arial"/>
+              </a:rPr>
+              <a:t>Clustering, anomaly detection</a:t>
+            </a:r>
+          </a:p>
+        </p:txBody>
+      </p:sp>
+      <p:sp>
+        <p:nvSpPr>
+          <p:cNvPr id="52" name="tasks-work">
+            <a:extLst xmlns:a="http://schemas.openxmlformats.org/drawingml/2006/main">
+              <a:ext uri="{FF2B5EF4-FFF2-40B4-BE49-F238E27FC236}">
+                <a16:creationId xmlns:a16="http://schemas.microsoft.com/office/drawing/2014/main" id="{0151250E-8E54-43FF-B4C1-97C4DCDC2310}"/>
+              </a:ext>
+            </a:extLst>
+          </p:cNvPr>
+          <p:cNvSpPr>
+            <a:spLocks xmlns:a="http://schemas.openxmlformats.org/drawingml/2006/main" noGrp="1"/>
+          </p:cNvSpPr>
+          <p:nvPr/>
+        </p:nvSpPr>
+        <p:spPr>
+          <a:xfrm xmlns:a="http://schemas.openxmlformats.org/drawingml/2006/main">
+            <a:off x="8048625" y="7372350"/>
+            <a:ext cx="6667500" cy="238125"/>
+          </a:xfrm>
+          <a:prstGeom xmlns:a="http://schemas.openxmlformats.org/drawingml/2006/main" prst="rect">
+            <a:avLst/>
+          </a:prstGeom>
+          <a:noFill xmlns:a="http://schemas.openxmlformats.org/drawingml/2006/main"/>
+          <a:ln xmlns:a="http://schemas.openxmlformats.org/drawingml/2006/main" w="0">
+            <a:noFill/>
+          </a:ln>
+        </p:spPr>
+        <p:txBody>
+          <a:bodyPr xmlns:a="http://schemas.openxmlformats.org/drawingml/2006/main" wrap="none" lIns="0" tIns="0" rIns="0" bIns="0" anchor="ctr">
+            <a:noAutofit/>
+          </a:bodyPr>
+          <a:lstStyle xmlns:a="http://schemas.openxmlformats.org/drawingml/2006/main"/>
+          <a:p xmlns:a="http://schemas.openxmlformats.org/drawingml/2006/main">
+            <a:pPr algn="ctr">
               <a:defRPr sz="1575" b="0">
                 <a:solidFill>
                   <a:srgbClr val="000000"/>
@@ -2501,29 +3640,29 @@
                 <a:ea typeface="Arial"/>
                 <a:cs typeface="Arial"/>
               </a:rPr>
-              <a:t>Current work</a:t>
-            </a:r>
-          </a:p>
-        </p:txBody>
-      </p:sp>
-      <p:sp>
-        <p:nvSpPr>
-          <p:cNvPr id="34" name="decomposition">
-            <a:extLst xmlns:a="http://schemas.openxmlformats.org/drawingml/2006/main">
-              <a:ext uri="{FF2B5EF4-FFF2-40B4-BE49-F238E27FC236}">
-                <a16:creationId xmlns:a16="http://schemas.microsoft.com/office/drawing/2014/main" id="{0DE5A755-2089-4416-BCF1-2B85F5250C23}"/>
-              </a:ext>
-            </a:extLst>
-          </p:cNvPr>
-          <p:cNvSpPr>
-            <a:spLocks xmlns:a="http://schemas.openxmlformats.org/drawingml/2006/main" noGrp="1"/>
-          </p:cNvSpPr>
-          <p:nvPr/>
-        </p:nvSpPr>
-        <p:spPr>
-          <a:xfrm xmlns:a="http://schemas.openxmlformats.org/drawingml/2006/main">
-            <a:off x="4429125" y="4905375"/>
-            <a:ext cx="3333750" cy="1381125"/>
+              <a:t>Work: retrieval / multi-output prediction, current classification</a:t>
+            </a:r>
+          </a:p>
+        </p:txBody>
+      </p:sp>
+      <p:sp>
+        <p:nvSpPr>
+          <p:cNvPr id="53" name="design-goals">
+            <a:extLst xmlns:a="http://schemas.openxmlformats.org/drawingml/2006/main">
+              <a:ext uri="{FF2B5EF4-FFF2-40B4-BE49-F238E27FC236}">
+                <a16:creationId xmlns:a16="http://schemas.microsoft.com/office/drawing/2014/main" id="{0A3FA99B-D0D0-41D8-8656-51480E23EA1A}"/>
+              </a:ext>
+            </a:extLst>
+          </p:cNvPr>
+          <p:cNvSpPr>
+            <a:spLocks xmlns:a="http://schemas.openxmlformats.org/drawingml/2006/main" noGrp="1"/>
+          </p:cNvSpPr>
+          <p:nvPr/>
+        </p:nvSpPr>
+        <p:spPr>
+          <a:xfrm xmlns:a="http://schemas.openxmlformats.org/drawingml/2006/main">
+            <a:off x="381000" y="7886700"/>
+            <a:ext cx="14478000" cy="523875"/>
           </a:xfrm>
           <a:prstGeom xmlns:a="http://schemas.openxmlformats.org/drawingml/2006/main" prst="rect">
             <a:avLst/>
@@ -2531,7 +3670,7 @@
           <a:solidFill xmlns:a="http://schemas.openxmlformats.org/drawingml/2006/main">
             <a:srgbClr val="FFFFFF"/>
           </a:solidFill>
-          <a:ln xmlns:a="http://schemas.openxmlformats.org/drawingml/2006/main" w="15240">
+          <a:ln xmlns:a="http://schemas.openxmlformats.org/drawingml/2006/main" w="17145">
             <a:solidFill>
               <a:srgbClr val="000000"/>
             </a:solidFill>
@@ -2541,22 +3680,22 @@
       </p:sp>
       <p:sp>
         <p:nvSpPr>
-          <p:cNvPr id="35" name="decomposition-label">
-            <a:extLst xmlns:a="http://schemas.openxmlformats.org/drawingml/2006/main">
-              <a:ext uri="{FF2B5EF4-FFF2-40B4-BE49-F238E27FC236}">
-                <a16:creationId xmlns:a16="http://schemas.microsoft.com/office/drawing/2014/main" id="{1F0DA29E-3723-4D62-B7B7-420873747538}"/>
-              </a:ext>
-            </a:extLst>
-          </p:cNvPr>
-          <p:cNvSpPr>
-            <a:spLocks xmlns:a="http://schemas.openxmlformats.org/drawingml/2006/main" noGrp="1"/>
-          </p:cNvSpPr>
-          <p:nvPr/>
-        </p:nvSpPr>
-        <p:spPr>
-          <a:xfrm xmlns:a="http://schemas.openxmlformats.org/drawingml/2006/main">
-            <a:off x="4543425" y="5086350"/>
-            <a:ext cx="3105150" cy="342900"/>
+          <p:cNvPr id="54" name="goals-title">
+            <a:extLst xmlns:a="http://schemas.openxmlformats.org/drawingml/2006/main">
+              <a:ext uri="{FF2B5EF4-FFF2-40B4-BE49-F238E27FC236}">
+                <a16:creationId xmlns:a16="http://schemas.microsoft.com/office/drawing/2014/main" id="{5D9BBA8B-C51C-4BFE-8AF3-C14BAEB004E3}"/>
+              </a:ext>
+            </a:extLst>
+          </p:cNvPr>
+          <p:cNvSpPr>
+            <a:spLocks xmlns:a="http://schemas.openxmlformats.org/drawingml/2006/main" noGrp="1"/>
+          </p:cNvSpPr>
+          <p:nvPr/>
+        </p:nvSpPr>
+        <p:spPr>
+          <a:xfrm xmlns:a="http://schemas.openxmlformats.org/drawingml/2006/main">
+            <a:off x="523875" y="8001000"/>
+            <a:ext cx="2571750" cy="285750"/>
           </a:xfrm>
           <a:prstGeom xmlns:a="http://schemas.openxmlformats.org/drawingml/2006/main" prst="rect">
             <a:avLst/>
@@ -2573,47 +3712,47 @@
           <a:lstStyle xmlns:a="http://schemas.openxmlformats.org/drawingml/2006/main"/>
           <a:p xmlns:a="http://schemas.openxmlformats.org/drawingml/2006/main">
             <a:pPr algn="ctr">
-              <a:defRPr sz="1950" b="1">
-                <a:solidFill>
-                  <a:srgbClr val="000000"/>
-                </a:solidFill>
-                <a:latin typeface="Arial"/>
-                <a:ea typeface="Arial"/>
-                <a:cs typeface="Arial"/>
-              </a:defRPr>
-            </a:pPr>
-            <a:r>
-              <a:rPr sz="1950" b="1">
-                <a:solidFill>
-                  <a:srgbClr val="000000"/>
-                </a:solidFill>
-                <a:latin typeface="Arial"/>
-                <a:ea typeface="Arial"/>
-                <a:cs typeface="Arial"/>
-              </a:rPr>
-              <a:t>Decomposition</a:t>
-            </a:r>
-          </a:p>
-        </p:txBody>
-      </p:sp>
-      <p:sp>
-        <p:nvSpPr>
-          <p:cNvPr id="36" name="decomposition-detail-0">
-            <a:extLst xmlns:a="http://schemas.openxmlformats.org/drawingml/2006/main">
-              <a:ext uri="{FF2B5EF4-FFF2-40B4-BE49-F238E27FC236}">
-                <a16:creationId xmlns:a16="http://schemas.microsoft.com/office/drawing/2014/main" id="{91ACD5F2-714F-4D7E-9F95-B9E0645AC7B6}"/>
-              </a:ext>
-            </a:extLst>
-          </p:cNvPr>
-          <p:cNvSpPr>
-            <a:spLocks xmlns:a="http://schemas.openxmlformats.org/drawingml/2006/main" noGrp="1"/>
-          </p:cNvSpPr>
-          <p:nvPr/>
-        </p:nvSpPr>
-        <p:spPr>
-          <a:xfrm xmlns:a="http://schemas.openxmlformats.org/drawingml/2006/main">
-            <a:off x="4543425" y="5514975"/>
-            <a:ext cx="3105150" cy="257175"/>
+              <a:defRPr sz="2025" b="1">
+                <a:solidFill>
+                  <a:srgbClr val="000000"/>
+                </a:solidFill>
+                <a:latin typeface="Arial"/>
+                <a:ea typeface="Arial"/>
+                <a:cs typeface="Arial"/>
+              </a:defRPr>
+            </a:pPr>
+            <a:r>
+              <a:rPr sz="2025" b="1">
+                <a:solidFill>
+                  <a:srgbClr val="000000"/>
+                </a:solidFill>
+                <a:latin typeface="Arial"/>
+                <a:ea typeface="Arial"/>
+                <a:cs typeface="Arial"/>
+              </a:rPr>
+              <a:t>Cross-family goals</a:t>
+            </a:r>
+          </a:p>
+        </p:txBody>
+      </p:sp>
+      <p:sp>
+        <p:nvSpPr>
+          <p:cNvPr id="55" name="goals">
+            <a:extLst xmlns:a="http://schemas.openxmlformats.org/drawingml/2006/main">
+              <a:ext uri="{FF2B5EF4-FFF2-40B4-BE49-F238E27FC236}">
+                <a16:creationId xmlns:a16="http://schemas.microsoft.com/office/drawing/2014/main" id="{B391D465-C06D-4D9D-A07D-09FB7B82F75E}"/>
+              </a:ext>
+            </a:extLst>
+          </p:cNvPr>
+          <p:cNvSpPr>
+            <a:spLocks xmlns:a="http://schemas.openxmlformats.org/drawingml/2006/main" noGrp="1"/>
+          </p:cNvSpPr>
+          <p:nvPr/>
+        </p:nvSpPr>
+        <p:spPr>
+          <a:xfrm xmlns:a="http://schemas.openxmlformats.org/drawingml/2006/main">
+            <a:off x="3238500" y="8001000"/>
+            <a:ext cx="11430000" cy="285750"/>
           </a:xfrm>
           <a:prstGeom xmlns:a="http://schemas.openxmlformats.org/drawingml/2006/main" prst="rect">
             <a:avLst/>
@@ -2630,47 +3769,76 @@
           <a:lstStyle xmlns:a="http://schemas.openxmlformats.org/drawingml/2006/main"/>
           <a:p xmlns:a="http://schemas.openxmlformats.org/drawingml/2006/main">
             <a:pPr algn="ctr">
-              <a:defRPr sz="1575" b="0">
-                <a:solidFill>
-                  <a:srgbClr val="000000"/>
-                </a:solidFill>
-                <a:latin typeface="Arial"/>
-                <a:ea typeface="Arial"/>
-                <a:cs typeface="Arial"/>
-              </a:defRPr>
-            </a:pPr>
-            <a:r>
-              <a:rPr sz="1575" b="0">
-                <a:solidFill>
-                  <a:srgbClr val="000000"/>
-                </a:solidFill>
-                <a:latin typeface="Arial"/>
-                <a:ea typeface="Arial"/>
-                <a:cs typeface="Arial"/>
-              </a:rPr>
-              <a:t>DeTime</a:t>
-            </a:r>
-          </a:p>
-        </p:txBody>
-      </p:sp>
-      <p:sp>
-        <p:nvSpPr>
-          <p:cNvPr id="37" name="decomposition-detail-1">
-            <a:extLst xmlns:a="http://schemas.openxmlformats.org/drawingml/2006/main">
-              <a:ext uri="{FF2B5EF4-FFF2-40B4-BE49-F238E27FC236}">
-                <a16:creationId xmlns:a16="http://schemas.microsoft.com/office/drawing/2014/main" id="{C9DAE67D-E040-402D-BC93-878A2887249A}"/>
-              </a:ext>
-            </a:extLst>
-          </p:cNvPr>
-          <p:cNvSpPr>
-            <a:spLocks xmlns:a="http://schemas.openxmlformats.org/drawingml/2006/main" noGrp="1"/>
-          </p:cNvSpPr>
-          <p:nvPr/>
-        </p:nvSpPr>
-        <p:spPr>
-          <a:xfrm xmlns:a="http://schemas.openxmlformats.org/drawingml/2006/main">
-            <a:off x="4543425" y="5791200"/>
-            <a:ext cx="3105150" cy="257175"/>
+              <a:defRPr sz="1875" b="0">
+                <a:solidFill>
+                  <a:srgbClr val="000000"/>
+                </a:solidFill>
+                <a:latin typeface="Arial"/>
+                <a:ea typeface="Arial"/>
+                <a:cs typeface="Arial"/>
+              </a:defRPr>
+            </a:pPr>
+            <a:r>
+              <a:rPr sz="1875" b="0">
+                <a:solidFill>
+                  <a:srgbClr val="000000"/>
+                </a:solidFill>
+                <a:latin typeface="Arial"/>
+                <a:ea typeface="Arial"/>
+                <a:cs typeface="Arial"/>
+              </a:rPr>
+              <a:t>Compression, denoising, interpretability, task-relevant information</a:t>
+            </a:r>
+          </a:p>
+        </p:txBody>
+      </p:sp>
+    </p:spTree>
+    <p:extLst>
+      <p:ext uri="{BB962C8B-B14F-4D97-AF65-F5344CB8AC3E}">
+        <p14:creationId xmlns:p14="http://schemas.microsoft.com/office/powerpoint/2010/main" val="1417298988"/>
+      </p:ext>
+    </p:extLst>
+  </p:cSld>
+</p:sld>
+</file>
+
+<file path=ppt/slides/slide2.xml><?xml version="1.0" encoding="utf-8"?>
+<p:sld xmlns:p="http://schemas.openxmlformats.org/presentationml/2006/main">
+  <p:cSld>
+    <p:bg>
+      <p:bgPr>
+        <a:solidFill xmlns:a="http://schemas.openxmlformats.org/drawingml/2006/main">
+          <a:srgbClr val="FFFFFF"/>
+        </a:solidFill>
+      </p:bgPr>
+    </p:bg>
+    <p:spTree>
+      <p:nvGrpSpPr>
+        <p:cNvPr id="1" name=""/>
+        <p:cNvGrpSpPr/>
+        <p:nvPr/>
+      </p:nvGrpSpPr>
+      <p:grpSpPr>
+        <a:xfrm xmlns:a="http://schemas.openxmlformats.org/drawingml/2006/main"/>
+      </p:grpSpPr>
+      <p:sp>
+        <p:nvSpPr>
+          <p:cNvPr id="34" name="composition-title">
+            <a:extLst xmlns:a="http://schemas.openxmlformats.org/drawingml/2006/main">
+              <a:ext uri="{FF2B5EF4-FFF2-40B4-BE49-F238E27FC236}">
+                <a16:creationId xmlns:a16="http://schemas.microsoft.com/office/drawing/2014/main" id="{C418751C-986E-495A-AB43-96831C0859D7}"/>
+              </a:ext>
+            </a:extLst>
+          </p:cNvPr>
+          <p:cNvSpPr>
+            <a:spLocks xmlns:a="http://schemas.openxmlformats.org/drawingml/2006/main" noGrp="1"/>
+          </p:cNvSpPr>
+          <p:nvPr/>
+        </p:nvSpPr>
+        <p:spPr>
+          <a:xfrm xmlns:a="http://schemas.openxmlformats.org/drawingml/2006/main">
+            <a:off x="381000" y="238125"/>
+            <a:ext cx="14478000" cy="628650"/>
           </a:xfrm>
           <a:prstGeom xmlns:a="http://schemas.openxmlformats.org/drawingml/2006/main" prst="rect">
             <a:avLst/>
@@ -2687,25 +3855,1661 @@
           <a:lstStyle xmlns:a="http://schemas.openxmlformats.org/drawingml/2006/main"/>
           <a:p xmlns:a="http://schemas.openxmlformats.org/drawingml/2006/main">
             <a:pPr algn="ctr">
-              <a:defRPr sz="1575" b="0">
-                <a:solidFill>
-                  <a:srgbClr val="000000"/>
-                </a:solidFill>
-                <a:latin typeface="Arial"/>
-                <a:ea typeface="Arial"/>
-                <a:cs typeface="Arial"/>
-              </a:defRPr>
-            </a:pPr>
-            <a:r>
-              <a:rPr sz="1575" b="0">
-                <a:solidFill>
-                  <a:srgbClr val="000000"/>
-                </a:solidFill>
-                <a:latin typeface="Arial"/>
-                <a:ea typeface="Arial"/>
-                <a:cs typeface="Arial"/>
-              </a:rPr>
-              <a:t>TSDecompose-Benchmark</a:t>
+              <a:defRPr sz="3150" b="1">
+                <a:solidFill>
+                  <a:srgbClr val="000000"/>
+                </a:solidFill>
+                <a:latin typeface="Arial"/>
+                <a:ea typeface="Arial"/>
+                <a:cs typeface="Arial"/>
+              </a:defRPr>
+            </a:pPr>
+            <a:r>
+              <a:rPr sz="3150" b="1">
+                <a:solidFill>
+                  <a:srgbClr val="000000"/>
+                </a:solidFill>
+                <a:latin typeface="Arial"/>
+                <a:ea typeface="Arial"/>
+                <a:cs typeface="Arial"/>
+              </a:rPr>
+              <a:t>Composition of representation operators</a:t>
+            </a:r>
+          </a:p>
+        </p:txBody>
+      </p:sp>
+      <p:sp>
+        <p:nvSpPr>
+          <p:cNvPr id="2" name="composition-subtitle">
+            <a:extLst xmlns:a="http://schemas.openxmlformats.org/drawingml/2006/main">
+              <a:ext uri="{FF2B5EF4-FFF2-40B4-BE49-F238E27FC236}">
+                <a16:creationId xmlns:a16="http://schemas.microsoft.com/office/drawing/2014/main" id="{67BD868F-3D8B-49D5-AF16-CFE769A277EC}"/>
+              </a:ext>
+            </a:extLst>
+          </p:cNvPr>
+          <p:cNvSpPr>
+            <a:spLocks xmlns:a="http://schemas.openxmlformats.org/drawingml/2006/main" noGrp="1"/>
+          </p:cNvSpPr>
+          <p:nvPr/>
+        </p:nvSpPr>
+        <p:spPr>
+          <a:xfrm xmlns:a="http://schemas.openxmlformats.org/drawingml/2006/main">
+            <a:off x="381000" y="990600"/>
+            <a:ext cx="14478000" cy="361950"/>
+          </a:xfrm>
+          <a:prstGeom xmlns:a="http://schemas.openxmlformats.org/drawingml/2006/main" prst="rect">
+            <a:avLst/>
+          </a:prstGeom>
+          <a:noFill xmlns:a="http://schemas.openxmlformats.org/drawingml/2006/main"/>
+          <a:ln xmlns:a="http://schemas.openxmlformats.org/drawingml/2006/main" w="0">
+            <a:noFill/>
+          </a:ln>
+        </p:spPr>
+        <p:txBody>
+          <a:bodyPr xmlns:a="http://schemas.openxmlformats.org/drawingml/2006/main" wrap="none" lIns="0" tIns="0" rIns="0" bIns="0" anchor="ctr">
+            <a:noAutofit/>
+          </a:bodyPr>
+          <a:lstStyle xmlns:a="http://schemas.openxmlformats.org/drawingml/2006/main"/>
+          <a:p xmlns:a="http://schemas.openxmlformats.org/drawingml/2006/main">
+            <a:pPr algn="ctr">
+              <a:defRPr sz="2175" b="0">
+                <a:solidFill>
+                  <a:srgbClr val="000000"/>
+                </a:solidFill>
+                <a:latin typeface="Arial"/>
+                <a:ea typeface="Arial"/>
+                <a:cs typeface="Arial"/>
+              </a:defRPr>
+            </a:pPr>
+            <a:r>
+              <a:rPr sz="2175" b="0">
+                <a:solidFill>
+                  <a:srgbClr val="000000"/>
+                </a:solidFill>
+                <a:latin typeface="Arial"/>
+                <a:ea typeface="Arial"/>
+                <a:cs typeface="Arial"/>
+              </a:rPr>
+              <a:t>Examples of connections between representation families</a:t>
+            </a:r>
+          </a:p>
+        </p:txBody>
+      </p:sp>
+      <p:sp>
+        <p:nvSpPr>
+          <p:cNvPr id="3" name="paa-sax-heading">
+            <a:extLst xmlns:a="http://schemas.openxmlformats.org/drawingml/2006/main">
+              <a:ext uri="{FF2B5EF4-FFF2-40B4-BE49-F238E27FC236}">
+                <a16:creationId xmlns:a16="http://schemas.microsoft.com/office/drawing/2014/main" id="{F233D40C-748F-476B-ABE1-F29C4ADF05B1}"/>
+              </a:ext>
+            </a:extLst>
+          </p:cNvPr>
+          <p:cNvSpPr>
+            <a:spLocks xmlns:a="http://schemas.openxmlformats.org/drawingml/2006/main" noGrp="1"/>
+          </p:cNvSpPr>
+          <p:nvPr/>
+        </p:nvSpPr>
+        <p:spPr>
+          <a:xfrm xmlns:a="http://schemas.openxmlformats.org/drawingml/2006/main">
+            <a:off x="381000" y="1619250"/>
+            <a:ext cx="14478000" cy="342900"/>
+          </a:xfrm>
+          <a:prstGeom xmlns:a="http://schemas.openxmlformats.org/drawingml/2006/main" prst="rect">
+            <a:avLst/>
+          </a:prstGeom>
+          <a:noFill xmlns:a="http://schemas.openxmlformats.org/drawingml/2006/main"/>
+          <a:ln xmlns:a="http://schemas.openxmlformats.org/drawingml/2006/main" w="0">
+            <a:noFill/>
+          </a:ln>
+        </p:spPr>
+        <p:txBody>
+          <a:bodyPr xmlns:a="http://schemas.openxmlformats.org/drawingml/2006/main" wrap="none" lIns="0" tIns="0" rIns="0" bIns="0" anchor="ctr">
+            <a:noAutofit/>
+          </a:bodyPr>
+          <a:lstStyle xmlns:a="http://schemas.openxmlformats.org/drawingml/2006/main"/>
+          <a:p xmlns:a="http://schemas.openxmlformats.org/drawingml/2006/main">
+            <a:pPr algn="ctr">
+              <a:defRPr sz="2175" b="1">
+                <a:solidFill>
+                  <a:srgbClr val="000000"/>
+                </a:solidFill>
+                <a:latin typeface="Arial"/>
+                <a:ea typeface="Arial"/>
+                <a:cs typeface="Arial"/>
+              </a:defRPr>
+            </a:pPr>
+            <a:r>
+              <a:rPr sz="2175" b="1">
+                <a:solidFill>
+                  <a:srgbClr val="000000"/>
+                </a:solidFill>
+                <a:latin typeface="Arial"/>
+                <a:ea typeface="Arial"/>
+                <a:cs typeface="Arial"/>
+              </a:rPr>
+              <a:t>Mean-based symbolic representation</a:t>
+            </a:r>
+          </a:p>
+        </p:txBody>
+      </p:sp>
+      <p:sp>
+        <p:nvSpPr>
+          <p:cNvPr id="4" name="paa-sax-line-1">
+            <a:extLst xmlns:a="http://schemas.openxmlformats.org/drawingml/2006/main">
+              <a:ext uri="{FF2B5EF4-FFF2-40B4-BE49-F238E27FC236}">
+                <a16:creationId xmlns:a16="http://schemas.microsoft.com/office/drawing/2014/main" id="{5AABB8D7-5F99-463E-A4AA-6CE7189DC96B}"/>
+              </a:ext>
+            </a:extLst>
+          </p:cNvPr>
+          <p:cNvSpPr>
+            <a:spLocks xmlns:a="http://schemas.openxmlformats.org/drawingml/2006/main" noGrp="1"/>
+          </p:cNvSpPr>
+          <p:nvPr/>
+        </p:nvSpPr>
+        <p:spPr>
+          <a:xfrm xmlns:a="http://schemas.openxmlformats.org/drawingml/2006/main">
+            <a:off x="4095750" y="2552700"/>
+            <a:ext cx="1238250" cy="0"/>
+          </a:xfrm>
+          <a:prstGeom xmlns:a="http://schemas.openxmlformats.org/drawingml/2006/main" prst="line">
+            <a:avLst/>
+          </a:prstGeom>
+          <a:noFill xmlns:a="http://schemas.openxmlformats.org/drawingml/2006/main"/>
+          <a:ln xmlns:a="http://schemas.openxmlformats.org/drawingml/2006/main" w="17145">
+            <a:solidFill>
+              <a:srgbClr val="000000"/>
+            </a:solidFill>
+            <a:prstDash val="solid"/>
+          </a:ln>
+        </p:spPr>
+      </p:sp>
+      <p:sp>
+        <p:nvSpPr>
+          <p:cNvPr id="5" name="paa-sax-line-2">
+            <a:extLst xmlns:a="http://schemas.openxmlformats.org/drawingml/2006/main">
+              <a:ext uri="{FF2B5EF4-FFF2-40B4-BE49-F238E27FC236}">
+                <a16:creationId xmlns:a16="http://schemas.microsoft.com/office/drawing/2014/main" id="{7A21FAEE-9864-4284-B02C-043FCB3F7BC9}"/>
+              </a:ext>
+            </a:extLst>
+          </p:cNvPr>
+          <p:cNvSpPr>
+            <a:spLocks xmlns:a="http://schemas.openxmlformats.org/drawingml/2006/main" noGrp="1"/>
+          </p:cNvSpPr>
+          <p:nvPr/>
+        </p:nvSpPr>
+        <p:spPr>
+          <a:xfrm xmlns:a="http://schemas.openxmlformats.org/drawingml/2006/main">
+            <a:off x="9906000" y="2552700"/>
+            <a:ext cx="1238250" cy="0"/>
+          </a:xfrm>
+          <a:prstGeom xmlns:a="http://schemas.openxmlformats.org/drawingml/2006/main" prst="line">
+            <a:avLst/>
+          </a:prstGeom>
+          <a:noFill xmlns:a="http://schemas.openxmlformats.org/drawingml/2006/main"/>
+          <a:ln xmlns:a="http://schemas.openxmlformats.org/drawingml/2006/main" w="17145">
+            <a:solidFill>
+              <a:srgbClr val="000000"/>
+            </a:solidFill>
+            <a:prstDash val="solid"/>
+          </a:ln>
+        </p:spPr>
+      </p:sp>
+      <p:sp>
+        <p:nvSpPr>
+          <p:cNvPr id="6" name="paa-sax-input">
+            <a:extLst xmlns:a="http://schemas.openxmlformats.org/drawingml/2006/main">
+              <a:ext uri="{FF2B5EF4-FFF2-40B4-BE49-F238E27FC236}">
+                <a16:creationId xmlns:a16="http://schemas.microsoft.com/office/drawing/2014/main" id="{20BCB922-6ADB-4176-9FBE-50717FD2E119}"/>
+              </a:ext>
+            </a:extLst>
+          </p:cNvPr>
+          <p:cNvSpPr>
+            <a:spLocks xmlns:a="http://schemas.openxmlformats.org/drawingml/2006/main" noGrp="1"/>
+          </p:cNvSpPr>
+          <p:nvPr/>
+        </p:nvSpPr>
+        <p:spPr>
+          <a:xfrm xmlns:a="http://schemas.openxmlformats.org/drawingml/2006/main">
+            <a:off x="666750" y="2000250"/>
+            <a:ext cx="3429000" cy="1104900"/>
+          </a:xfrm>
+          <a:prstGeom xmlns:a="http://schemas.openxmlformats.org/drawingml/2006/main" prst="rect">
+            <a:avLst/>
+          </a:prstGeom>
+          <a:solidFill xmlns:a="http://schemas.openxmlformats.org/drawingml/2006/main">
+            <a:srgbClr val="FFFFFF"/>
+          </a:solidFill>
+          <a:ln xmlns:a="http://schemas.openxmlformats.org/drawingml/2006/main" w="17145">
+            <a:solidFill>
+              <a:srgbClr val="000000"/>
+            </a:solidFill>
+            <a:prstDash val="solid"/>
+          </a:ln>
+        </p:spPr>
+      </p:sp>
+      <p:sp>
+        <p:nvSpPr>
+          <p:cNvPr id="7" name="paa-sax-input-text">
+            <a:extLst xmlns:a="http://schemas.openxmlformats.org/drawingml/2006/main">
+              <a:ext uri="{FF2B5EF4-FFF2-40B4-BE49-F238E27FC236}">
+                <a16:creationId xmlns:a16="http://schemas.microsoft.com/office/drawing/2014/main" id="{A0735204-21D7-4D59-B632-C84C6EFCB198}"/>
+              </a:ext>
+            </a:extLst>
+          </p:cNvPr>
+          <p:cNvSpPr>
+            <a:spLocks xmlns:a="http://schemas.openxmlformats.org/drawingml/2006/main" noGrp="1"/>
+          </p:cNvSpPr>
+          <p:nvPr/>
+        </p:nvSpPr>
+        <p:spPr>
+          <a:xfrm xmlns:a="http://schemas.openxmlformats.org/drawingml/2006/main">
+            <a:off x="809625" y="2143125"/>
+            <a:ext cx="3143250" cy="819150"/>
+          </a:xfrm>
+          <a:prstGeom xmlns:a="http://schemas.openxmlformats.org/drawingml/2006/main" prst="rect">
+            <a:avLst/>
+          </a:prstGeom>
+          <a:noFill xmlns:a="http://schemas.openxmlformats.org/drawingml/2006/main"/>
+          <a:ln xmlns:a="http://schemas.openxmlformats.org/drawingml/2006/main" w="0">
+            <a:noFill/>
+          </a:ln>
+        </p:spPr>
+        <p:txBody>
+          <a:bodyPr xmlns:a="http://schemas.openxmlformats.org/drawingml/2006/main" wrap="none" lIns="0" tIns="0" rIns="0" bIns="0" anchor="ctr">
+            <a:noAutofit/>
+          </a:bodyPr>
+          <a:lstStyle xmlns:a="http://schemas.openxmlformats.org/drawingml/2006/main"/>
+          <a:p xmlns:a="http://schemas.openxmlformats.org/drawingml/2006/main">
+            <a:pPr algn="ctr">
+              <a:defRPr sz="2175" b="1">
+                <a:solidFill>
+                  <a:srgbClr val="000000"/>
+                </a:solidFill>
+                <a:latin typeface="Arial"/>
+                <a:ea typeface="Arial"/>
+                <a:cs typeface="Arial"/>
+              </a:defRPr>
+            </a:pPr>
+            <a:r>
+              <a:rPr sz="2175" b="1">
+                <a:solidFill>
+                  <a:srgbClr val="000000"/>
+                </a:solidFill>
+                <a:latin typeface="Arial"/>
+                <a:ea typeface="Arial"/>
+                <a:cs typeface="Arial"/>
+              </a:rPr>
+              <a:t>PAA</a:t>
+            </a:r>
+          </a:p>
+          <a:p xmlns:a="http://schemas.openxmlformats.org/drawingml/2006/main">
+            <a:pPr algn="ctr">
+              <a:defRPr sz="2175" b="1">
+                <a:solidFill>
+                  <a:srgbClr val="000000"/>
+                </a:solidFill>
+                <a:latin typeface="Arial"/>
+                <a:ea typeface="Arial"/>
+                <a:cs typeface="Arial"/>
+              </a:defRPr>
+            </a:pPr>
+            <a:r>
+              <a:rPr sz="2175" b="1">
+                <a:solidFill>
+                  <a:srgbClr val="000000"/>
+                </a:solidFill>
+                <a:latin typeface="Arial"/>
+                <a:ea typeface="Arial"/>
+                <a:cs typeface="Arial"/>
+              </a:rPr>
+              <a:t>Segment means</a:t>
+            </a:r>
+          </a:p>
+        </p:txBody>
+      </p:sp>
+      <p:sp>
+        <p:nvSpPr>
+          <p:cNvPr id="8" name="paa-sax-operator">
+            <a:extLst xmlns:a="http://schemas.openxmlformats.org/drawingml/2006/main">
+              <a:ext uri="{FF2B5EF4-FFF2-40B4-BE49-F238E27FC236}">
+                <a16:creationId xmlns:a16="http://schemas.microsoft.com/office/drawing/2014/main" id="{5BC2D03B-1283-482B-A78A-E0B02E7F91FA}"/>
+              </a:ext>
+            </a:extLst>
+          </p:cNvPr>
+          <p:cNvSpPr>
+            <a:spLocks xmlns:a="http://schemas.openxmlformats.org/drawingml/2006/main" noGrp="1"/>
+          </p:cNvSpPr>
+          <p:nvPr/>
+        </p:nvSpPr>
+        <p:spPr>
+          <a:xfrm xmlns:a="http://schemas.openxmlformats.org/drawingml/2006/main">
+            <a:off x="5334000" y="2000250"/>
+            <a:ext cx="4572000" cy="1104900"/>
+          </a:xfrm>
+          <a:prstGeom xmlns:a="http://schemas.openxmlformats.org/drawingml/2006/main" prst="rect">
+            <a:avLst/>
+          </a:prstGeom>
+          <a:solidFill xmlns:a="http://schemas.openxmlformats.org/drawingml/2006/main">
+            <a:srgbClr val="FFFFFF"/>
+          </a:solidFill>
+          <a:ln xmlns:a="http://schemas.openxmlformats.org/drawingml/2006/main" w="17145">
+            <a:solidFill>
+              <a:srgbClr val="000000"/>
+            </a:solidFill>
+            <a:prstDash val="solid"/>
+          </a:ln>
+        </p:spPr>
+      </p:sp>
+      <p:sp>
+        <p:nvSpPr>
+          <p:cNvPr id="9" name="paa-sax-operator-text">
+            <a:extLst xmlns:a="http://schemas.openxmlformats.org/drawingml/2006/main">
+              <a:ext uri="{FF2B5EF4-FFF2-40B4-BE49-F238E27FC236}">
+                <a16:creationId xmlns:a16="http://schemas.microsoft.com/office/drawing/2014/main" id="{7C727B6E-3202-4504-9A9F-2257E67DF4E3}"/>
+              </a:ext>
+            </a:extLst>
+          </p:cNvPr>
+          <p:cNvSpPr>
+            <a:spLocks xmlns:a="http://schemas.openxmlformats.org/drawingml/2006/main" noGrp="1"/>
+          </p:cNvSpPr>
+          <p:nvPr/>
+        </p:nvSpPr>
+        <p:spPr>
+          <a:xfrm xmlns:a="http://schemas.openxmlformats.org/drawingml/2006/main">
+            <a:off x="5476875" y="2143125"/>
+            <a:ext cx="4286250" cy="819150"/>
+          </a:xfrm>
+          <a:prstGeom xmlns:a="http://schemas.openxmlformats.org/drawingml/2006/main" prst="rect">
+            <a:avLst/>
+          </a:prstGeom>
+          <a:noFill xmlns:a="http://schemas.openxmlformats.org/drawingml/2006/main"/>
+          <a:ln xmlns:a="http://schemas.openxmlformats.org/drawingml/2006/main" w="0">
+            <a:noFill/>
+          </a:ln>
+        </p:spPr>
+        <p:txBody>
+          <a:bodyPr xmlns:a="http://schemas.openxmlformats.org/drawingml/2006/main" wrap="none" lIns="0" tIns="0" rIns="0" bIns="0" anchor="ctr">
+            <a:noAutofit/>
+          </a:bodyPr>
+          <a:lstStyle xmlns:a="http://schemas.openxmlformats.org/drawingml/2006/main"/>
+          <a:p xmlns:a="http://schemas.openxmlformats.org/drawingml/2006/main">
+            <a:pPr algn="ctr">
+              <a:defRPr sz="2175" b="0">
+                <a:solidFill>
+                  <a:srgbClr val="000000"/>
+                </a:solidFill>
+                <a:latin typeface="Arial"/>
+                <a:ea typeface="Arial"/>
+                <a:cs typeface="Arial"/>
+              </a:defRPr>
+            </a:pPr>
+            <a:r>
+              <a:rPr sz="2175" b="0">
+                <a:solidFill>
+                  <a:srgbClr val="000000"/>
+                </a:solidFill>
+                <a:latin typeface="Arial"/>
+                <a:ea typeface="Arial"/>
+                <a:cs typeface="Arial"/>
+              </a:rPr>
+              <a:t>Quantization</a:t>
+            </a:r>
+          </a:p>
+          <a:p xmlns:a="http://schemas.openxmlformats.org/drawingml/2006/main">
+            <a:pPr algn="ctr">
+              <a:defRPr sz="2175" b="0">
+                <a:solidFill>
+                  <a:srgbClr val="000000"/>
+                </a:solidFill>
+                <a:latin typeface="Arial"/>
+                <a:ea typeface="Arial"/>
+                <a:cs typeface="Arial"/>
+              </a:defRPr>
+            </a:pPr>
+            <a:r>
+              <a:rPr sz="2175" b="0">
+                <a:solidFill>
+                  <a:srgbClr val="000000"/>
+                </a:solidFill>
+                <a:latin typeface="Arial"/>
+                <a:ea typeface="Arial"/>
+                <a:cs typeface="Arial"/>
+              </a:rPr>
+              <a:t>Symbolization</a:t>
+            </a:r>
+          </a:p>
+        </p:txBody>
+      </p:sp>
+      <p:sp>
+        <p:nvSpPr>
+          <p:cNvPr id="10" name="paa-sax-output">
+            <a:extLst xmlns:a="http://schemas.openxmlformats.org/drawingml/2006/main">
+              <a:ext uri="{FF2B5EF4-FFF2-40B4-BE49-F238E27FC236}">
+                <a16:creationId xmlns:a16="http://schemas.microsoft.com/office/drawing/2014/main" id="{0AD13516-F9DF-4C15-916A-4F61B7BD25ED}"/>
+              </a:ext>
+            </a:extLst>
+          </p:cNvPr>
+          <p:cNvSpPr>
+            <a:spLocks xmlns:a="http://schemas.openxmlformats.org/drawingml/2006/main" noGrp="1"/>
+          </p:cNvSpPr>
+          <p:nvPr/>
+        </p:nvSpPr>
+        <p:spPr>
+          <a:xfrm xmlns:a="http://schemas.openxmlformats.org/drawingml/2006/main">
+            <a:off x="11144250" y="2000250"/>
+            <a:ext cx="3429000" cy="1104900"/>
+          </a:xfrm>
+          <a:prstGeom xmlns:a="http://schemas.openxmlformats.org/drawingml/2006/main" prst="rect">
+            <a:avLst/>
+          </a:prstGeom>
+          <a:solidFill xmlns:a="http://schemas.openxmlformats.org/drawingml/2006/main">
+            <a:srgbClr val="FFFFFF"/>
+          </a:solidFill>
+          <a:ln xmlns:a="http://schemas.openxmlformats.org/drawingml/2006/main" w="17145">
+            <a:solidFill>
+              <a:srgbClr val="000000"/>
+            </a:solidFill>
+            <a:prstDash val="solid"/>
+          </a:ln>
+        </p:spPr>
+      </p:sp>
+      <p:sp>
+        <p:nvSpPr>
+          <p:cNvPr id="11" name="paa-sax-output-text">
+            <a:extLst xmlns:a="http://schemas.openxmlformats.org/drawingml/2006/main">
+              <a:ext uri="{FF2B5EF4-FFF2-40B4-BE49-F238E27FC236}">
+                <a16:creationId xmlns:a16="http://schemas.microsoft.com/office/drawing/2014/main" id="{7CFDEEBA-6134-48C5-9475-3300BCE97F35}"/>
+              </a:ext>
+            </a:extLst>
+          </p:cNvPr>
+          <p:cNvSpPr>
+            <a:spLocks xmlns:a="http://schemas.openxmlformats.org/drawingml/2006/main" noGrp="1"/>
+          </p:cNvSpPr>
+          <p:nvPr/>
+        </p:nvSpPr>
+        <p:spPr>
+          <a:xfrm xmlns:a="http://schemas.openxmlformats.org/drawingml/2006/main">
+            <a:off x="11287125" y="2143125"/>
+            <a:ext cx="3143250" cy="819150"/>
+          </a:xfrm>
+          <a:prstGeom xmlns:a="http://schemas.openxmlformats.org/drawingml/2006/main" prst="rect">
+            <a:avLst/>
+          </a:prstGeom>
+          <a:noFill xmlns:a="http://schemas.openxmlformats.org/drawingml/2006/main"/>
+          <a:ln xmlns:a="http://schemas.openxmlformats.org/drawingml/2006/main" w="0">
+            <a:noFill/>
+          </a:ln>
+        </p:spPr>
+        <p:txBody>
+          <a:bodyPr xmlns:a="http://schemas.openxmlformats.org/drawingml/2006/main" wrap="none" lIns="0" tIns="0" rIns="0" bIns="0" anchor="ctr">
+            <a:noAutofit/>
+          </a:bodyPr>
+          <a:lstStyle xmlns:a="http://schemas.openxmlformats.org/drawingml/2006/main"/>
+          <a:p xmlns:a="http://schemas.openxmlformats.org/drawingml/2006/main">
+            <a:pPr algn="ctr">
+              <a:defRPr sz="2175" b="1">
+                <a:solidFill>
+                  <a:srgbClr val="000000"/>
+                </a:solidFill>
+                <a:latin typeface="Arial"/>
+                <a:ea typeface="Arial"/>
+                <a:cs typeface="Arial"/>
+              </a:defRPr>
+            </a:pPr>
+            <a:r>
+              <a:rPr sz="2175" b="1">
+                <a:solidFill>
+                  <a:srgbClr val="000000"/>
+                </a:solidFill>
+                <a:latin typeface="Arial"/>
+                <a:ea typeface="Arial"/>
+                <a:cs typeface="Arial"/>
+              </a:rPr>
+              <a:t>SAX</a:t>
+            </a:r>
+          </a:p>
+          <a:p xmlns:a="http://schemas.openxmlformats.org/drawingml/2006/main">
+            <a:pPr algn="ctr">
+              <a:defRPr sz="2175" b="1">
+                <a:solidFill>
+                  <a:srgbClr val="000000"/>
+                </a:solidFill>
+                <a:latin typeface="Arial"/>
+                <a:ea typeface="Arial"/>
+                <a:cs typeface="Arial"/>
+              </a:defRPr>
+            </a:pPr>
+            <a:r>
+              <a:rPr sz="2175" b="1">
+                <a:solidFill>
+                  <a:srgbClr val="000000"/>
+                </a:solidFill>
+                <a:latin typeface="Arial"/>
+                <a:ea typeface="Arial"/>
+                <a:cs typeface="Arial"/>
+              </a:rPr>
+              <a:t>Symbolic sequence</a:t>
+            </a:r>
+          </a:p>
+        </p:txBody>
+      </p:sp>
+      <p:sp>
+        <p:nvSpPr>
+          <p:cNvPr id="12" name="paa-sax-caption">
+            <a:extLst xmlns:a="http://schemas.openxmlformats.org/drawingml/2006/main">
+              <a:ext uri="{FF2B5EF4-FFF2-40B4-BE49-F238E27FC236}">
+                <a16:creationId xmlns:a16="http://schemas.microsoft.com/office/drawing/2014/main" id="{8CE5E433-BCC3-4F05-8325-C24B1473624E}"/>
+              </a:ext>
+            </a:extLst>
+          </p:cNvPr>
+          <p:cNvSpPr>
+            <a:spLocks xmlns:a="http://schemas.openxmlformats.org/drawingml/2006/main" noGrp="1"/>
+          </p:cNvSpPr>
+          <p:nvPr/>
+        </p:nvSpPr>
+        <p:spPr>
+          <a:xfrm xmlns:a="http://schemas.openxmlformats.org/drawingml/2006/main">
+            <a:off x="523875" y="3181350"/>
+            <a:ext cx="14192250" cy="323850"/>
+          </a:xfrm>
+          <a:prstGeom xmlns:a="http://schemas.openxmlformats.org/drawingml/2006/main" prst="rect">
+            <a:avLst/>
+          </a:prstGeom>
+          <a:noFill xmlns:a="http://schemas.openxmlformats.org/drawingml/2006/main"/>
+          <a:ln xmlns:a="http://schemas.openxmlformats.org/drawingml/2006/main" w="0">
+            <a:noFill/>
+          </a:ln>
+        </p:spPr>
+        <p:txBody>
+          <a:bodyPr xmlns:a="http://schemas.openxmlformats.org/drawingml/2006/main" wrap="none" lIns="0" tIns="0" rIns="0" bIns="0" anchor="ctr">
+            <a:noAutofit/>
+          </a:bodyPr>
+          <a:lstStyle xmlns:a="http://schemas.openxmlformats.org/drawingml/2006/main"/>
+          <a:p xmlns:a="http://schemas.openxmlformats.org/drawingml/2006/main">
+            <a:pPr algn="ctr">
+              <a:defRPr sz="1875" b="0">
+                <a:solidFill>
+                  <a:srgbClr val="000000"/>
+                </a:solidFill>
+                <a:latin typeface="Arial"/>
+                <a:ea typeface="Arial"/>
+                <a:cs typeface="Arial"/>
+              </a:defRPr>
+            </a:pPr>
+            <a:r>
+              <a:rPr sz="1875" b="0">
+                <a:solidFill>
+                  <a:srgbClr val="000000"/>
+                </a:solidFill>
+                <a:latin typeface="Arial"/>
+                <a:ea typeface="Arial"/>
+                <a:cs typeface="Arial"/>
+              </a:rPr>
+              <a:t>SAX composes segmentation, mean aggregation, quantization and symbolization.</a:t>
+            </a:r>
+          </a:p>
+        </p:txBody>
+      </p:sp>
+      <p:sp>
+        <p:nvSpPr>
+          <p:cNvPr id="13" name="saa-sax-heading">
+            <a:extLst xmlns:a="http://schemas.openxmlformats.org/drawingml/2006/main">
+              <a:ext uri="{FF2B5EF4-FFF2-40B4-BE49-F238E27FC236}">
+                <a16:creationId xmlns:a16="http://schemas.microsoft.com/office/drawing/2014/main" id="{F46F2E78-B6AA-4E94-8F9E-041FE8312A34}"/>
+              </a:ext>
+            </a:extLst>
+          </p:cNvPr>
+          <p:cNvSpPr>
+            <a:spLocks xmlns:a="http://schemas.openxmlformats.org/drawingml/2006/main" noGrp="1"/>
+          </p:cNvSpPr>
+          <p:nvPr/>
+        </p:nvSpPr>
+        <p:spPr>
+          <a:xfrm xmlns:a="http://schemas.openxmlformats.org/drawingml/2006/main">
+            <a:off x="381000" y="3562350"/>
+            <a:ext cx="14478000" cy="342900"/>
+          </a:xfrm>
+          <a:prstGeom xmlns:a="http://schemas.openxmlformats.org/drawingml/2006/main" prst="rect">
+            <a:avLst/>
+          </a:prstGeom>
+          <a:noFill xmlns:a="http://schemas.openxmlformats.org/drawingml/2006/main"/>
+          <a:ln xmlns:a="http://schemas.openxmlformats.org/drawingml/2006/main" w="0">
+            <a:noFill/>
+          </a:ln>
+        </p:spPr>
+        <p:txBody>
+          <a:bodyPr xmlns:a="http://schemas.openxmlformats.org/drawingml/2006/main" wrap="none" lIns="0" tIns="0" rIns="0" bIns="0" anchor="ctr">
+            <a:noAutofit/>
+          </a:bodyPr>
+          <a:lstStyle xmlns:a="http://schemas.openxmlformats.org/drawingml/2006/main"/>
+          <a:p xmlns:a="http://schemas.openxmlformats.org/drawingml/2006/main">
+            <a:pPr algn="ctr">
+              <a:defRPr sz="2175" b="1">
+                <a:solidFill>
+                  <a:srgbClr val="000000"/>
+                </a:solidFill>
+                <a:latin typeface="Arial"/>
+                <a:ea typeface="Arial"/>
+                <a:cs typeface="Arial"/>
+              </a:defRPr>
+            </a:pPr>
+            <a:r>
+              <a:rPr sz="2175" b="1">
+                <a:solidFill>
+                  <a:srgbClr val="000000"/>
+                </a:solidFill>
+                <a:latin typeface="Arial"/>
+                <a:ea typeface="Arial"/>
+                <a:cs typeface="Arial"/>
+              </a:rPr>
+              <a:t>Slope-based symbolic representation</a:t>
+            </a:r>
+          </a:p>
+        </p:txBody>
+      </p:sp>
+      <p:sp>
+        <p:nvSpPr>
+          <p:cNvPr id="14" name="saa-sax-line-1">
+            <a:extLst xmlns:a="http://schemas.openxmlformats.org/drawingml/2006/main">
+              <a:ext uri="{FF2B5EF4-FFF2-40B4-BE49-F238E27FC236}">
+                <a16:creationId xmlns:a16="http://schemas.microsoft.com/office/drawing/2014/main" id="{29F2E571-B0FA-4C0D-801D-423113D99BBD}"/>
+              </a:ext>
+            </a:extLst>
+          </p:cNvPr>
+          <p:cNvSpPr>
+            <a:spLocks xmlns:a="http://schemas.openxmlformats.org/drawingml/2006/main" noGrp="1"/>
+          </p:cNvSpPr>
+          <p:nvPr/>
+        </p:nvSpPr>
+        <p:spPr>
+          <a:xfrm xmlns:a="http://schemas.openxmlformats.org/drawingml/2006/main">
+            <a:off x="4095750" y="4495800"/>
+            <a:ext cx="1238250" cy="0"/>
+          </a:xfrm>
+          <a:prstGeom xmlns:a="http://schemas.openxmlformats.org/drawingml/2006/main" prst="line">
+            <a:avLst/>
+          </a:prstGeom>
+          <a:noFill xmlns:a="http://schemas.openxmlformats.org/drawingml/2006/main"/>
+          <a:ln xmlns:a="http://schemas.openxmlformats.org/drawingml/2006/main" w="17145">
+            <a:solidFill>
+              <a:srgbClr val="000000"/>
+            </a:solidFill>
+            <a:prstDash val="solid"/>
+          </a:ln>
+        </p:spPr>
+      </p:sp>
+      <p:sp>
+        <p:nvSpPr>
+          <p:cNvPr id="15" name="saa-sax-line-2">
+            <a:extLst xmlns:a="http://schemas.openxmlformats.org/drawingml/2006/main">
+              <a:ext uri="{FF2B5EF4-FFF2-40B4-BE49-F238E27FC236}">
+                <a16:creationId xmlns:a16="http://schemas.microsoft.com/office/drawing/2014/main" id="{F3F96F01-E58E-4E12-B6D1-9EECB1AB510D}"/>
+              </a:ext>
+            </a:extLst>
+          </p:cNvPr>
+          <p:cNvSpPr>
+            <a:spLocks xmlns:a="http://schemas.openxmlformats.org/drawingml/2006/main" noGrp="1"/>
+          </p:cNvSpPr>
+          <p:nvPr/>
+        </p:nvSpPr>
+        <p:spPr>
+          <a:xfrm xmlns:a="http://schemas.openxmlformats.org/drawingml/2006/main">
+            <a:off x="9906000" y="4495800"/>
+            <a:ext cx="1238250" cy="0"/>
+          </a:xfrm>
+          <a:prstGeom xmlns:a="http://schemas.openxmlformats.org/drawingml/2006/main" prst="line">
+            <a:avLst/>
+          </a:prstGeom>
+          <a:noFill xmlns:a="http://schemas.openxmlformats.org/drawingml/2006/main"/>
+          <a:ln xmlns:a="http://schemas.openxmlformats.org/drawingml/2006/main" w="17145">
+            <a:solidFill>
+              <a:srgbClr val="000000"/>
+            </a:solidFill>
+            <a:prstDash val="solid"/>
+          </a:ln>
+        </p:spPr>
+      </p:sp>
+      <p:sp>
+        <p:nvSpPr>
+          <p:cNvPr id="16" name="saa-sax-input">
+            <a:extLst xmlns:a="http://schemas.openxmlformats.org/drawingml/2006/main">
+              <a:ext uri="{FF2B5EF4-FFF2-40B4-BE49-F238E27FC236}">
+                <a16:creationId xmlns:a16="http://schemas.microsoft.com/office/drawing/2014/main" id="{F5D98DA3-88E5-43D3-A390-61C3EE381392}"/>
+              </a:ext>
+            </a:extLst>
+          </p:cNvPr>
+          <p:cNvSpPr>
+            <a:spLocks xmlns:a="http://schemas.openxmlformats.org/drawingml/2006/main" noGrp="1"/>
+          </p:cNvSpPr>
+          <p:nvPr/>
+        </p:nvSpPr>
+        <p:spPr>
+          <a:xfrm xmlns:a="http://schemas.openxmlformats.org/drawingml/2006/main">
+            <a:off x="666750" y="3943350"/>
+            <a:ext cx="3429000" cy="1104900"/>
+          </a:xfrm>
+          <a:prstGeom xmlns:a="http://schemas.openxmlformats.org/drawingml/2006/main" prst="rect">
+            <a:avLst/>
+          </a:prstGeom>
+          <a:solidFill xmlns:a="http://schemas.openxmlformats.org/drawingml/2006/main">
+            <a:srgbClr val="FFFFFF"/>
+          </a:solidFill>
+          <a:ln xmlns:a="http://schemas.openxmlformats.org/drawingml/2006/main" w="17145">
+            <a:solidFill>
+              <a:srgbClr val="000000"/>
+            </a:solidFill>
+            <a:prstDash val="solid"/>
+          </a:ln>
+        </p:spPr>
+      </p:sp>
+      <p:sp>
+        <p:nvSpPr>
+          <p:cNvPr id="17" name="saa-sax-input-text">
+            <a:extLst xmlns:a="http://schemas.openxmlformats.org/drawingml/2006/main">
+              <a:ext uri="{FF2B5EF4-FFF2-40B4-BE49-F238E27FC236}">
+                <a16:creationId xmlns:a16="http://schemas.microsoft.com/office/drawing/2014/main" id="{1C815770-9079-4B0D-BBF6-B150C7157A13}"/>
+              </a:ext>
+            </a:extLst>
+          </p:cNvPr>
+          <p:cNvSpPr>
+            <a:spLocks xmlns:a="http://schemas.openxmlformats.org/drawingml/2006/main" noGrp="1"/>
+          </p:cNvSpPr>
+          <p:nvPr/>
+        </p:nvSpPr>
+        <p:spPr>
+          <a:xfrm xmlns:a="http://schemas.openxmlformats.org/drawingml/2006/main">
+            <a:off x="809625" y="4086225"/>
+            <a:ext cx="3143250" cy="819150"/>
+          </a:xfrm>
+          <a:prstGeom xmlns:a="http://schemas.openxmlformats.org/drawingml/2006/main" prst="rect">
+            <a:avLst/>
+          </a:prstGeom>
+          <a:noFill xmlns:a="http://schemas.openxmlformats.org/drawingml/2006/main"/>
+          <a:ln xmlns:a="http://schemas.openxmlformats.org/drawingml/2006/main" w="0">
+            <a:noFill/>
+          </a:ln>
+        </p:spPr>
+        <p:txBody>
+          <a:bodyPr xmlns:a="http://schemas.openxmlformats.org/drawingml/2006/main" wrap="none" lIns="0" tIns="0" rIns="0" bIns="0" anchor="ctr">
+            <a:noAutofit/>
+          </a:bodyPr>
+          <a:lstStyle xmlns:a="http://schemas.openxmlformats.org/drawingml/2006/main"/>
+          <a:p xmlns:a="http://schemas.openxmlformats.org/drawingml/2006/main">
+            <a:pPr algn="ctr">
+              <a:defRPr sz="2175" b="1">
+                <a:solidFill>
+                  <a:srgbClr val="000000"/>
+                </a:solidFill>
+                <a:latin typeface="Arial"/>
+                <a:ea typeface="Arial"/>
+                <a:cs typeface="Arial"/>
+              </a:defRPr>
+            </a:pPr>
+            <a:r>
+              <a:rPr sz="2175" b="1">
+                <a:solidFill>
+                  <a:srgbClr val="000000"/>
+                </a:solidFill>
+                <a:latin typeface="Arial"/>
+                <a:ea typeface="Arial"/>
+                <a:cs typeface="Arial"/>
+              </a:rPr>
+              <a:t>SAA</a:t>
+            </a:r>
+          </a:p>
+          <a:p xmlns:a="http://schemas.openxmlformats.org/drawingml/2006/main">
+            <a:pPr algn="ctr">
+              <a:defRPr sz="2175" b="1">
+                <a:solidFill>
+                  <a:srgbClr val="000000"/>
+                </a:solidFill>
+                <a:latin typeface="Arial"/>
+                <a:ea typeface="Arial"/>
+                <a:cs typeface="Arial"/>
+              </a:defRPr>
+            </a:pPr>
+            <a:r>
+              <a:rPr sz="2175" b="1">
+                <a:solidFill>
+                  <a:srgbClr val="000000"/>
+                </a:solidFill>
+                <a:latin typeface="Arial"/>
+                <a:ea typeface="Arial"/>
+                <a:cs typeface="Arial"/>
+              </a:rPr>
+              <a:t>Segment slopes</a:t>
+            </a:r>
+          </a:p>
+        </p:txBody>
+      </p:sp>
+      <p:sp>
+        <p:nvSpPr>
+          <p:cNvPr id="18" name="saa-sax-operator">
+            <a:extLst xmlns:a="http://schemas.openxmlformats.org/drawingml/2006/main">
+              <a:ext uri="{FF2B5EF4-FFF2-40B4-BE49-F238E27FC236}">
+                <a16:creationId xmlns:a16="http://schemas.microsoft.com/office/drawing/2014/main" id="{4104FE2B-9BA2-45BD-BC88-99ED567AC0D7}"/>
+              </a:ext>
+            </a:extLst>
+          </p:cNvPr>
+          <p:cNvSpPr>
+            <a:spLocks xmlns:a="http://schemas.openxmlformats.org/drawingml/2006/main" noGrp="1"/>
+          </p:cNvSpPr>
+          <p:nvPr/>
+        </p:nvSpPr>
+        <p:spPr>
+          <a:xfrm xmlns:a="http://schemas.openxmlformats.org/drawingml/2006/main">
+            <a:off x="5334000" y="3943350"/>
+            <a:ext cx="4572000" cy="1104900"/>
+          </a:xfrm>
+          <a:prstGeom xmlns:a="http://schemas.openxmlformats.org/drawingml/2006/main" prst="rect">
+            <a:avLst/>
+          </a:prstGeom>
+          <a:solidFill xmlns:a="http://schemas.openxmlformats.org/drawingml/2006/main">
+            <a:srgbClr val="FFFFFF"/>
+          </a:solidFill>
+          <a:ln xmlns:a="http://schemas.openxmlformats.org/drawingml/2006/main" w="17145">
+            <a:solidFill>
+              <a:srgbClr val="000000"/>
+            </a:solidFill>
+            <a:prstDash val="solid"/>
+          </a:ln>
+        </p:spPr>
+      </p:sp>
+      <p:sp>
+        <p:nvSpPr>
+          <p:cNvPr id="19" name="saa-sax-operator-text">
+            <a:extLst xmlns:a="http://schemas.openxmlformats.org/drawingml/2006/main">
+              <a:ext uri="{FF2B5EF4-FFF2-40B4-BE49-F238E27FC236}">
+                <a16:creationId xmlns:a16="http://schemas.microsoft.com/office/drawing/2014/main" id="{0CD17AE0-9381-42C8-AC70-36BA953E3865}"/>
+              </a:ext>
+            </a:extLst>
+          </p:cNvPr>
+          <p:cNvSpPr>
+            <a:spLocks xmlns:a="http://schemas.openxmlformats.org/drawingml/2006/main" noGrp="1"/>
+          </p:cNvSpPr>
+          <p:nvPr/>
+        </p:nvSpPr>
+        <p:spPr>
+          <a:xfrm xmlns:a="http://schemas.openxmlformats.org/drawingml/2006/main">
+            <a:off x="5476875" y="4086225"/>
+            <a:ext cx="4286250" cy="819150"/>
+          </a:xfrm>
+          <a:prstGeom xmlns:a="http://schemas.openxmlformats.org/drawingml/2006/main" prst="rect">
+            <a:avLst/>
+          </a:prstGeom>
+          <a:noFill xmlns:a="http://schemas.openxmlformats.org/drawingml/2006/main"/>
+          <a:ln xmlns:a="http://schemas.openxmlformats.org/drawingml/2006/main" w="0">
+            <a:noFill/>
+          </a:ln>
+        </p:spPr>
+        <p:txBody>
+          <a:bodyPr xmlns:a="http://schemas.openxmlformats.org/drawingml/2006/main" wrap="none" lIns="0" tIns="0" rIns="0" bIns="0" anchor="ctr">
+            <a:noAutofit/>
+          </a:bodyPr>
+          <a:lstStyle xmlns:a="http://schemas.openxmlformats.org/drawingml/2006/main"/>
+          <a:p xmlns:a="http://schemas.openxmlformats.org/drawingml/2006/main">
+            <a:pPr algn="ctr">
+              <a:defRPr sz="2175" b="0">
+                <a:solidFill>
+                  <a:srgbClr val="000000"/>
+                </a:solidFill>
+                <a:latin typeface="Arial"/>
+                <a:ea typeface="Arial"/>
+                <a:cs typeface="Arial"/>
+              </a:defRPr>
+            </a:pPr>
+            <a:r>
+              <a:rPr sz="2175" b="0">
+                <a:solidFill>
+                  <a:srgbClr val="000000"/>
+                </a:solidFill>
+                <a:latin typeface="Arial"/>
+                <a:ea typeface="Arial"/>
+                <a:cs typeface="Arial"/>
+              </a:rPr>
+              <a:t>Quantization</a:t>
+            </a:r>
+          </a:p>
+          <a:p xmlns:a="http://schemas.openxmlformats.org/drawingml/2006/main">
+            <a:pPr algn="ctr">
+              <a:defRPr sz="2175" b="0">
+                <a:solidFill>
+                  <a:srgbClr val="000000"/>
+                </a:solidFill>
+                <a:latin typeface="Arial"/>
+                <a:ea typeface="Arial"/>
+                <a:cs typeface="Arial"/>
+              </a:defRPr>
+            </a:pPr>
+            <a:r>
+              <a:rPr sz="2175" b="0">
+                <a:solidFill>
+                  <a:srgbClr val="000000"/>
+                </a:solidFill>
+                <a:latin typeface="Arial"/>
+                <a:ea typeface="Arial"/>
+                <a:cs typeface="Arial"/>
+              </a:rPr>
+              <a:t>Symbolization</a:t>
+            </a:r>
+          </a:p>
+        </p:txBody>
+      </p:sp>
+      <p:sp>
+        <p:nvSpPr>
+          <p:cNvPr id="20" name="saa-sax-output">
+            <a:extLst xmlns:a="http://schemas.openxmlformats.org/drawingml/2006/main">
+              <a:ext uri="{FF2B5EF4-FFF2-40B4-BE49-F238E27FC236}">
+                <a16:creationId xmlns:a16="http://schemas.microsoft.com/office/drawing/2014/main" id="{74E9FC0A-5BED-4B37-A564-5F23BBA64A96}"/>
+              </a:ext>
+            </a:extLst>
+          </p:cNvPr>
+          <p:cNvSpPr>
+            <a:spLocks xmlns:a="http://schemas.openxmlformats.org/drawingml/2006/main" noGrp="1"/>
+          </p:cNvSpPr>
+          <p:nvPr/>
+        </p:nvSpPr>
+        <p:spPr>
+          <a:xfrm xmlns:a="http://schemas.openxmlformats.org/drawingml/2006/main">
+            <a:off x="11144250" y="3943350"/>
+            <a:ext cx="3429000" cy="1104900"/>
+          </a:xfrm>
+          <a:prstGeom xmlns:a="http://schemas.openxmlformats.org/drawingml/2006/main" prst="rect">
+            <a:avLst/>
+          </a:prstGeom>
+          <a:solidFill xmlns:a="http://schemas.openxmlformats.org/drawingml/2006/main">
+            <a:srgbClr val="FFFFFF"/>
+          </a:solidFill>
+          <a:ln xmlns:a="http://schemas.openxmlformats.org/drawingml/2006/main" w="17145">
+            <a:solidFill>
+              <a:srgbClr val="000000"/>
+            </a:solidFill>
+            <a:prstDash val="solid"/>
+          </a:ln>
+        </p:spPr>
+      </p:sp>
+      <p:sp>
+        <p:nvSpPr>
+          <p:cNvPr id="21" name="saa-sax-output-text">
+            <a:extLst xmlns:a="http://schemas.openxmlformats.org/drawingml/2006/main">
+              <a:ext uri="{FF2B5EF4-FFF2-40B4-BE49-F238E27FC236}">
+                <a16:creationId xmlns:a16="http://schemas.microsoft.com/office/drawing/2014/main" id="{3E362AC9-9CFF-4BC2-A928-B5629611A9F3}"/>
+              </a:ext>
+            </a:extLst>
+          </p:cNvPr>
+          <p:cNvSpPr>
+            <a:spLocks xmlns:a="http://schemas.openxmlformats.org/drawingml/2006/main" noGrp="1"/>
+          </p:cNvSpPr>
+          <p:nvPr/>
+        </p:nvSpPr>
+        <p:spPr>
+          <a:xfrm xmlns:a="http://schemas.openxmlformats.org/drawingml/2006/main">
+            <a:off x="11287125" y="4086225"/>
+            <a:ext cx="3143250" cy="819150"/>
+          </a:xfrm>
+          <a:prstGeom xmlns:a="http://schemas.openxmlformats.org/drawingml/2006/main" prst="rect">
+            <a:avLst/>
+          </a:prstGeom>
+          <a:noFill xmlns:a="http://schemas.openxmlformats.org/drawingml/2006/main"/>
+          <a:ln xmlns:a="http://schemas.openxmlformats.org/drawingml/2006/main" w="0">
+            <a:noFill/>
+          </a:ln>
+        </p:spPr>
+        <p:txBody>
+          <a:bodyPr xmlns:a="http://schemas.openxmlformats.org/drawingml/2006/main" wrap="none" lIns="0" tIns="0" rIns="0" bIns="0" anchor="ctr">
+            <a:noAutofit/>
+          </a:bodyPr>
+          <a:lstStyle xmlns:a="http://schemas.openxmlformats.org/drawingml/2006/main"/>
+          <a:p xmlns:a="http://schemas.openxmlformats.org/drawingml/2006/main">
+            <a:pPr algn="ctr">
+              <a:defRPr sz="2175" b="1">
+                <a:solidFill>
+                  <a:srgbClr val="000000"/>
+                </a:solidFill>
+                <a:latin typeface="Arial"/>
+                <a:ea typeface="Arial"/>
+                <a:cs typeface="Arial"/>
+              </a:defRPr>
+            </a:pPr>
+            <a:r>
+              <a:rPr sz="2175" b="1">
+                <a:solidFill>
+                  <a:srgbClr val="000000"/>
+                </a:solidFill>
+                <a:latin typeface="Arial"/>
+                <a:ea typeface="Arial"/>
+                <a:cs typeface="Arial"/>
+              </a:rPr>
+              <a:t>SAA-SAX</a:t>
+            </a:r>
+          </a:p>
+          <a:p xmlns:a="http://schemas.openxmlformats.org/drawingml/2006/main">
+            <a:pPr algn="ctr">
+              <a:defRPr sz="2175" b="1">
+                <a:solidFill>
+                  <a:srgbClr val="000000"/>
+                </a:solidFill>
+                <a:latin typeface="Arial"/>
+                <a:ea typeface="Arial"/>
+                <a:cs typeface="Arial"/>
+              </a:defRPr>
+            </a:pPr>
+            <a:r>
+              <a:rPr sz="2175" b="1">
+                <a:solidFill>
+                  <a:srgbClr val="000000"/>
+                </a:solidFill>
+                <a:latin typeface="Arial"/>
+                <a:ea typeface="Arial"/>
+                <a:cs typeface="Arial"/>
+              </a:rPr>
+              <a:t>Symbolic sequence</a:t>
+            </a:r>
+          </a:p>
+        </p:txBody>
+      </p:sp>
+      <p:sp>
+        <p:nvSpPr>
+          <p:cNvPr id="22" name="saa-sax-caption">
+            <a:extLst xmlns:a="http://schemas.openxmlformats.org/drawingml/2006/main">
+              <a:ext uri="{FF2B5EF4-FFF2-40B4-BE49-F238E27FC236}">
+                <a16:creationId xmlns:a16="http://schemas.microsoft.com/office/drawing/2014/main" id="{4C204789-43E1-48BD-BDBA-7F238A067618}"/>
+              </a:ext>
+            </a:extLst>
+          </p:cNvPr>
+          <p:cNvSpPr>
+            <a:spLocks xmlns:a="http://schemas.openxmlformats.org/drawingml/2006/main" noGrp="1"/>
+          </p:cNvSpPr>
+          <p:nvPr/>
+        </p:nvSpPr>
+        <p:spPr>
+          <a:xfrm xmlns:a="http://schemas.openxmlformats.org/drawingml/2006/main">
+            <a:off x="523875" y="5124450"/>
+            <a:ext cx="14192250" cy="323850"/>
+          </a:xfrm>
+          <a:prstGeom xmlns:a="http://schemas.openxmlformats.org/drawingml/2006/main" prst="rect">
+            <a:avLst/>
+          </a:prstGeom>
+          <a:noFill xmlns:a="http://schemas.openxmlformats.org/drawingml/2006/main"/>
+          <a:ln xmlns:a="http://schemas.openxmlformats.org/drawingml/2006/main" w="0">
+            <a:noFill/>
+          </a:ln>
+        </p:spPr>
+        <p:txBody>
+          <a:bodyPr xmlns:a="http://schemas.openxmlformats.org/drawingml/2006/main" wrap="none" lIns="0" tIns="0" rIns="0" bIns="0" anchor="ctr">
+            <a:noAutofit/>
+          </a:bodyPr>
+          <a:lstStyle xmlns:a="http://schemas.openxmlformats.org/drawingml/2006/main"/>
+          <a:p xmlns:a="http://schemas.openxmlformats.org/drawingml/2006/main">
+            <a:pPr algn="ctr">
+              <a:defRPr sz="1875" b="0">
+                <a:solidFill>
+                  <a:srgbClr val="000000"/>
+                </a:solidFill>
+                <a:latin typeface="Arial"/>
+                <a:ea typeface="Arial"/>
+                <a:cs typeface="Arial"/>
+              </a:defRPr>
+            </a:pPr>
+            <a:r>
+              <a:rPr sz="1875" b="0">
+                <a:solidFill>
+                  <a:srgbClr val="000000"/>
+                </a:solidFill>
+                <a:latin typeface="Arial"/>
+                <a:ea typeface="Arial"/>
+                <a:cs typeface="Arial"/>
+              </a:rPr>
+              <a:t>SAA-SAX uses local slopes to retain trend information before symbolic encoding.</a:t>
+            </a:r>
+          </a:p>
+        </p:txBody>
+      </p:sp>
+      <p:sp>
+        <p:nvSpPr>
+          <p:cNvPr id="23" name="rp-rqa-heading">
+            <a:extLst xmlns:a="http://schemas.openxmlformats.org/drawingml/2006/main">
+              <a:ext uri="{FF2B5EF4-FFF2-40B4-BE49-F238E27FC236}">
+                <a16:creationId xmlns:a16="http://schemas.microsoft.com/office/drawing/2014/main" id="{A07DF5E0-805E-46E3-9DC2-64D7788A787D}"/>
+              </a:ext>
+            </a:extLst>
+          </p:cNvPr>
+          <p:cNvSpPr>
+            <a:spLocks xmlns:a="http://schemas.openxmlformats.org/drawingml/2006/main" noGrp="1"/>
+          </p:cNvSpPr>
+          <p:nvPr/>
+        </p:nvSpPr>
+        <p:spPr>
+          <a:xfrm xmlns:a="http://schemas.openxmlformats.org/drawingml/2006/main">
+            <a:off x="381000" y="5505450"/>
+            <a:ext cx="14478000" cy="342900"/>
+          </a:xfrm>
+          <a:prstGeom xmlns:a="http://schemas.openxmlformats.org/drawingml/2006/main" prst="rect">
+            <a:avLst/>
+          </a:prstGeom>
+          <a:noFill xmlns:a="http://schemas.openxmlformats.org/drawingml/2006/main"/>
+          <a:ln xmlns:a="http://schemas.openxmlformats.org/drawingml/2006/main" w="0">
+            <a:noFill/>
+          </a:ln>
+        </p:spPr>
+        <p:txBody>
+          <a:bodyPr xmlns:a="http://schemas.openxmlformats.org/drawingml/2006/main" wrap="none" lIns="0" tIns="0" rIns="0" bIns="0" anchor="ctr">
+            <a:noAutofit/>
+          </a:bodyPr>
+          <a:lstStyle xmlns:a="http://schemas.openxmlformats.org/drawingml/2006/main"/>
+          <a:p xmlns:a="http://schemas.openxmlformats.org/drawingml/2006/main">
+            <a:pPr algn="ctr">
+              <a:defRPr sz="2175" b="1">
+                <a:solidFill>
+                  <a:srgbClr val="000000"/>
+                </a:solidFill>
+                <a:latin typeface="Arial"/>
+                <a:ea typeface="Arial"/>
+                <a:cs typeface="Arial"/>
+              </a:defRPr>
+            </a:pPr>
+            <a:r>
+              <a:rPr sz="2175" b="1">
+                <a:solidFill>
+                  <a:srgbClr val="000000"/>
+                </a:solidFill>
+                <a:latin typeface="Arial"/>
+                <a:ea typeface="Arial"/>
+                <a:cs typeface="Arial"/>
+              </a:rPr>
+              <a:t>Structural representation and dynamical features</a:t>
+            </a:r>
+          </a:p>
+        </p:txBody>
+      </p:sp>
+      <p:sp>
+        <p:nvSpPr>
+          <p:cNvPr id="24" name="rp-rqa-line-1">
+            <a:extLst xmlns:a="http://schemas.openxmlformats.org/drawingml/2006/main">
+              <a:ext uri="{FF2B5EF4-FFF2-40B4-BE49-F238E27FC236}">
+                <a16:creationId xmlns:a16="http://schemas.microsoft.com/office/drawing/2014/main" id="{12ED90C1-5478-4D01-9C41-F5ACB011B326}"/>
+              </a:ext>
+            </a:extLst>
+          </p:cNvPr>
+          <p:cNvSpPr>
+            <a:spLocks xmlns:a="http://schemas.openxmlformats.org/drawingml/2006/main" noGrp="1"/>
+          </p:cNvSpPr>
+          <p:nvPr/>
+        </p:nvSpPr>
+        <p:spPr>
+          <a:xfrm xmlns:a="http://schemas.openxmlformats.org/drawingml/2006/main">
+            <a:off x="4095750" y="6438900"/>
+            <a:ext cx="1238250" cy="0"/>
+          </a:xfrm>
+          <a:prstGeom xmlns:a="http://schemas.openxmlformats.org/drawingml/2006/main" prst="line">
+            <a:avLst/>
+          </a:prstGeom>
+          <a:noFill xmlns:a="http://schemas.openxmlformats.org/drawingml/2006/main"/>
+          <a:ln xmlns:a="http://schemas.openxmlformats.org/drawingml/2006/main" w="17145">
+            <a:solidFill>
+              <a:srgbClr val="000000"/>
+            </a:solidFill>
+            <a:prstDash val="solid"/>
+          </a:ln>
+        </p:spPr>
+      </p:sp>
+      <p:sp>
+        <p:nvSpPr>
+          <p:cNvPr id="25" name="rp-rqa-line-2">
+            <a:extLst xmlns:a="http://schemas.openxmlformats.org/drawingml/2006/main">
+              <a:ext uri="{FF2B5EF4-FFF2-40B4-BE49-F238E27FC236}">
+                <a16:creationId xmlns:a16="http://schemas.microsoft.com/office/drawing/2014/main" id="{7F2E9366-F831-48CC-AEAC-CA9516A85838}"/>
+              </a:ext>
+            </a:extLst>
+          </p:cNvPr>
+          <p:cNvSpPr>
+            <a:spLocks xmlns:a="http://schemas.openxmlformats.org/drawingml/2006/main" noGrp="1"/>
+          </p:cNvSpPr>
+          <p:nvPr/>
+        </p:nvSpPr>
+        <p:spPr>
+          <a:xfrm xmlns:a="http://schemas.openxmlformats.org/drawingml/2006/main">
+            <a:off x="9906000" y="6438900"/>
+            <a:ext cx="1238250" cy="0"/>
+          </a:xfrm>
+          <a:prstGeom xmlns:a="http://schemas.openxmlformats.org/drawingml/2006/main" prst="line">
+            <a:avLst/>
+          </a:prstGeom>
+          <a:noFill xmlns:a="http://schemas.openxmlformats.org/drawingml/2006/main"/>
+          <a:ln xmlns:a="http://schemas.openxmlformats.org/drawingml/2006/main" w="17145">
+            <a:solidFill>
+              <a:srgbClr val="000000"/>
+            </a:solidFill>
+            <a:prstDash val="solid"/>
+          </a:ln>
+        </p:spPr>
+      </p:sp>
+      <p:sp>
+        <p:nvSpPr>
+          <p:cNvPr id="26" name="rp-rqa-input">
+            <a:extLst xmlns:a="http://schemas.openxmlformats.org/drawingml/2006/main">
+              <a:ext uri="{FF2B5EF4-FFF2-40B4-BE49-F238E27FC236}">
+                <a16:creationId xmlns:a16="http://schemas.microsoft.com/office/drawing/2014/main" id="{24986991-4213-4088-ADF3-572C550ABAFB}"/>
+              </a:ext>
+            </a:extLst>
+          </p:cNvPr>
+          <p:cNvSpPr>
+            <a:spLocks xmlns:a="http://schemas.openxmlformats.org/drawingml/2006/main" noGrp="1"/>
+          </p:cNvSpPr>
+          <p:nvPr/>
+        </p:nvSpPr>
+        <p:spPr>
+          <a:xfrm xmlns:a="http://schemas.openxmlformats.org/drawingml/2006/main">
+            <a:off x="666750" y="5886450"/>
+            <a:ext cx="3429000" cy="1104900"/>
+          </a:xfrm>
+          <a:prstGeom xmlns:a="http://schemas.openxmlformats.org/drawingml/2006/main" prst="rect">
+            <a:avLst/>
+          </a:prstGeom>
+          <a:solidFill xmlns:a="http://schemas.openxmlformats.org/drawingml/2006/main">
+            <a:srgbClr val="FFFFFF"/>
+          </a:solidFill>
+          <a:ln xmlns:a="http://schemas.openxmlformats.org/drawingml/2006/main" w="17145">
+            <a:solidFill>
+              <a:srgbClr val="000000"/>
+            </a:solidFill>
+            <a:prstDash val="solid"/>
+          </a:ln>
+        </p:spPr>
+      </p:sp>
+      <p:sp>
+        <p:nvSpPr>
+          <p:cNvPr id="27" name="rp-rqa-input-text">
+            <a:extLst xmlns:a="http://schemas.openxmlformats.org/drawingml/2006/main">
+              <a:ext uri="{FF2B5EF4-FFF2-40B4-BE49-F238E27FC236}">
+                <a16:creationId xmlns:a16="http://schemas.microsoft.com/office/drawing/2014/main" id="{7FA13EE3-46C7-4A0E-964D-61482CCA1B8D}"/>
+              </a:ext>
+            </a:extLst>
+          </p:cNvPr>
+          <p:cNvSpPr>
+            <a:spLocks xmlns:a="http://schemas.openxmlformats.org/drawingml/2006/main" noGrp="1"/>
+          </p:cNvSpPr>
+          <p:nvPr/>
+        </p:nvSpPr>
+        <p:spPr>
+          <a:xfrm xmlns:a="http://schemas.openxmlformats.org/drawingml/2006/main">
+            <a:off x="809625" y="6029325"/>
+            <a:ext cx="3143250" cy="819150"/>
+          </a:xfrm>
+          <a:prstGeom xmlns:a="http://schemas.openxmlformats.org/drawingml/2006/main" prst="rect">
+            <a:avLst/>
+          </a:prstGeom>
+          <a:noFill xmlns:a="http://schemas.openxmlformats.org/drawingml/2006/main"/>
+          <a:ln xmlns:a="http://schemas.openxmlformats.org/drawingml/2006/main" w="0">
+            <a:noFill/>
+          </a:ln>
+        </p:spPr>
+        <p:txBody>
+          <a:bodyPr xmlns:a="http://schemas.openxmlformats.org/drawingml/2006/main" wrap="none" lIns="0" tIns="0" rIns="0" bIns="0" anchor="ctr">
+            <a:noAutofit/>
+          </a:bodyPr>
+          <a:lstStyle xmlns:a="http://schemas.openxmlformats.org/drawingml/2006/main"/>
+          <a:p xmlns:a="http://schemas.openxmlformats.org/drawingml/2006/main">
+            <a:pPr algn="ctr">
+              <a:defRPr sz="2175" b="1">
+                <a:solidFill>
+                  <a:srgbClr val="000000"/>
+                </a:solidFill>
+                <a:latin typeface="Arial"/>
+                <a:ea typeface="Arial"/>
+                <a:cs typeface="Arial"/>
+              </a:defRPr>
+            </a:pPr>
+            <a:r>
+              <a:rPr sz="2175" b="1">
+                <a:solidFill>
+                  <a:srgbClr val="000000"/>
+                </a:solidFill>
+                <a:latin typeface="Arial"/>
+                <a:ea typeface="Arial"/>
+                <a:cs typeface="Arial"/>
+              </a:rPr>
+              <a:t>Recurrence plot</a:t>
+            </a:r>
+          </a:p>
+          <a:p xmlns:a="http://schemas.openxmlformats.org/drawingml/2006/main">
+            <a:pPr algn="ctr">
+              <a:defRPr sz="2175" b="1">
+                <a:solidFill>
+                  <a:srgbClr val="000000"/>
+                </a:solidFill>
+                <a:latin typeface="Arial"/>
+                <a:ea typeface="Arial"/>
+                <a:cs typeface="Arial"/>
+              </a:defRPr>
+            </a:pPr>
+            <a:r>
+              <a:rPr sz="2175" b="1">
+                <a:solidFill>
+                  <a:srgbClr val="000000"/>
+                </a:solidFill>
+                <a:latin typeface="Arial"/>
+                <a:ea typeface="Arial"/>
+                <a:cs typeface="Arial"/>
+              </a:rPr>
+              <a:t>Matrix representation</a:t>
+            </a:r>
+          </a:p>
+        </p:txBody>
+      </p:sp>
+      <p:sp>
+        <p:nvSpPr>
+          <p:cNvPr id="28" name="rp-rqa-operator">
+            <a:extLst xmlns:a="http://schemas.openxmlformats.org/drawingml/2006/main">
+              <a:ext uri="{FF2B5EF4-FFF2-40B4-BE49-F238E27FC236}">
+                <a16:creationId xmlns:a16="http://schemas.microsoft.com/office/drawing/2014/main" id="{06A03BA5-8973-4E8B-8726-7CA271E01177}"/>
+              </a:ext>
+            </a:extLst>
+          </p:cNvPr>
+          <p:cNvSpPr>
+            <a:spLocks xmlns:a="http://schemas.openxmlformats.org/drawingml/2006/main" noGrp="1"/>
+          </p:cNvSpPr>
+          <p:nvPr/>
+        </p:nvSpPr>
+        <p:spPr>
+          <a:xfrm xmlns:a="http://schemas.openxmlformats.org/drawingml/2006/main">
+            <a:off x="5334000" y="5886450"/>
+            <a:ext cx="4572000" cy="1104900"/>
+          </a:xfrm>
+          <a:prstGeom xmlns:a="http://schemas.openxmlformats.org/drawingml/2006/main" prst="rect">
+            <a:avLst/>
+          </a:prstGeom>
+          <a:solidFill xmlns:a="http://schemas.openxmlformats.org/drawingml/2006/main">
+            <a:srgbClr val="FFFFFF"/>
+          </a:solidFill>
+          <a:ln xmlns:a="http://schemas.openxmlformats.org/drawingml/2006/main" w="17145">
+            <a:solidFill>
+              <a:srgbClr val="000000"/>
+            </a:solidFill>
+            <a:prstDash val="solid"/>
+          </a:ln>
+        </p:spPr>
+      </p:sp>
+      <p:sp>
+        <p:nvSpPr>
+          <p:cNvPr id="29" name="rp-rqa-operator-text">
+            <a:extLst xmlns:a="http://schemas.openxmlformats.org/drawingml/2006/main">
+              <a:ext uri="{FF2B5EF4-FFF2-40B4-BE49-F238E27FC236}">
+                <a16:creationId xmlns:a16="http://schemas.microsoft.com/office/drawing/2014/main" id="{AB24C97E-A249-41F0-BEAA-01D8B942519E}"/>
+              </a:ext>
+            </a:extLst>
+          </p:cNvPr>
+          <p:cNvSpPr>
+            <a:spLocks xmlns:a="http://schemas.openxmlformats.org/drawingml/2006/main" noGrp="1"/>
+          </p:cNvSpPr>
+          <p:nvPr/>
+        </p:nvSpPr>
+        <p:spPr>
+          <a:xfrm xmlns:a="http://schemas.openxmlformats.org/drawingml/2006/main">
+            <a:off x="5476875" y="6029325"/>
+            <a:ext cx="4286250" cy="819150"/>
+          </a:xfrm>
+          <a:prstGeom xmlns:a="http://schemas.openxmlformats.org/drawingml/2006/main" prst="rect">
+            <a:avLst/>
+          </a:prstGeom>
+          <a:noFill xmlns:a="http://schemas.openxmlformats.org/drawingml/2006/main"/>
+          <a:ln xmlns:a="http://schemas.openxmlformats.org/drawingml/2006/main" w="0">
+            <a:noFill/>
+          </a:ln>
+        </p:spPr>
+        <p:txBody>
+          <a:bodyPr xmlns:a="http://schemas.openxmlformats.org/drawingml/2006/main" wrap="none" lIns="0" tIns="0" rIns="0" bIns="0" anchor="ctr">
+            <a:noAutofit/>
+          </a:bodyPr>
+          <a:lstStyle xmlns:a="http://schemas.openxmlformats.org/drawingml/2006/main"/>
+          <a:p xmlns:a="http://schemas.openxmlformats.org/drawingml/2006/main">
+            <a:pPr algn="ctr">
+              <a:defRPr sz="2175" b="0">
+                <a:solidFill>
+                  <a:srgbClr val="000000"/>
+                </a:solidFill>
+                <a:latin typeface="Arial"/>
+                <a:ea typeface="Arial"/>
+                <a:cs typeface="Arial"/>
+              </a:defRPr>
+            </a:pPr>
+            <a:r>
+              <a:rPr sz="2175" b="0">
+                <a:solidFill>
+                  <a:srgbClr val="000000"/>
+                </a:solidFill>
+                <a:latin typeface="Arial"/>
+                <a:ea typeface="Arial"/>
+                <a:cs typeface="Arial"/>
+              </a:rPr>
+              <a:t>Recurrence statistics</a:t>
+            </a:r>
+          </a:p>
+        </p:txBody>
+      </p:sp>
+      <p:sp>
+        <p:nvSpPr>
+          <p:cNvPr id="30" name="rp-rqa-output">
+            <a:extLst xmlns:a="http://schemas.openxmlformats.org/drawingml/2006/main">
+              <a:ext uri="{FF2B5EF4-FFF2-40B4-BE49-F238E27FC236}">
+                <a16:creationId xmlns:a16="http://schemas.microsoft.com/office/drawing/2014/main" id="{906965BC-CC7F-4D06-8770-837109032811}"/>
+              </a:ext>
+            </a:extLst>
+          </p:cNvPr>
+          <p:cNvSpPr>
+            <a:spLocks xmlns:a="http://schemas.openxmlformats.org/drawingml/2006/main" noGrp="1"/>
+          </p:cNvSpPr>
+          <p:nvPr/>
+        </p:nvSpPr>
+        <p:spPr>
+          <a:xfrm xmlns:a="http://schemas.openxmlformats.org/drawingml/2006/main">
+            <a:off x="11144250" y="5886450"/>
+            <a:ext cx="3429000" cy="1104900"/>
+          </a:xfrm>
+          <a:prstGeom xmlns:a="http://schemas.openxmlformats.org/drawingml/2006/main" prst="rect">
+            <a:avLst/>
+          </a:prstGeom>
+          <a:solidFill xmlns:a="http://schemas.openxmlformats.org/drawingml/2006/main">
+            <a:srgbClr val="FFFFFF"/>
+          </a:solidFill>
+          <a:ln xmlns:a="http://schemas.openxmlformats.org/drawingml/2006/main" w="17145">
+            <a:solidFill>
+              <a:srgbClr val="000000"/>
+            </a:solidFill>
+            <a:prstDash val="solid"/>
+          </a:ln>
+        </p:spPr>
+      </p:sp>
+      <p:sp>
+        <p:nvSpPr>
+          <p:cNvPr id="31" name="rp-rqa-output-text">
+            <a:extLst xmlns:a="http://schemas.openxmlformats.org/drawingml/2006/main">
+              <a:ext uri="{FF2B5EF4-FFF2-40B4-BE49-F238E27FC236}">
+                <a16:creationId xmlns:a16="http://schemas.microsoft.com/office/drawing/2014/main" id="{86B948DF-CD64-447E-97E8-7651784300D2}"/>
+              </a:ext>
+            </a:extLst>
+          </p:cNvPr>
+          <p:cNvSpPr>
+            <a:spLocks xmlns:a="http://schemas.openxmlformats.org/drawingml/2006/main" noGrp="1"/>
+          </p:cNvSpPr>
+          <p:nvPr/>
+        </p:nvSpPr>
+        <p:spPr>
+          <a:xfrm xmlns:a="http://schemas.openxmlformats.org/drawingml/2006/main">
+            <a:off x="11287125" y="6029325"/>
+            <a:ext cx="3143250" cy="819150"/>
+          </a:xfrm>
+          <a:prstGeom xmlns:a="http://schemas.openxmlformats.org/drawingml/2006/main" prst="rect">
+            <a:avLst/>
+          </a:prstGeom>
+          <a:noFill xmlns:a="http://schemas.openxmlformats.org/drawingml/2006/main"/>
+          <a:ln xmlns:a="http://schemas.openxmlformats.org/drawingml/2006/main" w="0">
+            <a:noFill/>
+          </a:ln>
+        </p:spPr>
+        <p:txBody>
+          <a:bodyPr xmlns:a="http://schemas.openxmlformats.org/drawingml/2006/main" wrap="none" lIns="0" tIns="0" rIns="0" bIns="0" anchor="ctr">
+            <a:noAutofit/>
+          </a:bodyPr>
+          <a:lstStyle xmlns:a="http://schemas.openxmlformats.org/drawingml/2006/main"/>
+          <a:p xmlns:a="http://schemas.openxmlformats.org/drawingml/2006/main">
+            <a:pPr algn="ctr">
+              <a:defRPr sz="2175" b="1">
+                <a:solidFill>
+                  <a:srgbClr val="000000"/>
+                </a:solidFill>
+                <a:latin typeface="Arial"/>
+                <a:ea typeface="Arial"/>
+                <a:cs typeface="Arial"/>
+              </a:defRPr>
+            </a:pPr>
+            <a:r>
+              <a:rPr sz="2175" b="1">
+                <a:solidFill>
+                  <a:srgbClr val="000000"/>
+                </a:solidFill>
+                <a:latin typeface="Arial"/>
+                <a:ea typeface="Arial"/>
+                <a:cs typeface="Arial"/>
+              </a:rPr>
+              <a:t>RQA</a:t>
+            </a:r>
+          </a:p>
+          <a:p xmlns:a="http://schemas.openxmlformats.org/drawingml/2006/main">
+            <a:pPr algn="ctr">
+              <a:defRPr sz="2175" b="1">
+                <a:solidFill>
+                  <a:srgbClr val="000000"/>
+                </a:solidFill>
+                <a:latin typeface="Arial"/>
+                <a:ea typeface="Arial"/>
+                <a:cs typeface="Arial"/>
+              </a:defRPr>
+            </a:pPr>
+            <a:r>
+              <a:rPr sz="2175" b="1">
+                <a:solidFill>
+                  <a:srgbClr val="000000"/>
+                </a:solidFill>
+                <a:latin typeface="Arial"/>
+                <a:ea typeface="Arial"/>
+                <a:cs typeface="Arial"/>
+              </a:rPr>
+              <a:t>Numerical features</a:t>
+            </a:r>
+          </a:p>
+        </p:txBody>
+      </p:sp>
+      <p:sp>
+        <p:nvSpPr>
+          <p:cNvPr id="32" name="rp-rqa-caption">
+            <a:extLst xmlns:a="http://schemas.openxmlformats.org/drawingml/2006/main">
+              <a:ext uri="{FF2B5EF4-FFF2-40B4-BE49-F238E27FC236}">
+                <a16:creationId xmlns:a16="http://schemas.microsoft.com/office/drawing/2014/main" id="{BE780CBD-B9D1-46A1-867E-789DFAAC9059}"/>
+              </a:ext>
+            </a:extLst>
+          </p:cNvPr>
+          <p:cNvSpPr>
+            <a:spLocks xmlns:a="http://schemas.openxmlformats.org/drawingml/2006/main" noGrp="1"/>
+          </p:cNvSpPr>
+          <p:nvPr/>
+        </p:nvSpPr>
+        <p:spPr>
+          <a:xfrm xmlns:a="http://schemas.openxmlformats.org/drawingml/2006/main">
+            <a:off x="523875" y="7067550"/>
+            <a:ext cx="14192250" cy="323850"/>
+          </a:xfrm>
+          <a:prstGeom xmlns:a="http://schemas.openxmlformats.org/drawingml/2006/main" prst="rect">
+            <a:avLst/>
+          </a:prstGeom>
+          <a:noFill xmlns:a="http://schemas.openxmlformats.org/drawingml/2006/main"/>
+          <a:ln xmlns:a="http://schemas.openxmlformats.org/drawingml/2006/main" w="0">
+            <a:noFill/>
+          </a:ln>
+        </p:spPr>
+        <p:txBody>
+          <a:bodyPr xmlns:a="http://schemas.openxmlformats.org/drawingml/2006/main" wrap="none" lIns="0" tIns="0" rIns="0" bIns="0" anchor="ctr">
+            <a:noAutofit/>
+          </a:bodyPr>
+          <a:lstStyle xmlns:a="http://schemas.openxmlformats.org/drawingml/2006/main"/>
+          <a:p xmlns:a="http://schemas.openxmlformats.org/drawingml/2006/main">
+            <a:pPr algn="ctr">
+              <a:defRPr sz="1875" b="0">
+                <a:solidFill>
+                  <a:srgbClr val="000000"/>
+                </a:solidFill>
+                <a:latin typeface="Arial"/>
+                <a:ea typeface="Arial"/>
+                <a:cs typeface="Arial"/>
+              </a:defRPr>
+            </a:pPr>
+            <a:r>
+              <a:rPr sz="1875" b="0">
+                <a:solidFill>
+                  <a:srgbClr val="000000"/>
+                </a:solidFill>
+                <a:latin typeface="Arial"/>
+                <a:ea typeface="Arial"/>
+                <a:cs typeface="Arial"/>
+              </a:rPr>
+              <a:t>RQA summarizes recurrence structure, including recurrence rate and determinism.</a:t>
+            </a:r>
+          </a:p>
+        </p:txBody>
+      </p:sp>
+      <p:sp>
+        <p:nvSpPr>
+          <p:cNvPr id="33" name="composition-footer">
+            <a:extLst xmlns:a="http://schemas.openxmlformats.org/drawingml/2006/main">
+              <a:ext uri="{FF2B5EF4-FFF2-40B4-BE49-F238E27FC236}">
+                <a16:creationId xmlns:a16="http://schemas.microsoft.com/office/drawing/2014/main" id="{BDAAD4DB-374D-42A8-9CC2-EC13BAA94974}"/>
+              </a:ext>
+            </a:extLst>
+          </p:cNvPr>
+          <p:cNvSpPr>
+            <a:spLocks xmlns:a="http://schemas.openxmlformats.org/drawingml/2006/main" noGrp="1"/>
+          </p:cNvSpPr>
+          <p:nvPr/>
+        </p:nvSpPr>
+        <p:spPr>
+          <a:xfrm xmlns:a="http://schemas.openxmlformats.org/drawingml/2006/main">
+            <a:off x="476250" y="7696200"/>
+            <a:ext cx="14287500" cy="381000"/>
+          </a:xfrm>
+          <a:prstGeom xmlns:a="http://schemas.openxmlformats.org/drawingml/2006/main" prst="rect">
+            <a:avLst/>
+          </a:prstGeom>
+          <a:noFill xmlns:a="http://schemas.openxmlformats.org/drawingml/2006/main"/>
+          <a:ln xmlns:a="http://schemas.openxmlformats.org/drawingml/2006/main" w="0">
+            <a:noFill/>
+          </a:ln>
+        </p:spPr>
+        <p:txBody>
+          <a:bodyPr xmlns:a="http://schemas.openxmlformats.org/drawingml/2006/main" wrap="none" lIns="0" tIns="0" rIns="0" bIns="0" anchor="ctr">
+            <a:noAutofit/>
+          </a:bodyPr>
+          <a:lstStyle xmlns:a="http://schemas.openxmlformats.org/drawingml/2006/main"/>
+          <a:p xmlns:a="http://schemas.openxmlformats.org/drawingml/2006/main">
+            <a:pPr algn="ctr">
+              <a:defRPr sz="1875" b="0">
+                <a:solidFill>
+                  <a:srgbClr val="000000"/>
+                </a:solidFill>
+                <a:latin typeface="Arial"/>
+                <a:ea typeface="Arial"/>
+                <a:cs typeface="Arial"/>
+              </a:defRPr>
+            </a:pPr>
+            <a:r>
+              <a:rPr sz="1875" b="0">
+                <a:solidFill>
+                  <a:srgbClr val="000000"/>
+                </a:solidFill>
+                <a:latin typeface="Arial"/>
+                <a:ea typeface="Arial"/>
+                <a:cs typeface="Arial"/>
+              </a:rPr>
+              <a:t>Compression depends on the encoding and retained information. Each composition can support several tasks.</a:t>
             </a:r>
           </a:p>
         </p:txBody>
@@ -2713,7 +5517,7 @@
     </p:spTree>
     <p:extLst>
       <p:ext uri="{BB962C8B-B14F-4D97-AF65-F5344CB8AC3E}">
-        <p14:creationId xmlns:p14="http://schemas.microsoft.com/office/powerpoint/2010/main" val="777473811"/>
+        <p14:creationId xmlns:p14="http://schemas.microsoft.com/office/powerpoint/2010/main" val="770811684"/>
       </p:ext>
     </p:extLst>
   </p:cSld>
